--- a/VMD UVMD Comparison.pptx
+++ b/VMD UVMD Comparison.pptx
@@ -2998,6 +2998,297 @@
           </a:p>
         </p:txBody>
       </p:sp>
+      <p:sp>
+        <p:nvSpPr>
+          <p:cNvPr id="5" name="Shape 2"/>
+          <p:cNvSpPr/>
+          <p:nvPr/>
+        </p:nvSpPr>
+        <p:spPr>
+          <a:xfrm>
+            <a:off x="548640" y="1600200"/>
+            <a:ext cx="6583680" cy="914400"/>
+          </a:xfrm>
+          <a:prstGeom prst="roundRect">
+            <a:avLst>
+              <a:gd name="adj" fmla="val 10000"/>
+            </a:avLst>
+          </a:prstGeom>
+          <a:solidFill>
+            <a:srgbClr val="121A2B"/>
+          </a:solidFill>
+          <a:ln w="12700">
+            <a:solidFill>
+              <a:srgbClr val="121A2B"/>
+            </a:solidFill>
+            <a:prstDash val="solid"/>
+          </a:ln>
+        </p:spPr>
+      </p:sp>
+      <p:sp>
+        <p:nvSpPr>
+          <p:cNvPr id="6" name="Text 3"/>
+          <p:cNvSpPr txBox="1"/>
+          <p:nvPr/>
+        </p:nvSpPr>
+        <p:spPr>
+          <a:xfrm>
+            <a:off x="822960" y="1691640"/>
+            <a:ext cx="6035040" cy="731520"/>
+          </a:xfrm>
+          <a:prstGeom prst="rect">
+            <a:avLst/>
+          </a:prstGeom>
+          <a:noFill/>
+          <a:ln/>
+        </p:spPr>
+        <p:txBody>
+          <a:bodyPr wrap="square" lIns="0" tIns="0" rIns="0" bIns="0" rtlCol="0" anchor="ctr"/>
+          <a:lstStyle/>
+          <a:p>
+            <a:pPr algn="l" indent="0" marL="0">
+              <a:spcAft>
+                <a:spcPts val="1000"/>
+              </a:spcAft>
+              <a:buNone/>
+            </a:pPr>
+            <mc:AlternateContent xmlns:mc="http://schemas.openxmlformats.org/markup-compatibility/2006">
+              <mc:Choice xmlns:a14="http://schemas.microsoft.com/office/drawing/2010/main" Requires="a14">
+                <a14:m>
+                  <m:oMathPara xmlns:m="http://schemas.openxmlformats.org/officeDocument/2006/math">
+                    <m:oMathParaPr>
+                      <m:jc m:val="left"/>
+                    </m:oMathParaPr>
+                    <m:oMath>
+                      <m:r>
+                        <a:rPr lang="en-US" sz="2400" i="1">
+                          <a:solidFill>
+                            <a:srgbClr val="F4F1EA"/>
+                          </a:solidFill>
+                          <a:latin typeface="Cambria Math"/>
+                          <a:cs typeface="Cambria Math"/>
+                        </a:rPr>
+                        <m:t>𝓛=</m:t>
+                      </m:r>
+                      <m:nary>
+                        <m:naryPr>
+                          <m:chr m:val="∑"/>
+                          <m:limLoc m:val="undOvr"/>
+                          <m:supHide m:val="1"/>
+                        </m:naryPr>
+                        <m:sub>
+                          <m:r>
+                            <a:rPr lang="en-US" sz="2400" i="1">
+                              <a:solidFill>
+                                <a:srgbClr val="F4F1EA"/>
+                              </a:solidFill>
+                              <a:latin typeface="Cambria Math"/>
+                              <a:cs typeface="Cambria Math"/>
+                            </a:rPr>
+                            <m:t>ω</m:t>
+                          </m:r>
+                        </m:sub>
+                        <m:sup/>
+                        <m:e>
+                          <m:d>
+                            <m:dPr>
+                              <m:begChr m:val="|"/>
+                              <m:endChr m:val="|"/>
+                            </m:dPr>
+                            <m:e>
+                              <m:nary>
+                                <m:naryPr>
+                                  <m:chr m:val="∑"/>
+                                  <m:limLoc m:val="undOvr"/>
+                                  <m:supHide m:val="1"/>
+                                </m:naryPr>
+                                <m:sub>
+                                  <m:r>
+                                    <a:rPr lang="en-US" sz="2400" i="1">
+                                      <a:solidFill>
+                                        <a:srgbClr val="F4F1EA"/>
+                                      </a:solidFill>
+                                      <a:latin typeface="Cambria Math"/>
+                                      <a:cs typeface="Cambria Math"/>
+                                    </a:rPr>
+                                    <m:t>k</m:t>
+                                  </m:r>
+                                </m:sub>
+                                <m:sup/>
+                                <m:e>
+                                  <m:sSub>
+                                    <m:e>
+                                      <m:acc>
+                                        <m:accPr>
+                                          <m:chr m:val="̂"/>
+                                        </m:accPr>
+                                        <m:e>
+                                          <m:r>
+                                            <a:rPr lang="en-US" sz="2400" i="1">
+                                              <a:solidFill>
+                                                <a:srgbClr val="F4F1EA"/>
+                                              </a:solidFill>
+                                              <a:latin typeface="Cambria Math"/>
+                                              <a:cs typeface="Cambria Math"/>
+                                            </a:rPr>
+                                            <m:t>u</m:t>
+                                          </m:r>
+                                        </m:e>
+                                      </m:acc>
+                                    </m:e>
+                                    <m:sub>
+                                      <m:r>
+                                        <a:rPr lang="en-US" sz="2400" i="1">
+                                          <a:solidFill>
+                                            <a:srgbClr val="F4F1EA"/>
+                                          </a:solidFill>
+                                          <a:latin typeface="Cambria Math"/>
+                                          <a:cs typeface="Cambria Math"/>
+                                        </a:rPr>
+                                        <m:t>k</m:t>
+                                      </m:r>
+                                    </m:sub>
+                                  </m:sSub>
+                                  <m:d>
+                                    <m:dPr>
+                                      <m:begChr m:val="("/>
+                                      <m:endChr m:val=")"/>
+                                    </m:dPr>
+                                    <m:e>
+                                      <m:r>
+                                        <a:rPr lang="en-US" sz="2400" i="1">
+                                          <a:solidFill>
+                                            <a:srgbClr val="F4F1EA"/>
+                                          </a:solidFill>
+                                          <a:latin typeface="Cambria Math"/>
+                                          <a:cs typeface="Cambria Math"/>
+                                        </a:rPr>
+                                        <m:t>ω</m:t>
+                                      </m:r>
+                                    </m:e>
+                                  </m:d>
+                                </m:e>
+                              </m:nary>
+                              <m:r>
+                                <a:rPr lang="en-US" sz="2400" i="1">
+                                  <a:solidFill>
+                                    <a:srgbClr val="F4F1EA"/>
+                                  </a:solidFill>
+                                  <a:latin typeface="Cambria Math"/>
+                                  <a:cs typeface="Cambria Math"/>
+                                </a:rPr>
+                                <m:t>−</m:t>
+                              </m:r>
+                              <m:sSub>
+                                <m:e>
+                                  <m:acc>
+                                    <m:accPr>
+                                      <m:chr m:val="̂"/>
+                                    </m:accPr>
+                                    <m:e>
+                                      <m:r>
+                                        <a:rPr lang="en-US" sz="2400" i="1">
+                                          <a:solidFill>
+                                            <a:srgbClr val="F4F1EA"/>
+                                          </a:solidFill>
+                                          <a:latin typeface="Cambria Math"/>
+                                          <a:cs typeface="Cambria Math"/>
+                                        </a:rPr>
+                                        <m:t>f</m:t>
+                                      </m:r>
+                                    </m:e>
+                                  </m:acc>
+                                </m:e>
+                                <m:sub>
+                                  <m:r>
+                                    <a:rPr lang="en-US" sz="2400" i="1">
+                                      <a:solidFill>
+                                        <a:srgbClr val="F4F1EA"/>
+                                      </a:solidFill>
+                                      <a:latin typeface="Cambria Math"/>
+                                      <a:cs typeface="Cambria Math"/>
+                                    </a:rPr>
+                                    <m:t>+</m:t>
+                                  </m:r>
+                                </m:sub>
+                              </m:sSub>
+                              <m:d>
+                                <m:dPr>
+                                  <m:begChr m:val="("/>
+                                  <m:endChr m:val=")"/>
+                                </m:dPr>
+                                <m:e>
+                                  <m:r>
+                                    <a:rPr lang="en-US" sz="2400" i="1">
+                                      <a:solidFill>
+                                        <a:srgbClr val="F4F1EA"/>
+                                      </a:solidFill>
+                                      <a:latin typeface="Cambria Math"/>
+                                      <a:cs typeface="Cambria Math"/>
+                                    </a:rPr>
+                                    <m:t>ω</m:t>
+                                  </m:r>
+                                </m:e>
+                              </m:d>
+                            </m:e>
+                          </m:d>
+                        </m:e>
+                      </m:nary>
+                    </m:oMath>
+                  </m:oMathPara>
+                </a14:m>
+              </mc:Choice>
+              <mc:Fallback>
+                <a:r>
+                  <a:rPr lang="en-US" sz="2400">
+                    <a:solidFill>
+                      <a:srgbClr val="F4F1EA"/>
+                    </a:solidFill>
+                  </a:rPr>
+                  <a:t>L = Σ_ω |Σ_k û_k(ω) − f̂₊(ω)|</a:t>
+                </a:r>
+              </mc:Fallback>
+            </mc:AlternateContent>
+            <a:endParaRPr lang="en-US" sz="2400" dirty="0"/>
+          </a:p>
+        </p:txBody>
+      </p:sp>
+      <p:sp>
+        <p:nvSpPr>
+          <p:cNvPr id="7" name="Text 4"/>
+          <p:cNvSpPr txBox="1"/>
+          <p:nvPr/>
+        </p:nvSpPr>
+        <p:spPr>
+          <a:xfrm>
+            <a:off x="7406640" y="1600200"/>
+            <a:ext cx="4206240" cy="914400"/>
+          </a:xfrm>
+          <a:prstGeom prst="rect">
+            <a:avLst/>
+          </a:prstGeom>
+          <a:noFill/>
+          <a:ln/>
+        </p:spPr>
+        <p:txBody>
+          <a:bodyPr wrap="square" lIns="0" tIns="0" rIns="0" bIns="0" rtlCol="0" anchor="ctr"/>
+          <a:lstStyle/>
+          <a:p>
+            <a:pPr indent="0" marL="0">
+              <a:buNone/>
+            </a:pPr>
+            <a:r>
+              <a:rPr lang="en-US" sz="1500" dirty="0">
+                <a:solidFill>
+                  <a:srgbClr val="4A5568"/>
+                </a:solidFill>
+              </a:rPr>
+              <a:t>Spectral reconstruction loss (L1 in the code, L2 in the paper). No ground-truth modes: the loss sees only the sum.</a:t>
+            </a:r>
+            <a:endParaRPr lang="en-US" sz="1500" dirty="0"/>
+          </a:p>
+        </p:txBody>
+      </p:sp>
       <p:graphicFrame>
         <p:nvGraphicFramePr>
           <p:cNvPr id="11" name="Table 0"/>
@@ -3013,7 +3304,7 @@
           </p:nvPr>
         </p:nvGraphicFramePr>
         <p:xfrm>
-          <a:off x="548640" y="1645920"/>
+          <a:off x="548640" y="2834640"/>
           <a:ext cx="11064240" cy="914400"/>
         </p:xfrm>
         <a:graphic>
@@ -3180,282 +3471,6 @@
                           <a:ea typeface="Calibri" pitchFamily="34" charset="-122"/>
                           <a:cs typeface="Calibri" pitchFamily="34" charset="-120"/>
                         </a:rPr>
-                        <a:t>Loss</a:t>
-                      </a:r>
-                      <a:endParaRPr lang="en-US" sz="1700" dirty="0">
-                        <a:latin typeface="Calibri" charset="0"/>
-                        <a:ea typeface="Calibri" charset="0"/>
-                        <a:cs typeface="Calibri" charset="0"/>
-                      </a:endParaRPr>
-                    </a:p>
-                  </a:txBody>
-                  <a:tcPr marL="91440" marR="91440" marT="36576" marB="36576" anchor="ctr">
-                    <a:lnL w="9525" cap="flat" cmpd="sng" algn="ctr">
-                      <a:solidFill>
-                        <a:srgbClr val="D5DAE2"/>
-                      </a:solidFill>
-                      <a:prstDash val="solid"/>
-                      <a:round/>
-                      <a:headEnd type="none" w="med" len="med"/>
-                      <a:tailEnd type="none" w="med" len="med"/>
-                    </a:lnL>
-                    <a:lnR w="9525" cap="flat" cmpd="sng" algn="ctr">
-                      <a:solidFill>
-                        <a:srgbClr val="D5DAE2"/>
-                      </a:solidFill>
-                      <a:prstDash val="solid"/>
-                      <a:round/>
-                      <a:headEnd type="none" w="med" len="med"/>
-                      <a:tailEnd type="none" w="med" len="med"/>
-                    </a:lnR>
-                    <a:lnT w="9525" cap="flat" cmpd="sng" algn="ctr">
-                      <a:solidFill>
-                        <a:srgbClr val="D5DAE2"/>
-                      </a:solidFill>
-                      <a:prstDash val="solid"/>
-                      <a:round/>
-                      <a:headEnd type="none" w="med" len="med"/>
-                      <a:tailEnd type="none" w="med" len="med"/>
-                    </a:lnT>
-                    <a:lnB w="9525" cap="flat" cmpd="sng" algn="ctr">
-                      <a:solidFill>
-                        <a:srgbClr val="D5DAE2"/>
-                      </a:solidFill>
-                      <a:prstDash val="solid"/>
-                      <a:round/>
-                      <a:headEnd type="none" w="med" len="med"/>
-                      <a:tailEnd type="none" w="med" len="med"/>
-                    </a:lnB>
-                    <a:solidFill>
-                      <a:srgbClr val="FFFFFF"/>
-                    </a:solidFill>
-                  </a:tcPr>
-                </a:tc>
-                <a:tc>
-                  <a:txBody>
-                    <a:bodyPr/>
-                    <a:lstStyle/>
-                    <a:p>
-                      <a:pPr algn="l" indent="0" marL="0">
-                        <a:buNone/>
-                      </a:pPr>
-                      <a:r>
-                        <a:rPr lang="en-US" sz="1700" dirty="0">
-                          <a:solidFill>
-                            <a:srgbClr val="121A2B"/>
-                          </a:solidFill>
-                          <a:latin typeface="Calibri" pitchFamily="34" charset="0"/>
-                          <a:ea typeface="Calibri" pitchFamily="34" charset="-122"/>
-                          <a:cs typeface="Calibri" pitchFamily="34" charset="-120"/>
-                        </a:rPr>
-                        <a:t>Spectral reconstruction error, Σ |Σ_k û_k − f̂₊| (L1 in the code, L2 in the paper)</a:t>
-                      </a:r>
-                      <a:endParaRPr lang="en-US" sz="1700" dirty="0">
-                        <a:latin typeface="Calibri" charset="0"/>
-                        <a:ea typeface="Calibri" charset="0"/>
-                        <a:cs typeface="Calibri" charset="0"/>
-                      </a:endParaRPr>
-                    </a:p>
-                  </a:txBody>
-                  <a:tcPr marL="91440" marR="91440" marT="36576" marB="36576" anchor="ctr">
-                    <a:lnL w="9525" cap="flat" cmpd="sng" algn="ctr">
-                      <a:solidFill>
-                        <a:srgbClr val="D5DAE2"/>
-                      </a:solidFill>
-                      <a:prstDash val="solid"/>
-                      <a:round/>
-                      <a:headEnd type="none" w="med" len="med"/>
-                      <a:tailEnd type="none" w="med" len="med"/>
-                    </a:lnL>
-                    <a:lnR w="9525" cap="flat" cmpd="sng" algn="ctr">
-                      <a:solidFill>
-                        <a:srgbClr val="D5DAE2"/>
-                      </a:solidFill>
-                      <a:prstDash val="solid"/>
-                      <a:round/>
-                      <a:headEnd type="none" w="med" len="med"/>
-                      <a:tailEnd type="none" w="med" len="med"/>
-                    </a:lnR>
-                    <a:lnT w="9525" cap="flat" cmpd="sng" algn="ctr">
-                      <a:solidFill>
-                        <a:srgbClr val="D5DAE2"/>
-                      </a:solidFill>
-                      <a:prstDash val="solid"/>
-                      <a:round/>
-                      <a:headEnd type="none" w="med" len="med"/>
-                      <a:tailEnd type="none" w="med" len="med"/>
-                    </a:lnT>
-                    <a:lnB w="9525" cap="flat" cmpd="sng" algn="ctr">
-                      <a:solidFill>
-                        <a:srgbClr val="D5DAE2"/>
-                      </a:solidFill>
-                      <a:prstDash val="solid"/>
-                      <a:round/>
-                      <a:headEnd type="none" w="med" len="med"/>
-                      <a:tailEnd type="none" w="med" len="med"/>
-                    </a:lnB>
-                    <a:solidFill>
-                      <a:srgbClr val="FFFFFF"/>
-                    </a:solidFill>
-                  </a:tcPr>
-                </a:tc>
-              </a:tr>
-              <a:tr h="475488">
-                <a:tc>
-                  <a:txBody>
-                    <a:bodyPr/>
-                    <a:lstStyle/>
-                    <a:p>
-                      <a:pPr algn="l" indent="0" marL="0">
-                        <a:buNone/>
-                      </a:pPr>
-                      <a:r>
-                        <a:rPr lang="en-US" sz="1700" dirty="0">
-                          <a:solidFill>
-                            <a:srgbClr val="121A2B"/>
-                          </a:solidFill>
-                          <a:latin typeface="Calibri" pitchFamily="34" charset="0"/>
-                          <a:ea typeface="Calibri" pitchFamily="34" charset="-122"/>
-                          <a:cs typeface="Calibri" pitchFamily="34" charset="-120"/>
-                        </a:rPr>
-                        <a:t>Supervision</a:t>
-                      </a:r>
-                      <a:endParaRPr lang="en-US" sz="1700" dirty="0">
-                        <a:latin typeface="Calibri" charset="0"/>
-                        <a:ea typeface="Calibri" charset="0"/>
-                        <a:cs typeface="Calibri" charset="0"/>
-                      </a:endParaRPr>
-                    </a:p>
-                  </a:txBody>
-                  <a:tcPr marL="91440" marR="91440" marT="36576" marB="36576" anchor="ctr">
-                    <a:lnL w="9525" cap="flat" cmpd="sng" algn="ctr">
-                      <a:solidFill>
-                        <a:srgbClr val="D5DAE2"/>
-                      </a:solidFill>
-                      <a:prstDash val="solid"/>
-                      <a:round/>
-                      <a:headEnd type="none" w="med" len="med"/>
-                      <a:tailEnd type="none" w="med" len="med"/>
-                    </a:lnL>
-                    <a:lnR w="9525" cap="flat" cmpd="sng" algn="ctr">
-                      <a:solidFill>
-                        <a:srgbClr val="D5DAE2"/>
-                      </a:solidFill>
-                      <a:prstDash val="solid"/>
-                      <a:round/>
-                      <a:headEnd type="none" w="med" len="med"/>
-                      <a:tailEnd type="none" w="med" len="med"/>
-                    </a:lnR>
-                    <a:lnT w="9525" cap="flat" cmpd="sng" algn="ctr">
-                      <a:solidFill>
-                        <a:srgbClr val="D5DAE2"/>
-                      </a:solidFill>
-                      <a:prstDash val="solid"/>
-                      <a:round/>
-                      <a:headEnd type="none" w="med" len="med"/>
-                      <a:tailEnd type="none" w="med" len="med"/>
-                    </a:lnT>
-                    <a:lnB w="9525" cap="flat" cmpd="sng" algn="ctr">
-                      <a:solidFill>
-                        <a:srgbClr val="D5DAE2"/>
-                      </a:solidFill>
-                      <a:prstDash val="solid"/>
-                      <a:round/>
-                      <a:headEnd type="none" w="med" len="med"/>
-                      <a:tailEnd type="none" w="med" len="med"/>
-                    </a:lnB>
-                    <a:solidFill>
-                      <a:srgbClr val="E9EDF3"/>
-                    </a:solidFill>
-                  </a:tcPr>
-                </a:tc>
-                <a:tc>
-                  <a:txBody>
-                    <a:bodyPr/>
-                    <a:lstStyle/>
-                    <a:p>
-                      <a:pPr algn="l" indent="0" marL="0">
-                        <a:buNone/>
-                      </a:pPr>
-                      <a:r>
-                        <a:rPr lang="en-US" sz="1700" dirty="0">
-                          <a:solidFill>
-                            <a:srgbClr val="121A2B"/>
-                          </a:solidFill>
-                          <a:latin typeface="Calibri" pitchFamily="34" charset="0"/>
-                          <a:ea typeface="Calibri" pitchFamily="34" charset="-122"/>
-                          <a:cs typeface="Calibri" pitchFamily="34" charset="-120"/>
-                        </a:rPr>
-                        <a:t>None: no ground-truth modes, the loss sees only the sum</a:t>
-                      </a:r>
-                      <a:endParaRPr lang="en-US" sz="1700" dirty="0">
-                        <a:latin typeface="Calibri" charset="0"/>
-                        <a:ea typeface="Calibri" charset="0"/>
-                        <a:cs typeface="Calibri" charset="0"/>
-                      </a:endParaRPr>
-                    </a:p>
-                  </a:txBody>
-                  <a:tcPr marL="91440" marR="91440" marT="36576" marB="36576" anchor="ctr">
-                    <a:lnL w="9525" cap="flat" cmpd="sng" algn="ctr">
-                      <a:solidFill>
-                        <a:srgbClr val="D5DAE2"/>
-                      </a:solidFill>
-                      <a:prstDash val="solid"/>
-                      <a:round/>
-                      <a:headEnd type="none" w="med" len="med"/>
-                      <a:tailEnd type="none" w="med" len="med"/>
-                    </a:lnL>
-                    <a:lnR w="9525" cap="flat" cmpd="sng" algn="ctr">
-                      <a:solidFill>
-                        <a:srgbClr val="D5DAE2"/>
-                      </a:solidFill>
-                      <a:prstDash val="solid"/>
-                      <a:round/>
-                      <a:headEnd type="none" w="med" len="med"/>
-                      <a:tailEnd type="none" w="med" len="med"/>
-                    </a:lnR>
-                    <a:lnT w="9525" cap="flat" cmpd="sng" algn="ctr">
-                      <a:solidFill>
-                        <a:srgbClr val="D5DAE2"/>
-                      </a:solidFill>
-                      <a:prstDash val="solid"/>
-                      <a:round/>
-                      <a:headEnd type="none" w="med" len="med"/>
-                      <a:tailEnd type="none" w="med" len="med"/>
-                    </a:lnT>
-                    <a:lnB w="9525" cap="flat" cmpd="sng" algn="ctr">
-                      <a:solidFill>
-                        <a:srgbClr val="D5DAE2"/>
-                      </a:solidFill>
-                      <a:prstDash val="solid"/>
-                      <a:round/>
-                      <a:headEnd type="none" w="med" len="med"/>
-                      <a:tailEnd type="none" w="med" len="med"/>
-                    </a:lnB>
-                    <a:solidFill>
-                      <a:srgbClr val="E9EDF3"/>
-                    </a:solidFill>
-                  </a:tcPr>
-                </a:tc>
-              </a:tr>
-              <a:tr h="475488">
-                <a:tc>
-                  <a:txBody>
-                    <a:bodyPr/>
-                    <a:lstStyle/>
-                    <a:p>
-                      <a:pPr algn="l" indent="0" marL="0">
-                        <a:buNone/>
-                      </a:pPr>
-                      <a:r>
-                        <a:rPr lang="en-US" sz="1700" dirty="0">
-                          <a:solidFill>
-                            <a:srgbClr val="121A2B"/>
-                          </a:solidFill>
-                          <a:latin typeface="Calibri" pitchFamily="34" charset="0"/>
-                          <a:ea typeface="Calibri" pitchFamily="34" charset="-122"/>
-                          <a:cs typeface="Calibri" pitchFamily="34" charset="-120"/>
-                        </a:rPr>
                         <a:t>Optimiser</a:t>
                       </a:r>
                       <a:endParaRPr lang="en-US" sz="1700" dirty="0">
@@ -4134,14 +4149,14 @@
       </p:graphicFrame>
       <p:sp>
         <p:nvSpPr>
-          <p:cNvPr id="6" name="Text 2"/>
+          <p:cNvPr id="9" name="Text 5"/>
           <p:cNvSpPr txBox="1"/>
           <p:nvPr/>
         </p:nvSpPr>
         <p:spPr>
           <a:xfrm>
-            <a:off x="548640" y="5760720"/>
-            <a:ext cx="11064240" cy="548640"/>
+            <a:off x="548640" y="5943600"/>
+            <a:ext cx="11064240" cy="457200"/>
           </a:xfrm>
           <a:prstGeom prst="rect">
             <a:avLst/>
@@ -4157,14 +4172,14 @@
               <a:buNone/>
             </a:pPr>
             <a:r>
-              <a:rPr lang="en-US" sz="1700" dirty="0">
+              <a:rPr lang="en-US" sz="1600" dirty="0">
                 <a:solidFill>
                   <a:srgbClr val="4A5568"/>
                 </a:solidFill>
               </a:rPr>
               <a:t>The learned α and λ̂ are shared by every signal of the dataset; they are not computed per signal.</a:t>
             </a:r>
-            <a:endParaRPr lang="en-US" sz="1700" dirty="0"/>
+            <a:endParaRPr lang="en-US" sz="1600" dirty="0"/>
           </a:p>
         </p:txBody>
       </p:sp>
@@ -4275,6 +4290,880 @@
           </a:p>
         </p:txBody>
       </p:sp>
+      <p:sp>
+        <p:nvSpPr>
+          <p:cNvPr id="5" name="Text 2"/>
+          <p:cNvSpPr txBox="1"/>
+          <p:nvPr/>
+        </p:nvSpPr>
+        <p:spPr>
+          <a:xfrm>
+            <a:off x="548640" y="1463040"/>
+            <a:ext cx="5394960" cy="274320"/>
+          </a:xfrm>
+          <a:prstGeom prst="rect">
+            <a:avLst/>
+          </a:prstGeom>
+          <a:noFill/>
+          <a:ln/>
+        </p:spPr>
+        <p:txBody>
+          <a:bodyPr wrap="square" lIns="0" tIns="0" rIns="0" bIns="0" rtlCol="0" anchor="ctr"/>
+          <a:lstStyle/>
+          <a:p>
+            <a:pPr indent="0" marL="0">
+              <a:buNone/>
+            </a:pPr>
+            <a:r>
+              <a:rPr lang="en-US" sz="1300" b="1" dirty="0">
+                <a:solidFill>
+                  <a:srgbClr val="C4621F"/>
+                </a:solidFill>
+              </a:rPr>
+              <a:t>PAPER</a:t>
+            </a:r>
+            <a:endParaRPr lang="en-US" sz="1300" dirty="0"/>
+          </a:p>
+        </p:txBody>
+      </p:sp>
+      <p:sp>
+        <p:nvSpPr>
+          <p:cNvPr id="6" name="Shape 3"/>
+          <p:cNvSpPr/>
+          <p:nvPr/>
+        </p:nvSpPr>
+        <p:spPr>
+          <a:xfrm>
+            <a:off x="548640" y="1783080"/>
+            <a:ext cx="5394960" cy="1463040"/>
+          </a:xfrm>
+          <a:prstGeom prst="roundRect">
+            <a:avLst>
+              <a:gd name="adj" fmla="val 6250"/>
+            </a:avLst>
+          </a:prstGeom>
+          <a:solidFill>
+            <a:srgbClr val="121A2B"/>
+          </a:solidFill>
+          <a:ln w="12700">
+            <a:solidFill>
+              <a:srgbClr val="121A2B"/>
+            </a:solidFill>
+            <a:prstDash val="solid"/>
+          </a:ln>
+        </p:spPr>
+      </p:sp>
+      <p:sp>
+        <p:nvSpPr>
+          <p:cNvPr id="7" name="Text 4"/>
+          <p:cNvSpPr txBox="1"/>
+          <p:nvPr/>
+        </p:nvSpPr>
+        <p:spPr>
+          <a:xfrm>
+            <a:off x="822960" y="1874520"/>
+            <a:ext cx="4846320" cy="1280160"/>
+          </a:xfrm>
+          <a:prstGeom prst="rect">
+            <a:avLst/>
+          </a:prstGeom>
+          <a:noFill/>
+          <a:ln/>
+        </p:spPr>
+        <p:txBody>
+          <a:bodyPr wrap="square" lIns="0" tIns="0" rIns="0" bIns="0" rtlCol="0" anchor="ctr"/>
+          <a:lstStyle/>
+          <a:p>
+            <a:pPr algn="l" indent="0" marL="0">
+              <a:spcAft>
+                <a:spcPts val="1000"/>
+              </a:spcAft>
+              <a:buNone/>
+            </a:pPr>
+            <mc:AlternateContent xmlns:mc="http://schemas.openxmlformats.org/markup-compatibility/2006">
+              <mc:Choice xmlns:a14="http://schemas.microsoft.com/office/drawing/2010/main" Requires="a14">
+                <a14:m>
+                  <m:oMathPara xmlns:m="http://schemas.openxmlformats.org/officeDocument/2006/math">
+                    <m:oMathParaPr>
+                      <m:jc m:val="left"/>
+                    </m:oMathParaPr>
+                    <m:oMath>
+                      <m:sSub>
+                        <m:e>
+                          <m:acc>
+                            <m:accPr>
+                              <m:chr m:val="̂"/>
+                            </m:accPr>
+                            <m:e>
+                              <m:r>
+                                <a:rPr lang="en-US" sz="1700" i="1">
+                                  <a:solidFill>
+                                    <a:srgbClr val="F4F1EA"/>
+                                  </a:solidFill>
+                                  <a:latin typeface="Cambria Math"/>
+                                  <a:cs typeface="Cambria Math"/>
+                                </a:rPr>
+                                <m:t>u</m:t>
+                              </m:r>
+                            </m:e>
+                          </m:acc>
+                        </m:e>
+                        <m:sub>
+                          <m:r>
+                            <a:rPr lang="en-US" sz="1700" i="1">
+                              <a:solidFill>
+                                <a:srgbClr val="F4F1EA"/>
+                              </a:solidFill>
+                              <a:latin typeface="Cambria Math"/>
+                              <a:cs typeface="Cambria Math"/>
+                            </a:rPr>
+                            <m:t>k</m:t>
+                          </m:r>
+                        </m:sub>
+                      </m:sSub>
+                      <m:r>
+                        <a:rPr lang="en-US" sz="1700" i="1">
+                          <a:solidFill>
+                            <a:srgbClr val="F4F1EA"/>
+                          </a:solidFill>
+                          <a:latin typeface="Cambria Math"/>
+                          <a:cs typeface="Cambria Math"/>
+                        </a:rPr>
+                        <m:t>=</m:t>
+                      </m:r>
+                      <m:f>
+                        <m:num>
+                          <m:sSub>
+                            <m:e>
+                              <m:acc>
+                                <m:accPr>
+                                  <m:chr m:val="̂"/>
+                                </m:accPr>
+                                <m:e>
+                                  <m:r>
+                                    <a:rPr lang="en-US" sz="1700" i="1">
+                                      <a:solidFill>
+                                        <a:srgbClr val="F4F1EA"/>
+                                      </a:solidFill>
+                                      <a:latin typeface="Cambria Math"/>
+                                      <a:cs typeface="Cambria Math"/>
+                                    </a:rPr>
+                                    <m:t>f</m:t>
+                                  </m:r>
+                                </m:e>
+                              </m:acc>
+                            </m:e>
+                            <m:sub>
+                              <m:r>
+                                <a:rPr lang="en-US" sz="1700" i="1">
+                                  <a:solidFill>
+                                    <a:srgbClr val="F4F1EA"/>
+                                  </a:solidFill>
+                                  <a:latin typeface="Cambria Math"/>
+                                  <a:cs typeface="Cambria Math"/>
+                                </a:rPr>
+                                <m:t>+</m:t>
+                              </m:r>
+                            </m:sub>
+                          </m:sSub>
+                          <m:r>
+                            <a:rPr lang="en-US" sz="1700" i="1">
+                              <a:solidFill>
+                                <a:srgbClr val="F4F1EA"/>
+                              </a:solidFill>
+                              <a:latin typeface="Cambria Math"/>
+                              <a:cs typeface="Cambria Math"/>
+                            </a:rPr>
+                            <m:t>−</m:t>
+                          </m:r>
+                          <m:nary>
+                            <m:naryPr>
+                              <m:chr m:val="∑"/>
+                              <m:limLoc m:val="undOvr"/>
+                              <m:supHide m:val="1"/>
+                            </m:naryPr>
+                            <m:sub>
+                              <m:r>
+                                <a:rPr lang="en-US" sz="1700" i="1">
+                                  <a:solidFill>
+                                    <a:srgbClr val="F4F1EA"/>
+                                  </a:solidFill>
+                                  <a:latin typeface="Cambria Math"/>
+                                  <a:cs typeface="Cambria Math"/>
+                                </a:rPr>
+                                <m:t>i≠k</m:t>
+                              </m:r>
+                            </m:sub>
+                            <m:sup/>
+                            <m:e>
+                              <m:sSub>
+                                <m:e>
+                                  <m:acc>
+                                    <m:accPr>
+                                      <m:chr m:val="̂"/>
+                                    </m:accPr>
+                                    <m:e>
+                                      <m:r>
+                                        <a:rPr lang="en-US" sz="1700" i="1">
+                                          <a:solidFill>
+                                            <a:srgbClr val="F4F1EA"/>
+                                          </a:solidFill>
+                                          <a:latin typeface="Cambria Math"/>
+                                          <a:cs typeface="Cambria Math"/>
+                                        </a:rPr>
+                                        <m:t>u</m:t>
+                                      </m:r>
+                                    </m:e>
+                                  </m:acc>
+                                </m:e>
+                                <m:sub>
+                                  <m:r>
+                                    <a:rPr lang="en-US" sz="1700" i="1">
+                                      <a:solidFill>
+                                        <a:srgbClr val="F4F1EA"/>
+                                      </a:solidFill>
+                                      <a:latin typeface="Cambria Math"/>
+                                      <a:cs typeface="Cambria Math"/>
+                                    </a:rPr>
+                                    <m:t>i</m:t>
+                                  </m:r>
+                                </m:sub>
+                              </m:sSub>
+                            </m:e>
+                          </m:nary>
+                          <m:r>
+                            <a:rPr lang="en-US" sz="1700" i="1">
+                              <a:solidFill>
+                                <a:srgbClr val="F4F1EA"/>
+                              </a:solidFill>
+                              <a:latin typeface="Cambria Math"/>
+                              <a:cs typeface="Cambria Math"/>
+                            </a:rPr>
+                            <m:t>+</m:t>
+                          </m:r>
+                          <m:f>
+                            <m:num>
+                              <m:sSub>
+                                <m:e>
+                                  <m:acc>
+                                    <m:accPr>
+                                      <m:chr m:val="̂"/>
+                                    </m:accPr>
+                                    <m:e>
+                                      <m:r>
+                                        <a:rPr lang="en-US" sz="1700" i="1">
+                                          <a:solidFill>
+                                            <a:srgbClr val="F4F1EA"/>
+                                          </a:solidFill>
+                                          <a:latin typeface="Cambria Math"/>
+                                          <a:cs typeface="Cambria Math"/>
+                                        </a:rPr>
+                                        <m:t>λ</m:t>
+                                      </m:r>
+                                    </m:e>
+                                  </m:acc>
+                                </m:e>
+                                <m:sub>
+                                  <m:r>
+                                    <a:rPr lang="en-US" sz="1700" i="1">
+                                      <a:solidFill>
+                                        <a:srgbClr val="F4F1EA"/>
+                                      </a:solidFill>
+                                      <a:latin typeface="Cambria Math"/>
+                                      <a:cs typeface="Cambria Math"/>
+                                    </a:rPr>
+                                    <m:t>n</m:t>
+                                  </m:r>
+                                </m:sub>
+                              </m:sSub>
+                            </m:num>
+                            <m:den>
+                              <m:r>
+                                <a:rPr lang="en-US" sz="1700" i="1">
+                                  <a:solidFill>
+                                    <a:srgbClr val="F4F1EA"/>
+                                  </a:solidFill>
+                                  <a:latin typeface="Cambria Math"/>
+                                  <a:cs typeface="Cambria Math"/>
+                                </a:rPr>
+                                <m:t>2</m:t>
+                              </m:r>
+                            </m:den>
+                          </m:f>
+                        </m:num>
+                        <m:den>
+                          <m:r>
+                            <a:rPr lang="en-US" sz="1700" i="1">
+                              <a:solidFill>
+                                <a:srgbClr val="F4F1EA"/>
+                              </a:solidFill>
+                              <a:latin typeface="Cambria Math"/>
+                              <a:cs typeface="Cambria Math"/>
+                            </a:rPr>
+                            <m:t>1+2softplus</m:t>
+                          </m:r>
+                          <m:d>
+                            <m:dPr>
+                              <m:begChr m:val="("/>
+                              <m:endChr m:val=")"/>
+                            </m:dPr>
+                            <m:e>
+                              <m:sSub>
+                                <m:e>
+                                  <m:r>
+                                    <a:rPr lang="en-US" sz="1700" i="1">
+                                      <a:solidFill>
+                                        <a:srgbClr val="F4F1EA"/>
+                                      </a:solidFill>
+                                      <a:latin typeface="Cambria Math"/>
+                                      <a:cs typeface="Cambria Math"/>
+                                    </a:rPr>
+                                    <m:t>α</m:t>
+                                  </m:r>
+                                </m:e>
+                                <m:sub>
+                                  <m:r>
+                                    <a:rPr lang="en-US" sz="1700" i="1">
+                                      <a:solidFill>
+                                        <a:srgbClr val="F4F1EA"/>
+                                      </a:solidFill>
+                                      <a:latin typeface="Cambria Math"/>
+                                      <a:cs typeface="Cambria Math"/>
+                                    </a:rPr>
+                                    <m:t>k</m:t>
+                                  </m:r>
+                                </m:sub>
+                              </m:sSub>
+                            </m:e>
+                          </m:d>
+                          <m:sSup>
+                            <m:e>
+                              <m:d>
+                                <m:dPr>
+                                  <m:begChr m:val="("/>
+                                  <m:endChr m:val=")"/>
+                                </m:dPr>
+                                <m:e>
+                                  <m:r>
+                                    <a:rPr lang="en-US" sz="1700" i="1">
+                                      <a:solidFill>
+                                        <a:srgbClr val="F4F1EA"/>
+                                      </a:solidFill>
+                                      <a:latin typeface="Cambria Math"/>
+                                      <a:cs typeface="Cambria Math"/>
+                                    </a:rPr>
+                                    <m:t>ω</m:t>
+                                  </m:r>
+                                  <m:r>
+                                    <a:rPr lang="en-US" sz="1700" i="1">
+                                      <a:solidFill>
+                                        <a:srgbClr val="F4F1EA"/>
+                                      </a:solidFill>
+                                      <a:latin typeface="Cambria Math"/>
+                                      <a:cs typeface="Cambria Math"/>
+                                    </a:rPr>
+                                    <m:t>−</m:t>
+                                  </m:r>
+                                  <m:sSub>
+                                    <m:e>
+                                      <m:r>
+                                        <a:rPr lang="en-US" sz="1700" i="1">
+                                          <a:solidFill>
+                                            <a:srgbClr val="F4F1EA"/>
+                                          </a:solidFill>
+                                          <a:latin typeface="Cambria Math"/>
+                                          <a:cs typeface="Cambria Math"/>
+                                        </a:rPr>
+                                        <m:t>ω</m:t>
+                                      </m:r>
+                                    </m:e>
+                                    <m:sub>
+                                      <m:r>
+                                        <a:rPr lang="en-US" sz="1700" i="1">
+                                          <a:solidFill>
+                                            <a:srgbClr val="F4F1EA"/>
+                                          </a:solidFill>
+                                          <a:latin typeface="Cambria Math"/>
+                                          <a:cs typeface="Cambria Math"/>
+                                        </a:rPr>
+                                        <m:t>k</m:t>
+                                      </m:r>
+                                    </m:sub>
+                                  </m:sSub>
+                                </m:e>
+                              </m:d>
+                            </m:e>
+                            <m:sup>
+                              <m:r>
+                                <a:rPr lang="en-US" sz="1700" i="1">
+                                  <a:solidFill>
+                                    <a:srgbClr val="F4F1EA"/>
+                                  </a:solidFill>
+                                  <a:latin typeface="Cambria Math"/>
+                                  <a:cs typeface="Cambria Math"/>
+                                </a:rPr>
+                                <m:t>2</m:t>
+                              </m:r>
+                            </m:sup>
+                          </m:sSup>
+                        </m:den>
+                      </m:f>
+                    </m:oMath>
+                  </m:oMathPara>
+                </a14:m>
+              </mc:Choice>
+              <mc:Fallback>
+                <a:r>
+                  <a:rPr lang="en-US" sz="1700">
+                    <a:solidFill>
+                      <a:srgbClr val="F4F1EA"/>
+                    </a:solidFill>
+                  </a:rPr>
+                  <a:t>û_k = (f̂₊ − Σ û_i + λ̂_n/2) / (1 + 2softplus(α_k)(ω−ω_k)²)</a:t>
+                </a:r>
+              </mc:Fallback>
+            </mc:AlternateContent>
+            <a:endParaRPr lang="en-US" sz="1700" dirty="0"/>
+          </a:p>
+        </p:txBody>
+      </p:sp>
+      <p:sp>
+        <p:nvSpPr>
+          <p:cNvPr id="8" name="Text 5"/>
+          <p:cNvSpPr txBox="1"/>
+          <p:nvPr/>
+        </p:nvSpPr>
+        <p:spPr>
+          <a:xfrm>
+            <a:off x="6217920" y="1463040"/>
+            <a:ext cx="5394960" cy="274320"/>
+          </a:xfrm>
+          <a:prstGeom prst="rect">
+            <a:avLst/>
+          </a:prstGeom>
+          <a:noFill/>
+          <a:ln/>
+        </p:spPr>
+        <p:txBody>
+          <a:bodyPr wrap="square" lIns="0" tIns="0" rIns="0" bIns="0" rtlCol="0" anchor="ctr"/>
+          <a:lstStyle/>
+          <a:p>
+            <a:pPr indent="0" marL="0">
+              <a:buNone/>
+            </a:pPr>
+            <a:r>
+              <a:rPr lang="en-US" sz="1300" b="1" dirty="0">
+                <a:solidFill>
+                  <a:srgbClr val="C4621F"/>
+                </a:solidFill>
+              </a:rPr>
+              <a:t>RELEASED CODE</a:t>
+            </a:r>
+            <a:endParaRPr lang="en-US" sz="1300" dirty="0"/>
+          </a:p>
+        </p:txBody>
+      </p:sp>
+      <p:sp>
+        <p:nvSpPr>
+          <p:cNvPr id="9" name="Shape 6"/>
+          <p:cNvSpPr/>
+          <p:nvPr/>
+        </p:nvSpPr>
+        <p:spPr>
+          <a:xfrm>
+            <a:off x="6217920" y="1783080"/>
+            <a:ext cx="5394960" cy="1463040"/>
+          </a:xfrm>
+          <a:prstGeom prst="roundRect">
+            <a:avLst>
+              <a:gd name="adj" fmla="val 6250"/>
+            </a:avLst>
+          </a:prstGeom>
+          <a:solidFill>
+            <a:srgbClr val="121A2B"/>
+          </a:solidFill>
+          <a:ln w="12700">
+            <a:solidFill>
+              <a:srgbClr val="121A2B"/>
+            </a:solidFill>
+            <a:prstDash val="solid"/>
+          </a:ln>
+        </p:spPr>
+      </p:sp>
+      <p:sp>
+        <p:nvSpPr>
+          <p:cNvPr id="10" name="Text 7"/>
+          <p:cNvSpPr txBox="1"/>
+          <p:nvPr/>
+        </p:nvSpPr>
+        <p:spPr>
+          <a:xfrm>
+            <a:off x="6492240" y="1874520"/>
+            <a:ext cx="4846320" cy="1280160"/>
+          </a:xfrm>
+          <a:prstGeom prst="rect">
+            <a:avLst/>
+          </a:prstGeom>
+          <a:noFill/>
+          <a:ln/>
+        </p:spPr>
+        <p:txBody>
+          <a:bodyPr wrap="square" lIns="0" tIns="0" rIns="0" bIns="0" rtlCol="0" anchor="ctr"/>
+          <a:lstStyle/>
+          <a:p>
+            <a:pPr algn="l" indent="0" marL="0">
+              <a:spcAft>
+                <a:spcPts val="1000"/>
+              </a:spcAft>
+              <a:buNone/>
+            </a:pPr>
+            <mc:AlternateContent xmlns:mc="http://schemas.openxmlformats.org/markup-compatibility/2006">
+              <mc:Choice xmlns:a14="http://schemas.microsoft.com/office/drawing/2010/main" Requires="a14">
+                <a14:m>
+                  <m:oMathPara xmlns:m="http://schemas.openxmlformats.org/officeDocument/2006/math">
+                    <m:oMathParaPr>
+                      <m:jc m:val="left"/>
+                    </m:oMathParaPr>
+                    <m:oMath>
+                      <m:sSub>
+                        <m:e>
+                          <m:acc>
+                            <m:accPr>
+                              <m:chr m:val="̂"/>
+                            </m:accPr>
+                            <m:e>
+                              <m:r>
+                                <a:rPr lang="en-US" sz="1700" i="1">
+                                  <a:solidFill>
+                                    <a:srgbClr val="F4F1EA"/>
+                                  </a:solidFill>
+                                  <a:latin typeface="Cambria Math"/>
+                                  <a:cs typeface="Cambria Math"/>
+                                </a:rPr>
+                                <m:t>u</m:t>
+                              </m:r>
+                            </m:e>
+                          </m:acc>
+                        </m:e>
+                        <m:sub>
+                          <m:r>
+                            <a:rPr lang="en-US" sz="1700" i="1">
+                              <a:solidFill>
+                                <a:srgbClr val="F4F1EA"/>
+                              </a:solidFill>
+                              <a:latin typeface="Cambria Math"/>
+                              <a:cs typeface="Cambria Math"/>
+                            </a:rPr>
+                            <m:t>k</m:t>
+                          </m:r>
+                        </m:sub>
+                      </m:sSub>
+                      <m:r>
+                        <a:rPr lang="en-US" sz="1700" i="1">
+                          <a:solidFill>
+                            <a:srgbClr val="F4F1EA"/>
+                          </a:solidFill>
+                          <a:latin typeface="Cambria Math"/>
+                          <a:cs typeface="Cambria Math"/>
+                        </a:rPr>
+                        <m:t>=</m:t>
+                      </m:r>
+                      <m:f>
+                        <m:num>
+                          <m:sSub>
+                            <m:e>
+                              <m:acc>
+                                <m:accPr>
+                                  <m:chr m:val="̂"/>
+                                </m:accPr>
+                                <m:e>
+                                  <m:r>
+                                    <a:rPr lang="en-US" sz="1700" i="1">
+                                      <a:solidFill>
+                                        <a:srgbClr val="F4F1EA"/>
+                                      </a:solidFill>
+                                      <a:latin typeface="Cambria Math"/>
+                                      <a:cs typeface="Cambria Math"/>
+                                    </a:rPr>
+                                    <m:t>f</m:t>
+                                  </m:r>
+                                </m:e>
+                              </m:acc>
+                            </m:e>
+                            <m:sub>
+                              <m:r>
+                                <a:rPr lang="en-US" sz="1700" i="1">
+                                  <a:solidFill>
+                                    <a:srgbClr val="F4F1EA"/>
+                                  </a:solidFill>
+                                  <a:latin typeface="Cambria Math"/>
+                                  <a:cs typeface="Cambria Math"/>
+                                </a:rPr>
+                                <m:t>+</m:t>
+                              </m:r>
+                            </m:sub>
+                          </m:sSub>
+                          <m:r>
+                            <a:rPr lang="en-US" sz="1700" i="1">
+                              <a:solidFill>
+                                <a:srgbClr val="F4F1EA"/>
+                              </a:solidFill>
+                              <a:latin typeface="Cambria Math"/>
+                              <a:cs typeface="Cambria Math"/>
+                            </a:rPr>
+                            <m:t>−</m:t>
+                          </m:r>
+                          <m:nary>
+                            <m:naryPr>
+                              <m:chr m:val="∑"/>
+                              <m:limLoc m:val="undOvr"/>
+                              <m:supHide m:val="1"/>
+                            </m:naryPr>
+                            <m:sub>
+                              <m:r>
+                                <a:rPr lang="en-US" sz="1700" i="1">
+                                  <a:solidFill>
+                                    <a:srgbClr val="F4F1EA"/>
+                                  </a:solidFill>
+                                  <a:latin typeface="Cambria Math"/>
+                                  <a:cs typeface="Cambria Math"/>
+                                </a:rPr>
+                                <m:t>i≠k</m:t>
+                              </m:r>
+                            </m:sub>
+                            <m:sup/>
+                            <m:e>
+                              <m:sSub>
+                                <m:e>
+                                  <m:acc>
+                                    <m:accPr>
+                                      <m:chr m:val="̂"/>
+                                    </m:accPr>
+                                    <m:e>
+                                      <m:r>
+                                        <a:rPr lang="en-US" sz="1700" i="1">
+                                          <a:solidFill>
+                                            <a:srgbClr val="F4F1EA"/>
+                                          </a:solidFill>
+                                          <a:latin typeface="Cambria Math"/>
+                                          <a:cs typeface="Cambria Math"/>
+                                        </a:rPr>
+                                        <m:t>u</m:t>
+                                      </m:r>
+                                    </m:e>
+                                  </m:acc>
+                                </m:e>
+                                <m:sub>
+                                  <m:r>
+                                    <a:rPr lang="en-US" sz="1700" i="1">
+                                      <a:solidFill>
+                                        <a:srgbClr val="F4F1EA"/>
+                                      </a:solidFill>
+                                      <a:latin typeface="Cambria Math"/>
+                                      <a:cs typeface="Cambria Math"/>
+                                    </a:rPr>
+                                    <m:t>i</m:t>
+                                  </m:r>
+                                </m:sub>
+                              </m:sSub>
+                            </m:e>
+                          </m:nary>
+                          <m:r>
+                            <a:rPr lang="en-US" sz="1700" i="1">
+                              <a:solidFill>
+                                <a:srgbClr val="F4F1EA"/>
+                              </a:solidFill>
+                              <a:latin typeface="Cambria Math"/>
+                              <a:cs typeface="Cambria Math"/>
+                            </a:rPr>
+                            <m:t>−</m:t>
+                          </m:r>
+                          <m:f>
+                            <m:num>
+                              <m:sSub>
+                                <m:e>
+                                  <m:acc>
+                                    <m:accPr>
+                                      <m:chr m:val="̂"/>
+                                    </m:accPr>
+                                    <m:e>
+                                      <m:r>
+                                        <a:rPr lang="en-US" sz="1700" i="1">
+                                          <a:solidFill>
+                                            <a:srgbClr val="F4F1EA"/>
+                                          </a:solidFill>
+                                          <a:latin typeface="Cambria Math"/>
+                                          <a:cs typeface="Cambria Math"/>
+                                        </a:rPr>
+                                        <m:t>λ</m:t>
+                                      </m:r>
+                                    </m:e>
+                                  </m:acc>
+                                </m:e>
+                                <m:sub>
+                                  <m:r>
+                                    <a:rPr lang="en-US" sz="1700" i="1">
+                                      <a:solidFill>
+                                        <a:srgbClr val="F4F1EA"/>
+                                      </a:solidFill>
+                                      <a:latin typeface="Cambria Math"/>
+                                      <a:cs typeface="Cambria Math"/>
+                                    </a:rPr>
+                                    <m:t>n</m:t>
+                                  </m:r>
+                                </m:sub>
+                              </m:sSub>
+                            </m:num>
+                            <m:den>
+                              <m:r>
+                                <a:rPr lang="en-US" sz="1700" i="1">
+                                  <a:solidFill>
+                                    <a:srgbClr val="F4F1EA"/>
+                                  </a:solidFill>
+                                  <a:latin typeface="Cambria Math"/>
+                                  <a:cs typeface="Cambria Math"/>
+                                </a:rPr>
+                                <m:t>2</m:t>
+                              </m:r>
+                            </m:den>
+                          </m:f>
+                        </m:num>
+                        <m:den>
+                          <m:r>
+                            <a:rPr lang="en-US" sz="1700" i="1">
+                              <a:solidFill>
+                                <a:srgbClr val="F4F1EA"/>
+                              </a:solidFill>
+                              <a:latin typeface="Cambria Math"/>
+                              <a:cs typeface="Cambria Math"/>
+                            </a:rPr>
+                            <m:t>1+softplus</m:t>
+                          </m:r>
+                          <m:d>
+                            <m:dPr>
+                              <m:begChr m:val="("/>
+                              <m:endChr m:val=")"/>
+                            </m:dPr>
+                            <m:e>
+                              <m:sSub>
+                                <m:e>
+                                  <m:r>
+                                    <a:rPr lang="en-US" sz="1700" i="1">
+                                      <a:solidFill>
+                                        <a:srgbClr val="F4F1EA"/>
+                                      </a:solidFill>
+                                      <a:latin typeface="Cambria Math"/>
+                                      <a:cs typeface="Cambria Math"/>
+                                    </a:rPr>
+                                    <m:t>α</m:t>
+                                  </m:r>
+                                </m:e>
+                                <m:sub>
+                                  <m:r>
+                                    <a:rPr lang="en-US" sz="1700" i="1">
+                                      <a:solidFill>
+                                        <a:srgbClr val="F4F1EA"/>
+                                      </a:solidFill>
+                                      <a:latin typeface="Cambria Math"/>
+                                      <a:cs typeface="Cambria Math"/>
+                                    </a:rPr>
+                                    <m:t>k</m:t>
+                                  </m:r>
+                                </m:sub>
+                              </m:sSub>
+                            </m:e>
+                          </m:d>
+                          <m:sSup>
+                            <m:e>
+                              <m:d>
+                                <m:dPr>
+                                  <m:begChr m:val="("/>
+                                  <m:endChr m:val=")"/>
+                                </m:dPr>
+                                <m:e>
+                                  <m:r>
+                                    <a:rPr lang="en-US" sz="1700" i="1">
+                                      <a:solidFill>
+                                        <a:srgbClr val="F4F1EA"/>
+                                      </a:solidFill>
+                                      <a:latin typeface="Cambria Math"/>
+                                      <a:cs typeface="Cambria Math"/>
+                                    </a:rPr>
+                                    <m:t>ω</m:t>
+                                  </m:r>
+                                  <m:r>
+                                    <a:rPr lang="en-US" sz="1700" i="1">
+                                      <a:solidFill>
+                                        <a:srgbClr val="F4F1EA"/>
+                                      </a:solidFill>
+                                      <a:latin typeface="Cambria Math"/>
+                                      <a:cs typeface="Cambria Math"/>
+                                    </a:rPr>
+                                    <m:t>−</m:t>
+                                  </m:r>
+                                  <m:sSub>
+                                    <m:e>
+                                      <m:r>
+                                        <a:rPr lang="en-US" sz="1700" i="1">
+                                          <a:solidFill>
+                                            <a:srgbClr val="F4F1EA"/>
+                                          </a:solidFill>
+                                          <a:latin typeface="Cambria Math"/>
+                                          <a:cs typeface="Cambria Math"/>
+                                        </a:rPr>
+                                        <m:t>ω</m:t>
+                                      </m:r>
+                                    </m:e>
+                                    <m:sub>
+                                      <m:r>
+                                        <a:rPr lang="en-US" sz="1700" i="1">
+                                          <a:solidFill>
+                                            <a:srgbClr val="F4F1EA"/>
+                                          </a:solidFill>
+                                          <a:latin typeface="Cambria Math"/>
+                                          <a:cs typeface="Cambria Math"/>
+                                        </a:rPr>
+                                        <m:t>k</m:t>
+                                      </m:r>
+                                    </m:sub>
+                                  </m:sSub>
+                                </m:e>
+                              </m:d>
+                            </m:e>
+                            <m:sup>
+                              <m:r>
+                                <a:rPr lang="en-US" sz="1700" i="1">
+                                  <a:solidFill>
+                                    <a:srgbClr val="F4F1EA"/>
+                                  </a:solidFill>
+                                  <a:latin typeface="Cambria Math"/>
+                                  <a:cs typeface="Cambria Math"/>
+                                </a:rPr>
+                                <m:t>2</m:t>
+                              </m:r>
+                            </m:sup>
+                          </m:sSup>
+                        </m:den>
+                      </m:f>
+                    </m:oMath>
+                  </m:oMathPara>
+                </a14:m>
+              </mc:Choice>
+              <mc:Fallback>
+                <a:r>
+                  <a:rPr lang="en-US" sz="1700">
+                    <a:solidFill>
+                      <a:srgbClr val="F4F1EA"/>
+                    </a:solidFill>
+                  </a:rPr>
+                  <a:t>û_k = (f̂₊ − Σ û_i − λ̂_n/2) / (1 + softplus(α_k)(ω−ω_k)²)</a:t>
+                </a:r>
+              </mc:Fallback>
+            </mc:AlternateContent>
+            <a:endParaRPr lang="en-US" sz="1700" dirty="0"/>
+          </a:p>
+        </p:txBody>
+      </p:sp>
       <p:graphicFrame>
         <p:nvGraphicFramePr>
           <p:cNvPr id="12" name="Table 0"/>
@@ -4290,7 +5179,7 @@
           </p:nvPr>
         </p:nvGraphicFramePr>
         <p:xfrm>
-          <a:off x="548640" y="1645920"/>
+          <a:off x="548640" y="3474720"/>
           <a:ext cx="11064240" cy="914400"/>
         </p:xfrm>
         <a:graphic>
@@ -4298,11 +5187,11 @@
             <a:tbl>
               <a:tblPr/>
               <a:tblGrid>
-                <a:gridCol w="2651760"/>
-                <a:gridCol w="4206240"/>
-                <a:gridCol w="4206240"/>
+                <a:gridCol w="3383280"/>
+                <a:gridCol w="3840480"/>
+                <a:gridCol w="3840480"/>
               </a:tblGrid>
-              <a:tr h="502920">
+              <a:tr h="411480">
                 <a:tc>
                   <a:txBody>
                     <a:bodyPr/>
@@ -4312,7 +5201,7 @@
                         <a:buNone/>
                       </a:pPr>
                       <a:r>
-                        <a:rPr lang="en-US" sz="1700" b="1" dirty="0">
+                        <a:rPr lang="en-US" sz="1600" b="1" dirty="0">
                           <a:solidFill>
                             <a:srgbClr val="FFFFFF"/>
                           </a:solidFill>
@@ -4322,7 +5211,7 @@
                         </a:rPr>
                         <a:t>Item</a:t>
                       </a:r>
-                      <a:endParaRPr lang="en-US" sz="1700" dirty="0">
+                      <a:endParaRPr lang="en-US" sz="1600" dirty="0">
                         <a:latin typeface="Calibri" charset="0"/>
                         <a:ea typeface="Calibri" charset="0"/>
                         <a:cs typeface="Calibri" charset="0"/>
@@ -4380,7 +5269,7 @@
                         <a:buNone/>
                       </a:pPr>
                       <a:r>
-                        <a:rPr lang="en-US" sz="1700" b="1" dirty="0">
+                        <a:rPr lang="en-US" sz="1600" b="1" dirty="0">
                           <a:solidFill>
                             <a:srgbClr val="FFFFFF"/>
                           </a:solidFill>
@@ -4390,7 +5279,7 @@
                         </a:rPr>
                         <a:t>Paper</a:t>
                       </a:r>
-                      <a:endParaRPr lang="en-US" sz="1700" dirty="0">
+                      <a:endParaRPr lang="en-US" sz="1600" dirty="0">
                         <a:latin typeface="Calibri" charset="0"/>
                         <a:ea typeface="Calibri" charset="0"/>
                         <a:cs typeface="Calibri" charset="0"/>
@@ -4448,7 +5337,7 @@
                         <a:buNone/>
                       </a:pPr>
                       <a:r>
-                        <a:rPr lang="en-US" sz="1700" b="1" dirty="0">
+                        <a:rPr lang="en-US" sz="1600" b="1" dirty="0">
                           <a:solidFill>
                             <a:srgbClr val="FFFFFF"/>
                           </a:solidFill>
@@ -4458,7 +5347,7 @@
                         </a:rPr>
                         <a:t>Released code</a:t>
                       </a:r>
-                      <a:endParaRPr lang="en-US" sz="1700" dirty="0">
+                      <a:endParaRPr lang="en-US" sz="1600" dirty="0">
                         <a:latin typeface="Calibri" charset="0"/>
                         <a:ea typeface="Calibri" charset="0"/>
                         <a:cs typeface="Calibri" charset="0"/>
@@ -4508,7 +5397,7 @@
                   </a:tcPr>
                 </a:tc>
               </a:tr>
-              <a:tr h="502920">
+              <a:tr h="411480">
                 <a:tc>
                   <a:txBody>
                     <a:bodyPr/>
@@ -4518,7 +5407,7 @@
                         <a:buNone/>
                       </a:pPr>
                       <a:r>
-                        <a:rPr lang="en-US" sz="1700" dirty="0">
+                        <a:rPr lang="en-US" sz="1600" dirty="0">
                           <a:solidFill>
                             <a:srgbClr val="121A2B"/>
                           </a:solidFill>
@@ -4526,9 +5415,9 @@
                           <a:ea typeface="Calibri" pitchFamily="34" charset="-122"/>
                           <a:cs typeface="Calibri" pitchFamily="34" charset="-120"/>
                         </a:rPr>
-                        <a:t>Denominator</a:t>
+                        <a:t>Multiplier term and factor 2</a:t>
                       </a:r>
-                      <a:endParaRPr lang="en-US" sz="1700" dirty="0">
+                      <a:endParaRPr lang="en-US" sz="1600" dirty="0">
                         <a:latin typeface="Calibri" charset="0"/>
                         <a:ea typeface="Calibri" charset="0"/>
                         <a:cs typeface="Calibri" charset="0"/>
@@ -4586,7 +5475,7 @@
                         <a:buNone/>
                       </a:pPr>
                       <a:r>
-                        <a:rPr lang="en-US" sz="1700" dirty="0">
+                        <a:rPr lang="en-US" sz="1600" dirty="0">
                           <a:solidFill>
                             <a:srgbClr val="121A2B"/>
                           </a:solidFill>
@@ -4594,9 +5483,9 @@
                           <a:ea typeface="Calibri" pitchFamily="34" charset="-122"/>
                           <a:cs typeface="Calibri" pitchFamily="34" charset="-120"/>
                         </a:rPr>
-                        <a:t>1 + 2·softplus(α)(ω − ω_k)²</a:t>
+                        <a:t>+ λ̂/2 and 2·softplus(α)</a:t>
                       </a:r>
-                      <a:endParaRPr lang="en-US" sz="1700" dirty="0">
+                      <a:endParaRPr lang="en-US" sz="1600" dirty="0">
                         <a:latin typeface="Calibri" charset="0"/>
                         <a:ea typeface="Calibri" charset="0"/>
                         <a:cs typeface="Calibri" charset="0"/>
@@ -4654,7 +5543,7 @@
                         <a:buNone/>
                       </a:pPr>
                       <a:r>
-                        <a:rPr lang="en-US" sz="1700" dirty="0">
+                        <a:rPr lang="en-US" sz="1600" dirty="0">
                           <a:solidFill>
                             <a:srgbClr val="121A2B"/>
                           </a:solidFill>
@@ -4662,9 +5551,9 @@
                           <a:ea typeface="Calibri" pitchFamily="34" charset="-122"/>
                           <a:cs typeface="Calibri" pitchFamily="34" charset="-120"/>
                         </a:rPr>
-                        <a:t>1 + softplus(α)(ω − ω_k)²</a:t>
+                        <a:t>− λ̂/2 and softplus(α)</a:t>
                       </a:r>
-                      <a:endParaRPr lang="en-US" sz="1700" dirty="0">
+                      <a:endParaRPr lang="en-US" sz="1600" dirty="0">
                         <a:latin typeface="Calibri" charset="0"/>
                         <a:ea typeface="Calibri" charset="0"/>
                         <a:cs typeface="Calibri" charset="0"/>
@@ -4714,7 +5603,7 @@
                   </a:tcPr>
                 </a:tc>
               </a:tr>
-              <a:tr h="502920">
+              <a:tr h="411480">
                 <a:tc>
                   <a:txBody>
                     <a:bodyPr/>
@@ -4724,7 +5613,7 @@
                         <a:buNone/>
                       </a:pPr>
                       <a:r>
-                        <a:rPr lang="en-US" sz="1700" dirty="0">
+                        <a:rPr lang="en-US" sz="1600" dirty="0">
                           <a:solidFill>
                             <a:srgbClr val="121A2B"/>
                           </a:solidFill>
@@ -4732,9 +5621,9 @@
                           <a:ea typeface="Calibri" pitchFamily="34" charset="-122"/>
                           <a:cs typeface="Calibri" pitchFamily="34" charset="-120"/>
                         </a:rPr>
-                        <a:t>Multiplier term</a:t>
+                        <a:t>Loss</a:t>
                       </a:r>
-                      <a:endParaRPr lang="en-US" sz="1700" dirty="0">
+                      <a:endParaRPr lang="en-US" sz="1600" dirty="0">
                         <a:latin typeface="Calibri" charset="0"/>
                         <a:ea typeface="Calibri" charset="0"/>
                         <a:cs typeface="Calibri" charset="0"/>
@@ -4792,7 +5681,7 @@
                         <a:buNone/>
                       </a:pPr>
                       <a:r>
-                        <a:rPr lang="en-US" sz="1700" dirty="0">
+                        <a:rPr lang="en-US" sz="1600" dirty="0">
                           <a:solidFill>
                             <a:srgbClr val="121A2B"/>
                           </a:solidFill>
@@ -4800,9 +5689,9 @@
                           <a:ea typeface="Calibri" pitchFamily="34" charset="-122"/>
                           <a:cs typeface="Calibri" pitchFamily="34" charset="-120"/>
                         </a:rPr>
-                        <a:t>+ λ̂/2</a:t>
+                        <a:t>L2 norm</a:t>
                       </a:r>
-                      <a:endParaRPr lang="en-US" sz="1700" dirty="0">
+                      <a:endParaRPr lang="en-US" sz="1600" dirty="0">
                         <a:latin typeface="Calibri" charset="0"/>
                         <a:ea typeface="Calibri" charset="0"/>
                         <a:cs typeface="Calibri" charset="0"/>
@@ -4860,7 +5749,7 @@
                         <a:buNone/>
                       </a:pPr>
                       <a:r>
-                        <a:rPr lang="en-US" sz="1700" dirty="0">
+                        <a:rPr lang="en-US" sz="1600" dirty="0">
                           <a:solidFill>
                             <a:srgbClr val="121A2B"/>
                           </a:solidFill>
@@ -4868,9 +5757,9 @@
                           <a:ea typeface="Calibri" pitchFamily="34" charset="-122"/>
                           <a:cs typeface="Calibri" pitchFamily="34" charset="-120"/>
                         </a:rPr>
-                        <a:t>− λ̂/2</a:t>
+                        <a:t>L1, sum of absolute values</a:t>
                       </a:r>
-                      <a:endParaRPr lang="en-US" sz="1700" dirty="0">
+                      <a:endParaRPr lang="en-US" sz="1600" dirty="0">
                         <a:latin typeface="Calibri" charset="0"/>
                         <a:ea typeface="Calibri" charset="0"/>
                         <a:cs typeface="Calibri" charset="0"/>
@@ -4920,7 +5809,7 @@
                   </a:tcPr>
                 </a:tc>
               </a:tr>
-              <a:tr h="502920">
+              <a:tr h="411480">
                 <a:tc>
                   <a:txBody>
                     <a:bodyPr/>
@@ -4930,7 +5819,7 @@
                         <a:buNone/>
                       </a:pPr>
                       <a:r>
-                        <a:rPr lang="en-US" sz="1700" dirty="0">
+                        <a:rPr lang="en-US" sz="1600" dirty="0">
                           <a:solidFill>
                             <a:srgbClr val="121A2B"/>
                           </a:solidFill>
@@ -4938,9 +5827,9 @@
                           <a:ea typeface="Calibri" pitchFamily="34" charset="-122"/>
                           <a:cs typeface="Calibri" pitchFamily="34" charset="-120"/>
                         </a:rPr>
-                        <a:t>Loss</a:t>
+                        <a:t>Problem statement</a:t>
                       </a:r>
-                      <a:endParaRPr lang="en-US" sz="1700" dirty="0">
+                      <a:endParaRPr lang="en-US" sz="1600" dirty="0">
                         <a:latin typeface="Calibri" charset="0"/>
                         <a:ea typeface="Calibri" charset="0"/>
                         <a:cs typeface="Calibri" charset="0"/>
@@ -4998,7 +5887,7 @@
                         <a:buNone/>
                       </a:pPr>
                       <a:r>
-                        <a:rPr lang="en-US" sz="1700" dirty="0">
+                        <a:rPr lang="en-US" sz="1600" dirty="0">
                           <a:solidFill>
                             <a:srgbClr val="121A2B"/>
                           </a:solidFill>
@@ -5006,9 +5895,9 @@
                           <a:ea typeface="Calibri" pitchFamily="34" charset="-122"/>
                           <a:cs typeface="Calibri" pitchFamily="34" charset="-120"/>
                         </a:rPr>
-                        <a:t>L2 norm</a:t>
+                        <a:t>No constraint, no λ update given</a:t>
                       </a:r>
-                      <a:endParaRPr lang="en-US" sz="1700" dirty="0">
+                      <a:endParaRPr lang="en-US" sz="1600" dirty="0">
                         <a:latin typeface="Calibri" charset="0"/>
                         <a:ea typeface="Calibri" charset="0"/>
                         <a:cs typeface="Calibri" charset="0"/>
@@ -5066,213 +5955,7 @@
                         <a:buNone/>
                       </a:pPr>
                       <a:r>
-                        <a:rPr lang="en-US" sz="1700" dirty="0">
-                          <a:solidFill>
-                            <a:srgbClr val="121A2B"/>
-                          </a:solidFill>
-                          <a:latin typeface="Calibri" pitchFamily="34" charset="0"/>
-                          <a:ea typeface="Calibri" pitchFamily="34" charset="-122"/>
-                          <a:cs typeface="Calibri" pitchFamily="34" charset="-120"/>
-                        </a:rPr>
-                        <a:t>L1, sum of absolute values</a:t>
-                      </a:r>
-                      <a:endParaRPr lang="en-US" sz="1700" dirty="0">
-                        <a:latin typeface="Calibri" charset="0"/>
-                        <a:ea typeface="Calibri" charset="0"/>
-                        <a:cs typeface="Calibri" charset="0"/>
-                      </a:endParaRPr>
-                    </a:p>
-                  </a:txBody>
-                  <a:tcPr marL="91440" marR="91440" marT="36576" marB="36576" anchor="ctr">
-                    <a:lnL w="9525" cap="flat" cmpd="sng" algn="ctr">
-                      <a:solidFill>
-                        <a:srgbClr val="D5DAE2"/>
-                      </a:solidFill>
-                      <a:prstDash val="solid"/>
-                      <a:round/>
-                      <a:headEnd type="none" w="med" len="med"/>
-                      <a:tailEnd type="none" w="med" len="med"/>
-                    </a:lnL>
-                    <a:lnR w="9525" cap="flat" cmpd="sng" algn="ctr">
-                      <a:solidFill>
-                        <a:srgbClr val="D5DAE2"/>
-                      </a:solidFill>
-                      <a:prstDash val="solid"/>
-                      <a:round/>
-                      <a:headEnd type="none" w="med" len="med"/>
-                      <a:tailEnd type="none" w="med" len="med"/>
-                    </a:lnR>
-                    <a:lnT w="9525" cap="flat" cmpd="sng" algn="ctr">
-                      <a:solidFill>
-                        <a:srgbClr val="D5DAE2"/>
-                      </a:solidFill>
-                      <a:prstDash val="solid"/>
-                      <a:round/>
-                      <a:headEnd type="none" w="med" len="med"/>
-                      <a:tailEnd type="none" w="med" len="med"/>
-                    </a:lnT>
-                    <a:lnB w="9525" cap="flat" cmpd="sng" algn="ctr">
-                      <a:solidFill>
-                        <a:srgbClr val="D5DAE2"/>
-                      </a:solidFill>
-                      <a:prstDash val="solid"/>
-                      <a:round/>
-                      <a:headEnd type="none" w="med" len="med"/>
-                      <a:tailEnd type="none" w="med" len="med"/>
-                    </a:lnB>
-                    <a:solidFill>
-                      <a:srgbClr val="FFFFFF"/>
-                    </a:solidFill>
-                  </a:tcPr>
-                </a:tc>
-              </a:tr>
-              <a:tr h="502920">
-                <a:tc>
-                  <a:txBody>
-                    <a:bodyPr/>
-                    <a:lstStyle/>
-                    <a:p>
-                      <a:pPr algn="l" indent="0" marL="0">
-                        <a:buNone/>
-                      </a:pPr>
-                      <a:r>
-                        <a:rPr lang="en-US" sz="1700" dirty="0">
-                          <a:solidFill>
-                            <a:srgbClr val="121A2B"/>
-                          </a:solidFill>
-                          <a:latin typeface="Calibri" pitchFamily="34" charset="0"/>
-                          <a:ea typeface="Calibri" pitchFamily="34" charset="-122"/>
-                          <a:cs typeface="Calibri" pitchFamily="34" charset="-120"/>
-                        </a:rPr>
-                        <a:t>Problem statement</a:t>
-                      </a:r>
-                      <a:endParaRPr lang="en-US" sz="1700" dirty="0">
-                        <a:latin typeface="Calibri" charset="0"/>
-                        <a:ea typeface="Calibri" charset="0"/>
-                        <a:cs typeface="Calibri" charset="0"/>
-                      </a:endParaRPr>
-                    </a:p>
-                  </a:txBody>
-                  <a:tcPr marL="91440" marR="91440" marT="36576" marB="36576" anchor="ctr">
-                    <a:lnL w="9525" cap="flat" cmpd="sng" algn="ctr">
-                      <a:solidFill>
-                        <a:srgbClr val="D5DAE2"/>
-                      </a:solidFill>
-                      <a:prstDash val="solid"/>
-                      <a:round/>
-                      <a:headEnd type="none" w="med" len="med"/>
-                      <a:tailEnd type="none" w="med" len="med"/>
-                    </a:lnL>
-                    <a:lnR w="9525" cap="flat" cmpd="sng" algn="ctr">
-                      <a:solidFill>
-                        <a:srgbClr val="D5DAE2"/>
-                      </a:solidFill>
-                      <a:prstDash val="solid"/>
-                      <a:round/>
-                      <a:headEnd type="none" w="med" len="med"/>
-                      <a:tailEnd type="none" w="med" len="med"/>
-                    </a:lnR>
-                    <a:lnT w="9525" cap="flat" cmpd="sng" algn="ctr">
-                      <a:solidFill>
-                        <a:srgbClr val="D5DAE2"/>
-                      </a:solidFill>
-                      <a:prstDash val="solid"/>
-                      <a:round/>
-                      <a:headEnd type="none" w="med" len="med"/>
-                      <a:tailEnd type="none" w="med" len="med"/>
-                    </a:lnT>
-                    <a:lnB w="9525" cap="flat" cmpd="sng" algn="ctr">
-                      <a:solidFill>
-                        <a:srgbClr val="D5DAE2"/>
-                      </a:solidFill>
-                      <a:prstDash val="solid"/>
-                      <a:round/>
-                      <a:headEnd type="none" w="med" len="med"/>
-                      <a:tailEnd type="none" w="med" len="med"/>
-                    </a:lnB>
-                    <a:solidFill>
-                      <a:srgbClr val="E9EDF3"/>
-                    </a:solidFill>
-                  </a:tcPr>
-                </a:tc>
-                <a:tc>
-                  <a:txBody>
-                    <a:bodyPr/>
-                    <a:lstStyle/>
-                    <a:p>
-                      <a:pPr algn="l" indent="0" marL="0">
-                        <a:buNone/>
-                      </a:pPr>
-                      <a:r>
-                        <a:rPr lang="en-US" sz="1700" dirty="0">
-                          <a:solidFill>
-                            <a:srgbClr val="121A2B"/>
-                          </a:solidFill>
-                          <a:latin typeface="Calibri" pitchFamily="34" charset="0"/>
-                          <a:ea typeface="Calibri" pitchFamily="34" charset="-122"/>
-                          <a:cs typeface="Calibri" pitchFamily="34" charset="-120"/>
-                        </a:rPr>
-                        <a:t>No constraint, no λ update given</a:t>
-                      </a:r>
-                      <a:endParaRPr lang="en-US" sz="1700" dirty="0">
-                        <a:latin typeface="Calibri" charset="0"/>
-                        <a:ea typeface="Calibri" charset="0"/>
-                        <a:cs typeface="Calibri" charset="0"/>
-                      </a:endParaRPr>
-                    </a:p>
-                  </a:txBody>
-                  <a:tcPr marL="91440" marR="91440" marT="36576" marB="36576" anchor="ctr">
-                    <a:lnL w="9525" cap="flat" cmpd="sng" algn="ctr">
-                      <a:solidFill>
-                        <a:srgbClr val="D5DAE2"/>
-                      </a:solidFill>
-                      <a:prstDash val="solid"/>
-                      <a:round/>
-                      <a:headEnd type="none" w="med" len="med"/>
-                      <a:tailEnd type="none" w="med" len="med"/>
-                    </a:lnL>
-                    <a:lnR w="9525" cap="flat" cmpd="sng" algn="ctr">
-                      <a:solidFill>
-                        <a:srgbClr val="D5DAE2"/>
-                      </a:solidFill>
-                      <a:prstDash val="solid"/>
-                      <a:round/>
-                      <a:headEnd type="none" w="med" len="med"/>
-                      <a:tailEnd type="none" w="med" len="med"/>
-                    </a:lnR>
-                    <a:lnT w="9525" cap="flat" cmpd="sng" algn="ctr">
-                      <a:solidFill>
-                        <a:srgbClr val="D5DAE2"/>
-                      </a:solidFill>
-                      <a:prstDash val="solid"/>
-                      <a:round/>
-                      <a:headEnd type="none" w="med" len="med"/>
-                      <a:tailEnd type="none" w="med" len="med"/>
-                    </a:lnT>
-                    <a:lnB w="9525" cap="flat" cmpd="sng" algn="ctr">
-                      <a:solidFill>
-                        <a:srgbClr val="D5DAE2"/>
-                      </a:solidFill>
-                      <a:prstDash val="solid"/>
-                      <a:round/>
-                      <a:headEnd type="none" w="med" len="med"/>
-                      <a:tailEnd type="none" w="med" len="med"/>
-                    </a:lnB>
-                    <a:solidFill>
-                      <a:srgbClr val="E9EDF3"/>
-                    </a:solidFill>
-                  </a:tcPr>
-                </a:tc>
-                <a:tc>
-                  <a:txBody>
-                    <a:bodyPr/>
-                    <a:lstStyle/>
-                    <a:p>
-                      <a:pPr algn="l" indent="0" marL="0">
-                        <a:buNone/>
-                      </a:pPr>
-                      <a:r>
-                        <a:rPr lang="en-US" sz="1700" dirty="0">
+                        <a:rPr lang="en-US" sz="1600" dirty="0">
                           <a:solidFill>
                             <a:srgbClr val="121A2B"/>
                           </a:solidFill>
@@ -5282,7 +5965,7 @@
                         </a:rPr>
                         <a:t>λ̂ is a free trained tensor</a:t>
                       </a:r>
-                      <a:endParaRPr lang="en-US" sz="1700" dirty="0">
+                      <a:endParaRPr lang="en-US" sz="1600" dirty="0">
                         <a:latin typeface="Calibri" charset="0"/>
                         <a:ea typeface="Calibri" charset="0"/>
                         <a:cs typeface="Calibri" charset="0"/>
@@ -5327,7 +6010,7 @@
                       <a:tailEnd type="none" w="med" len="med"/>
                     </a:lnB>
                     <a:solidFill>
-                      <a:srgbClr val="E9EDF3"/>
+                      <a:srgbClr val="FFFFFF"/>
                     </a:solidFill>
                   </a:tcPr>
                 </a:tc>
@@ -5338,14 +6021,14 @@
       </p:graphicFrame>
       <p:sp>
         <p:nvSpPr>
-          <p:cNvPr id="6" name="Text 2"/>
+          <p:cNvPr id="12" name="Text 8"/>
           <p:cNvSpPr txBox="1"/>
           <p:nvPr/>
         </p:nvSpPr>
         <p:spPr>
           <a:xfrm>
-            <a:off x="548640" y="4480560"/>
-            <a:ext cx="11064240" cy="2011680"/>
+            <a:off x="548640" y="5212080"/>
+            <a:ext cx="11064240" cy="1463040"/>
           </a:xfrm>
           <a:prstGeom prst="rect">
             <a:avLst/>
@@ -5365,14 +6048,14 @@
               <a:buChar char="•"/>
             </a:pPr>
             <a:r>
-              <a:rPr lang="en-US" sz="1700" dirty="0">
+              <a:rPr lang="en-US" sz="1400" dirty="0">
                 <a:solidFill>
                   <a:srgbClr val="2D3748"/>
                 </a:solidFill>
               </a:rPr>
               <a:t>The sign of λ̂ is absorbed by training, but the factor 2 changes what α means: the same number gives a different filter width</a:t>
             </a:r>
-            <a:endParaRPr lang="en-US" sz="1700" dirty="0"/>
+            <a:endParaRPr lang="en-US" sz="1400" dirty="0"/>
           </a:p>
           <a:p>
             <a:pPr marL="342900" indent="-342900">
@@ -5383,14 +6066,14 @@
               <a:buChar char="•"/>
             </a:pPr>
             <a:r>
-              <a:rPr lang="en-US" sz="1700" dirty="0">
+              <a:rPr lang="en-US" sz="1400" dirty="0">
                 <a:solidFill>
                   <a:srgbClr val="2D3748"/>
                 </a:solidFill>
               </a:rPr>
               <a:t>The headline “250× faster” is about 162× from the paper’s own timings</a:t>
             </a:r>
-            <a:endParaRPr lang="en-US" sz="1700" dirty="0"/>
+            <a:endParaRPr lang="en-US" sz="1400" dirty="0"/>
           </a:p>
           <a:p>
             <a:pPr marL="342900" indent="-342900">
@@ -5401,14 +6084,14 @@
               <a:buChar char="•"/>
             </a:pPr>
             <a:r>
-              <a:rPr lang="en-US" sz="1700" dirty="0">
+              <a:rPr lang="en-US" sz="1400" dirty="0">
                 <a:solidFill>
                   <a:srgbClr val="2D3748"/>
                 </a:solidFill>
               </a:rPr>
               <a:t>“Robust” is in the title, but no noise experiments are reported</a:t>
             </a:r>
-            <a:endParaRPr lang="en-US" sz="1700" dirty="0"/>
+            <a:endParaRPr lang="en-US" sz="1400" dirty="0"/>
           </a:p>
           <a:p>
             <a:pPr marL="342900" indent="-342900">
@@ -5419,14 +6102,14 @@
               <a:buChar char="•"/>
             </a:pPr>
             <a:r>
-              <a:rPr lang="en-US" sz="1700" dirty="0">
+              <a:rPr lang="en-US" sz="1400" dirty="0">
                 <a:solidFill>
                   <a:srgbClr val="2D3748"/>
                 </a:solidFill>
               </a:rPr>
               <a:t>The upstream repository carries no licence</a:t>
             </a:r>
-            <a:endParaRPr lang="en-US" sz="1700" dirty="0"/>
+            <a:endParaRPr lang="en-US" sz="1400" dirty="0"/>
           </a:p>
         </p:txBody>
       </p:sp>
@@ -11377,7 +12060,7 @@
                 <a:gridCol w="6766560"/>
                 <a:gridCol w="1645920"/>
               </a:tblGrid>
-              <a:tr h="502920">
+              <a:tr h="457200">
                 <a:tc>
                   <a:txBody>
                     <a:bodyPr/>
@@ -11583,7 +12266,7 @@
                   </a:tcPr>
                 </a:tc>
               </a:tr>
-              <a:tr h="502920">
+              <a:tr h="457200">
                 <a:tc>
                   <a:txBody>
                     <a:bodyPr/>
@@ -11669,7 +12352,7 @@
                           <a:ea typeface="Calibri" pitchFamily="34" charset="-122"/>
                           <a:cs typeface="Calibri" pitchFamily="34" charset="-120"/>
                         </a:rPr>
-                        <a:t>Σ_{i&lt;j} |⟨u_i, u_j⟩| / ‖x‖², content shared between modes</a:t>
+                        <a:t>Content shared between modes (formula below)</a:t>
                       </a:r>
                       <a:endParaRPr lang="en-US" sz="1600" dirty="0">
                         <a:latin typeface="Calibri" charset="0"/>
@@ -11789,7 +12472,7 @@
                   </a:tcPr>
                 </a:tc>
               </a:tr>
-              <a:tr h="502920">
+              <a:tr h="457200">
                 <a:tc>
                   <a:txBody>
                     <a:bodyPr/>
@@ -11995,7 +12678,7 @@
                   </a:tcPr>
                 </a:tc>
               </a:tr>
-              <a:tr h="502920">
+              <a:tr h="457200">
                 <a:tc>
                   <a:txBody>
                     <a:bodyPr/>
@@ -12201,7 +12884,7 @@
                   </a:tcPr>
                 </a:tc>
               </a:tr>
-              <a:tr h="502920">
+              <a:tr h="457200">
                 <a:tc>
                   <a:txBody>
                     <a:bodyPr/>
@@ -12287,7 +12970,7 @@
                           <a:ea typeface="Calibri" pitchFamily="34" charset="-122"/>
                           <a:cs typeface="Calibri" pitchFamily="34" charset="-120"/>
                         </a:rPr>
-                        <a:t>Σ‖u_k‖² / ‖x‖²; above 1 double counts, below 1 loses energy</a:t>
+                        <a:t>Above 1 the modes double count, below 1 energy is lost</a:t>
                       </a:r>
                       <a:endParaRPr lang="en-US" sz="1600" dirty="0">
                         <a:latin typeface="Calibri" charset="0"/>
@@ -12407,7 +13090,7 @@
                   </a:tcPr>
                 </a:tc>
               </a:tr>
-              <a:tr h="502920">
+              <a:tr h="457200">
                 <a:tc>
                   <a:txBody>
                     <a:bodyPr/>
@@ -12493,7 +13176,7 @@
                           <a:ea typeface="Calibri" pitchFamily="34" charset="-122"/>
                           <a:cs typeface="Calibri" pitchFamily="34" charset="-120"/>
                         </a:rPr>
-                        <a:t>1 / Σ s_k², s_k the energy share of mode k; a guard, not a score</a:t>
+                        <a:t>s_k: energy share of mode k; a guard, not a score</a:t>
                       </a:r>
                       <a:endParaRPr lang="en-US" sz="1600" dirty="0">
                         <a:latin typeface="Calibri" charset="0"/>
@@ -12619,14 +13302,654 @@
       </p:graphicFrame>
       <p:sp>
         <p:nvSpPr>
-          <p:cNvPr id="6" name="Text 2"/>
+          <p:cNvPr id="6" name="Shape 2"/>
+          <p:cNvSpPr/>
+          <p:nvPr/>
+        </p:nvSpPr>
+        <p:spPr>
+          <a:xfrm>
+            <a:off x="548640" y="4434840"/>
+            <a:ext cx="4480560" cy="1097280"/>
+          </a:xfrm>
+          <a:prstGeom prst="roundRect">
+            <a:avLst>
+              <a:gd name="adj" fmla="val 8333"/>
+            </a:avLst>
+          </a:prstGeom>
+          <a:solidFill>
+            <a:srgbClr val="121A2B"/>
+          </a:solidFill>
+          <a:ln w="12700">
+            <a:solidFill>
+              <a:srgbClr val="121A2B"/>
+            </a:solidFill>
+            <a:prstDash val="solid"/>
+          </a:ln>
+        </p:spPr>
+      </p:sp>
+      <p:sp>
+        <p:nvSpPr>
+          <p:cNvPr id="7" name="Text 3"/>
           <p:cNvSpPr txBox="1"/>
           <p:nvPr/>
         </p:nvSpPr>
         <p:spPr>
           <a:xfrm>
-            <a:off x="548640" y="5029200"/>
-            <a:ext cx="11064240" cy="1188720"/>
+            <a:off x="822960" y="4526280"/>
+            <a:ext cx="3931920" cy="914400"/>
+          </a:xfrm>
+          <a:prstGeom prst="rect">
+            <a:avLst/>
+          </a:prstGeom>
+          <a:noFill/>
+          <a:ln/>
+        </p:spPr>
+        <p:txBody>
+          <a:bodyPr wrap="square" lIns="0" tIns="0" rIns="0" bIns="0" rtlCol="0" anchor="ctr"/>
+          <a:lstStyle/>
+          <a:p>
+            <a:pPr algn="l" indent="0" marL="0">
+              <a:spcAft>
+                <a:spcPts val="1000"/>
+              </a:spcAft>
+              <a:buNone/>
+            </a:pPr>
+            <mc:AlternateContent xmlns:mc="http://schemas.openxmlformats.org/markup-compatibility/2006">
+              <mc:Choice xmlns:a14="http://schemas.microsoft.com/office/drawing/2010/main" Requires="a14">
+                <a14:m>
+                  <m:oMathPara xmlns:m="http://schemas.openxmlformats.org/officeDocument/2006/math">
+                    <m:oMathParaPr>
+                      <m:jc m:val="left"/>
+                    </m:oMathParaPr>
+                    <m:oMath>
+                      <m:r>
+                        <m:rPr>
+                          <m:sty m:val="p"/>
+                        </m:rPr>
+                        <a:rPr lang="en-US" sz="1600" i="1">
+                          <a:solidFill>
+                            <a:srgbClr val="F4F1EA"/>
+                          </a:solidFill>
+                          <a:latin typeface="Cambria Math"/>
+                          <a:cs typeface="Cambria Math"/>
+                        </a:rPr>
+                        <m:t>orthogonality = </m:t>
+                      </m:r>
+                      <m:f>
+                        <m:num>
+                          <m:nary>
+                            <m:naryPr>
+                              <m:chr m:val="∑"/>
+                              <m:limLoc m:val="undOvr"/>
+                              <m:supHide m:val="1"/>
+                            </m:naryPr>
+                            <m:sub>
+                              <m:r>
+                                <a:rPr lang="en-US" sz="1600" i="1">
+                                  <a:solidFill>
+                                    <a:srgbClr val="F4F1EA"/>
+                                  </a:solidFill>
+                                  <a:latin typeface="Cambria Math"/>
+                                  <a:cs typeface="Cambria Math"/>
+                                </a:rPr>
+                                <m:t>i&lt;j</m:t>
+                              </m:r>
+                            </m:sub>
+                            <m:sup/>
+                            <m:e>
+                              <m:d>
+                                <m:dPr>
+                                  <m:begChr m:val="|"/>
+                                  <m:endChr m:val="|"/>
+                                </m:dPr>
+                                <m:e>
+                                  <m:d>
+                                    <m:dPr>
+                                      <m:begChr m:val="⟨"/>
+                                      <m:endChr m:val="⟩"/>
+                                    </m:dPr>
+                                    <m:e>
+                                      <m:sSub>
+                                        <m:e>
+                                          <m:r>
+                                            <a:rPr lang="en-US" sz="1600" i="1">
+                                              <a:solidFill>
+                                                <a:srgbClr val="F4F1EA"/>
+                                              </a:solidFill>
+                                              <a:latin typeface="Cambria Math"/>
+                                              <a:cs typeface="Cambria Math"/>
+                                            </a:rPr>
+                                            <m:t>u</m:t>
+                                          </m:r>
+                                        </m:e>
+                                        <m:sub>
+                                          <m:r>
+                                            <a:rPr lang="en-US" sz="1600" i="1">
+                                              <a:solidFill>
+                                                <a:srgbClr val="F4F1EA"/>
+                                              </a:solidFill>
+                                              <a:latin typeface="Cambria Math"/>
+                                              <a:cs typeface="Cambria Math"/>
+                                            </a:rPr>
+                                            <m:t>i</m:t>
+                                          </m:r>
+                                        </m:sub>
+                                      </m:sSub>
+                                      <m:r>
+                                        <a:rPr lang="en-US" sz="1600" i="1">
+                                          <a:solidFill>
+                                            <a:srgbClr val="F4F1EA"/>
+                                          </a:solidFill>
+                                          <a:latin typeface="Cambria Math"/>
+                                          <a:cs typeface="Cambria Math"/>
+                                        </a:rPr>
+                                        <m:t>,</m:t>
+                                      </m:r>
+                                      <m:sSub>
+                                        <m:e>
+                                          <m:r>
+                                            <a:rPr lang="en-US" sz="1600" i="1">
+                                              <a:solidFill>
+                                                <a:srgbClr val="F4F1EA"/>
+                                              </a:solidFill>
+                                              <a:latin typeface="Cambria Math"/>
+                                              <a:cs typeface="Cambria Math"/>
+                                            </a:rPr>
+                                            <m:t>u</m:t>
+                                          </m:r>
+                                        </m:e>
+                                        <m:sub>
+                                          <m:r>
+                                            <a:rPr lang="en-US" sz="1600" i="1">
+                                              <a:solidFill>
+                                                <a:srgbClr val="F4F1EA"/>
+                                              </a:solidFill>
+                                              <a:latin typeface="Cambria Math"/>
+                                              <a:cs typeface="Cambria Math"/>
+                                            </a:rPr>
+                                            <m:t>j</m:t>
+                                          </m:r>
+                                        </m:sub>
+                                      </m:sSub>
+                                    </m:e>
+                                  </m:d>
+                                </m:e>
+                              </m:d>
+                            </m:e>
+                          </m:nary>
+                        </m:num>
+                        <m:den>
+                          <m:sSup>
+                            <m:e>
+                              <m:d>
+                                <m:dPr>
+                                  <m:begChr m:val="‖"/>
+                                  <m:endChr m:val="‖"/>
+                                </m:dPr>
+                                <m:e>
+                                  <m:r>
+                                    <a:rPr lang="en-US" sz="1600" i="1">
+                                      <a:solidFill>
+                                        <a:srgbClr val="F4F1EA"/>
+                                      </a:solidFill>
+                                      <a:latin typeface="Cambria Math"/>
+                                      <a:cs typeface="Cambria Math"/>
+                                    </a:rPr>
+                                    <m:t>x</m:t>
+                                  </m:r>
+                                </m:e>
+                              </m:d>
+                            </m:e>
+                            <m:sup>
+                              <m:r>
+                                <a:rPr lang="en-US" sz="1600" i="1">
+                                  <a:solidFill>
+                                    <a:srgbClr val="F4F1EA"/>
+                                  </a:solidFill>
+                                  <a:latin typeface="Cambria Math"/>
+                                  <a:cs typeface="Cambria Math"/>
+                                </a:rPr>
+                                <m:t>2</m:t>
+                              </m:r>
+                            </m:sup>
+                          </m:sSup>
+                        </m:den>
+                      </m:f>
+                    </m:oMath>
+                  </m:oMathPara>
+                </a14:m>
+              </mc:Choice>
+              <mc:Fallback>
+                <a:r>
+                  <a:rPr lang="en-US" sz="1600">
+                    <a:solidFill>
+                      <a:srgbClr val="F4F1EA"/>
+                    </a:solidFill>
+                  </a:rPr>
+                  <a:t>orthogonality = Σ_{i&lt;j}|⟨u_i,u_j⟩| / ‖x‖²</a:t>
+                </a:r>
+              </mc:Fallback>
+            </mc:AlternateContent>
+            <a:endParaRPr lang="en-US" sz="1600" dirty="0"/>
+          </a:p>
+        </p:txBody>
+      </p:sp>
+      <p:sp>
+        <p:nvSpPr>
+          <p:cNvPr id="8" name="Shape 4"/>
+          <p:cNvSpPr/>
+          <p:nvPr/>
+        </p:nvSpPr>
+        <p:spPr>
+          <a:xfrm>
+            <a:off x="5212080" y="4434840"/>
+            <a:ext cx="3566160" cy="1097280"/>
+          </a:xfrm>
+          <a:prstGeom prst="roundRect">
+            <a:avLst>
+              <a:gd name="adj" fmla="val 8333"/>
+            </a:avLst>
+          </a:prstGeom>
+          <a:solidFill>
+            <a:srgbClr val="121A2B"/>
+          </a:solidFill>
+          <a:ln w="12700">
+            <a:solidFill>
+              <a:srgbClr val="121A2B"/>
+            </a:solidFill>
+            <a:prstDash val="solid"/>
+          </a:ln>
+        </p:spPr>
+      </p:sp>
+      <p:sp>
+        <p:nvSpPr>
+          <p:cNvPr id="9" name="Text 5"/>
+          <p:cNvSpPr txBox="1"/>
+          <p:nvPr/>
+        </p:nvSpPr>
+        <p:spPr>
+          <a:xfrm>
+            <a:off x="5486400" y="4526280"/>
+            <a:ext cx="3017520" cy="914400"/>
+          </a:xfrm>
+          <a:prstGeom prst="rect">
+            <a:avLst/>
+          </a:prstGeom>
+          <a:noFill/>
+          <a:ln/>
+        </p:spPr>
+        <p:txBody>
+          <a:bodyPr wrap="square" lIns="0" tIns="0" rIns="0" bIns="0" rtlCol="0" anchor="ctr"/>
+          <a:lstStyle/>
+          <a:p>
+            <a:pPr algn="l" indent="0" marL="0">
+              <a:spcAft>
+                <a:spcPts val="1000"/>
+              </a:spcAft>
+              <a:buNone/>
+            </a:pPr>
+            <mc:AlternateContent xmlns:mc="http://schemas.openxmlformats.org/markup-compatibility/2006">
+              <mc:Choice xmlns:a14="http://schemas.microsoft.com/office/drawing/2010/main" Requires="a14">
+                <a14:m>
+                  <m:oMathPara xmlns:m="http://schemas.openxmlformats.org/officeDocument/2006/math">
+                    <m:oMathParaPr>
+                      <m:jc m:val="left"/>
+                    </m:oMathParaPr>
+                    <m:oMath>
+                      <m:r>
+                        <m:rPr>
+                          <m:sty m:val="p"/>
+                        </m:rPr>
+                        <a:rPr lang="en-US" sz="1600" i="1">
+                          <a:solidFill>
+                            <a:srgbClr val="F4F1EA"/>
+                          </a:solidFill>
+                          <a:latin typeface="Cambria Math"/>
+                          <a:cs typeface="Cambria Math"/>
+                        </a:rPr>
+                        <m:t>energy ratio = </m:t>
+                      </m:r>
+                      <m:f>
+                        <m:num>
+                          <m:nary>
+                            <m:naryPr>
+                              <m:chr m:val="∑"/>
+                              <m:limLoc m:val="undOvr"/>
+                              <m:supHide m:val="1"/>
+                            </m:naryPr>
+                            <m:sub>
+                              <m:r>
+                                <a:rPr lang="en-US" sz="1600" i="1">
+                                  <a:solidFill>
+                                    <a:srgbClr val="F4F1EA"/>
+                                  </a:solidFill>
+                                  <a:latin typeface="Cambria Math"/>
+                                  <a:cs typeface="Cambria Math"/>
+                                </a:rPr>
+                                <m:t>k</m:t>
+                              </m:r>
+                            </m:sub>
+                            <m:sup/>
+                            <m:e>
+                              <m:sSup>
+                                <m:e>
+                                  <m:d>
+                                    <m:dPr>
+                                      <m:begChr m:val="‖"/>
+                                      <m:endChr m:val="‖"/>
+                                    </m:dPr>
+                                    <m:e>
+                                      <m:sSub>
+                                        <m:e>
+                                          <m:r>
+                                            <a:rPr lang="en-US" sz="1600" i="1">
+                                              <a:solidFill>
+                                                <a:srgbClr val="F4F1EA"/>
+                                              </a:solidFill>
+                                              <a:latin typeface="Cambria Math"/>
+                                              <a:cs typeface="Cambria Math"/>
+                                            </a:rPr>
+                                            <m:t>u</m:t>
+                                          </m:r>
+                                        </m:e>
+                                        <m:sub>
+                                          <m:r>
+                                            <a:rPr lang="en-US" sz="1600" i="1">
+                                              <a:solidFill>
+                                                <a:srgbClr val="F4F1EA"/>
+                                              </a:solidFill>
+                                              <a:latin typeface="Cambria Math"/>
+                                              <a:cs typeface="Cambria Math"/>
+                                            </a:rPr>
+                                            <m:t>k</m:t>
+                                          </m:r>
+                                        </m:sub>
+                                      </m:sSub>
+                                    </m:e>
+                                  </m:d>
+                                </m:e>
+                                <m:sup>
+                                  <m:r>
+                                    <a:rPr lang="en-US" sz="1600" i="1">
+                                      <a:solidFill>
+                                        <a:srgbClr val="F4F1EA"/>
+                                      </a:solidFill>
+                                      <a:latin typeface="Cambria Math"/>
+                                      <a:cs typeface="Cambria Math"/>
+                                    </a:rPr>
+                                    <m:t>2</m:t>
+                                  </m:r>
+                                </m:sup>
+                              </m:sSup>
+                            </m:e>
+                          </m:nary>
+                        </m:num>
+                        <m:den>
+                          <m:sSup>
+                            <m:e>
+                              <m:d>
+                                <m:dPr>
+                                  <m:begChr m:val="‖"/>
+                                  <m:endChr m:val="‖"/>
+                                </m:dPr>
+                                <m:e>
+                                  <m:r>
+                                    <a:rPr lang="en-US" sz="1600" i="1">
+                                      <a:solidFill>
+                                        <a:srgbClr val="F4F1EA"/>
+                                      </a:solidFill>
+                                      <a:latin typeface="Cambria Math"/>
+                                      <a:cs typeface="Cambria Math"/>
+                                    </a:rPr>
+                                    <m:t>x</m:t>
+                                  </m:r>
+                                </m:e>
+                              </m:d>
+                            </m:e>
+                            <m:sup>
+                              <m:r>
+                                <a:rPr lang="en-US" sz="1600" i="1">
+                                  <a:solidFill>
+                                    <a:srgbClr val="F4F1EA"/>
+                                  </a:solidFill>
+                                  <a:latin typeface="Cambria Math"/>
+                                  <a:cs typeface="Cambria Math"/>
+                                </a:rPr>
+                                <m:t>2</m:t>
+                              </m:r>
+                            </m:sup>
+                          </m:sSup>
+                        </m:den>
+                      </m:f>
+                    </m:oMath>
+                  </m:oMathPara>
+                </a14:m>
+              </mc:Choice>
+              <mc:Fallback>
+                <a:r>
+                  <a:rPr lang="en-US" sz="1600">
+                    <a:solidFill>
+                      <a:srgbClr val="F4F1EA"/>
+                    </a:solidFill>
+                  </a:rPr>
+                  <a:t>energy ratio = Σ_k ‖u_k‖² / ‖x‖²</a:t>
+                </a:r>
+              </mc:Fallback>
+            </mc:AlternateContent>
+            <a:endParaRPr lang="en-US" sz="1600" dirty="0"/>
+          </a:p>
+        </p:txBody>
+      </p:sp>
+      <p:sp>
+        <p:nvSpPr>
+          <p:cNvPr id="10" name="Shape 6"/>
+          <p:cNvSpPr/>
+          <p:nvPr/>
+        </p:nvSpPr>
+        <p:spPr>
+          <a:xfrm>
+            <a:off x="8961120" y="4434840"/>
+            <a:ext cx="2651760" cy="1097280"/>
+          </a:xfrm>
+          <a:prstGeom prst="roundRect">
+            <a:avLst>
+              <a:gd name="adj" fmla="val 8333"/>
+            </a:avLst>
+          </a:prstGeom>
+          <a:solidFill>
+            <a:srgbClr val="121A2B"/>
+          </a:solidFill>
+          <a:ln w="12700">
+            <a:solidFill>
+              <a:srgbClr val="121A2B"/>
+            </a:solidFill>
+            <a:prstDash val="solid"/>
+          </a:ln>
+        </p:spPr>
+      </p:sp>
+      <p:sp>
+        <p:nvSpPr>
+          <p:cNvPr id="11" name="Text 7"/>
+          <p:cNvSpPr txBox="1"/>
+          <p:nvPr/>
+        </p:nvSpPr>
+        <p:spPr>
+          <a:xfrm>
+            <a:off x="9235440" y="4526280"/>
+            <a:ext cx="2103120" cy="914400"/>
+          </a:xfrm>
+          <a:prstGeom prst="rect">
+            <a:avLst/>
+          </a:prstGeom>
+          <a:noFill/>
+          <a:ln/>
+        </p:spPr>
+        <p:txBody>
+          <a:bodyPr wrap="square" lIns="0" tIns="0" rIns="0" bIns="0" rtlCol="0" anchor="ctr"/>
+          <a:lstStyle/>
+          <a:p>
+            <a:pPr algn="l" indent="0" marL="0">
+              <a:spcAft>
+                <a:spcPts val="1000"/>
+              </a:spcAft>
+              <a:buNone/>
+            </a:pPr>
+            <mc:AlternateContent xmlns:mc="http://schemas.openxmlformats.org/markup-compatibility/2006">
+              <mc:Choice xmlns:a14="http://schemas.microsoft.com/office/drawing/2010/main" Requires="a14">
+                <a14:m>
+                  <m:oMathPara xmlns:m="http://schemas.openxmlformats.org/officeDocument/2006/math">
+                    <m:oMathParaPr>
+                      <m:jc m:val="left"/>
+                    </m:oMathParaPr>
+                    <m:oMath>
+                      <m:sSub>
+                        <m:e>
+                          <m:r>
+                            <a:rPr lang="en-US" sz="1600" i="1">
+                              <a:solidFill>
+                                <a:srgbClr val="F4F1EA"/>
+                              </a:solidFill>
+                              <a:latin typeface="Cambria Math"/>
+                              <a:cs typeface="Cambria Math"/>
+                            </a:rPr>
+                            <m:t>N</m:t>
+                          </m:r>
+                        </m:e>
+                        <m:sub>
+                          <m:r>
+                            <m:rPr>
+                              <m:sty m:val="p"/>
+                            </m:rPr>
+                            <a:rPr lang="en-US" sz="1600" i="1">
+                              <a:solidFill>
+                                <a:srgbClr val="F4F1EA"/>
+                              </a:solidFill>
+                              <a:latin typeface="Cambria Math"/>
+                              <a:cs typeface="Cambria Math"/>
+                            </a:rPr>
+                            <m:t>eff</m:t>
+                          </m:r>
+                        </m:sub>
+                      </m:sSub>
+                      <m:r>
+                        <a:rPr lang="en-US" sz="1600" i="1">
+                          <a:solidFill>
+                            <a:srgbClr val="F4F1EA"/>
+                          </a:solidFill>
+                          <a:latin typeface="Cambria Math"/>
+                          <a:cs typeface="Cambria Math"/>
+                        </a:rPr>
+                        <m:t>=</m:t>
+                      </m:r>
+                      <m:f>
+                        <m:num>
+                          <m:r>
+                            <a:rPr lang="en-US" sz="1600" i="1">
+                              <a:solidFill>
+                                <a:srgbClr val="F4F1EA"/>
+                              </a:solidFill>
+                              <a:latin typeface="Cambria Math"/>
+                              <a:cs typeface="Cambria Math"/>
+                            </a:rPr>
+                            <m:t>1</m:t>
+                          </m:r>
+                        </m:num>
+                        <m:den>
+                          <m:nary>
+                            <m:naryPr>
+                              <m:chr m:val="∑"/>
+                              <m:limLoc m:val="undOvr"/>
+                              <m:supHide m:val="1"/>
+                            </m:naryPr>
+                            <m:sub>
+                              <m:r>
+                                <a:rPr lang="en-US" sz="1600" i="1">
+                                  <a:solidFill>
+                                    <a:srgbClr val="F4F1EA"/>
+                                  </a:solidFill>
+                                  <a:latin typeface="Cambria Math"/>
+                                  <a:cs typeface="Cambria Math"/>
+                                </a:rPr>
+                                <m:t>k</m:t>
+                              </m:r>
+                            </m:sub>
+                            <m:sup/>
+                            <m:e>
+                              <m:sSup>
+                                <m:e>
+                                  <m:sSub>
+                                    <m:e>
+                                      <m:r>
+                                        <a:rPr lang="en-US" sz="1600" i="1">
+                                          <a:solidFill>
+                                            <a:srgbClr val="F4F1EA"/>
+                                          </a:solidFill>
+                                          <a:latin typeface="Cambria Math"/>
+                                          <a:cs typeface="Cambria Math"/>
+                                        </a:rPr>
+                                        <m:t>s</m:t>
+                                      </m:r>
+                                    </m:e>
+                                    <m:sub>
+                                      <m:r>
+                                        <a:rPr lang="en-US" sz="1600" i="1">
+                                          <a:solidFill>
+                                            <a:srgbClr val="F4F1EA"/>
+                                          </a:solidFill>
+                                          <a:latin typeface="Cambria Math"/>
+                                          <a:cs typeface="Cambria Math"/>
+                                        </a:rPr>
+                                        <m:t>k</m:t>
+                                      </m:r>
+                                    </m:sub>
+                                  </m:sSub>
+                                </m:e>
+                                <m:sup>
+                                  <m:r>
+                                    <a:rPr lang="en-US" sz="1600" i="1">
+                                      <a:solidFill>
+                                        <a:srgbClr val="F4F1EA"/>
+                                      </a:solidFill>
+                                      <a:latin typeface="Cambria Math"/>
+                                      <a:cs typeface="Cambria Math"/>
+                                    </a:rPr>
+                                    <m:t>2</m:t>
+                                  </m:r>
+                                </m:sup>
+                              </m:sSup>
+                            </m:e>
+                          </m:nary>
+                        </m:den>
+                      </m:f>
+                    </m:oMath>
+                  </m:oMathPara>
+                </a14:m>
+              </mc:Choice>
+              <mc:Fallback>
+                <a:r>
+                  <a:rPr lang="en-US" sz="1600">
+                    <a:solidFill>
+                      <a:srgbClr val="F4F1EA"/>
+                    </a:solidFill>
+                  </a:rPr>
+                  <a:t>N_eff = 1 / Σ_k s_k²</a:t>
+                </a:r>
+              </mc:Fallback>
+            </mc:AlternateContent>
+            <a:endParaRPr lang="en-US" sz="1600" dirty="0"/>
+          </a:p>
+        </p:txBody>
+      </p:sp>
+      <p:sp>
+        <p:nvSpPr>
+          <p:cNvPr id="12" name="Text 8"/>
+          <p:cNvSpPr txBox="1"/>
+          <p:nvPr/>
+        </p:nvSpPr>
+        <p:spPr>
+          <a:xfrm>
+            <a:off x="548640" y="5669280"/>
+            <a:ext cx="11064240" cy="914400"/>
           </a:xfrm>
           <a:prstGeom prst="rect">
             <a:avLst/>
@@ -12642,14 +13965,14 @@
               <a:buNone/>
             </a:pPr>
             <a:r>
-              <a:rPr lang="en-US" sz="1800" dirty="0">
+              <a:rPr lang="en-US" sz="1500" dirty="0">
                 <a:solidFill>
                   <a:srgbClr val="2D3748"/>
                 </a:solidFill>
               </a:rPr>
               <a:t>On the synthetic data, where true modes are known, relative bandwidth tracks true separation best (Spearman −0.85), orthogonality and overlap about −0.5. Reconstruction error points the wrong way (+0.52).</a:t>
             </a:r>
-            <a:endParaRPr lang="en-US" sz="1800" dirty="0"/>
+            <a:endParaRPr lang="en-US" sz="1500" dirty="0"/>
           </a:p>
         </p:txBody>
       </p:sp>
@@ -15751,8 +17074,8 @@
         </p:nvSpPr>
         <p:spPr>
           <a:xfrm>
-            <a:off x="822960" y="1920240"/>
-            <a:ext cx="5852160" cy="2926080"/>
+            <a:off x="822960" y="1874520"/>
+            <a:ext cx="5852160" cy="320040"/>
           </a:xfrm>
           <a:prstGeom prst="rect">
             <a:avLst/>
@@ -15765,89 +17088,529 @@
           <a:lstStyle/>
           <a:p>
             <a:pPr indent="0" marL="0">
+              <a:buNone/>
+            </a:pPr>
+            <a:r>
+              <a:rPr lang="en-US" sz="1300" b="1" dirty="0">
+                <a:solidFill>
+                  <a:srgbClr val="E8833A"/>
+                </a:solidFill>
+              </a:rPr>
+              <a:t>CONSTRAINED PROBLEM</a:t>
+            </a:r>
+            <a:endParaRPr lang="en-US" sz="1300" dirty="0"/>
+          </a:p>
+        </p:txBody>
+      </p:sp>
+      <p:sp>
+        <p:nvSpPr>
+          <p:cNvPr id="7" name="Text 4"/>
+          <p:cNvSpPr txBox="1"/>
+          <p:nvPr/>
+        </p:nvSpPr>
+        <p:spPr>
+          <a:xfrm>
+            <a:off x="822960" y="2286000"/>
+            <a:ext cx="5852160" cy="2560320"/>
+          </a:xfrm>
+          <a:prstGeom prst="rect">
+            <a:avLst/>
+          </a:prstGeom>
+          <a:noFill/>
+          <a:ln/>
+        </p:spPr>
+        <p:txBody>
+          <a:bodyPr wrap="square" lIns="0" tIns="0" rIns="0" bIns="0" rtlCol="0" anchor="ctr"/>
+          <a:lstStyle/>
+          <a:p>
+            <a:pPr algn="l" indent="0" marL="0">
               <a:spcAft>
-                <a:spcPts val="1400"/>
+                <a:spcPts val="1800"/>
               </a:spcAft>
               <a:buNone/>
             </a:pPr>
-            <a:r>
-              <a:rPr lang="en-US" sz="1300" b="1" dirty="0">
-                <a:solidFill>
-                  <a:srgbClr val="E8833A"/>
-                </a:solidFill>
-                <a:latin typeface="Calibri" pitchFamily="34" charset="0"/>
-                <a:ea typeface="Calibri" pitchFamily="34" charset="-122"/>
-                <a:cs typeface="Calibri" pitchFamily="34" charset="-120"/>
-              </a:rPr>
-              <a:t>CONSTRAINED PROBLEM</a:t>
-            </a:r>
-            <a:endParaRPr lang="en-US" sz="1300" dirty="0"/>
-          </a:p>
-          <a:p>
-            <a:pPr indent="0" marL="0">
+            <mc:AlternateContent xmlns:mc="http://schemas.openxmlformats.org/markup-compatibility/2006">
+              <mc:Choice xmlns:a14="http://schemas.microsoft.com/office/drawing/2010/main" Requires="a14">
+                <a14:m>
+                  <m:oMathPara xmlns:m="http://schemas.openxmlformats.org/officeDocument/2006/math">
+                    <m:oMathParaPr>
+                      <m:jc m:val="left"/>
+                    </m:oMathParaPr>
+                    <m:oMath>
+                      <m:limLow>
+                        <m:e>
+                          <m:r>
+                            <m:rPr>
+                              <m:sty m:val="p"/>
+                            </m:rPr>
+                            <a:rPr lang="en-US" sz="2000" i="1">
+                              <a:solidFill>
+                                <a:srgbClr val="F4F1EA"/>
+                              </a:solidFill>
+                              <a:latin typeface="Cambria Math"/>
+                              <a:cs typeface="Cambria Math"/>
+                            </a:rPr>
+                            <m:t>min</m:t>
+                          </m:r>
+                        </m:e>
+                        <m:lim>
+                          <m:d>
+                            <m:dPr>
+                              <m:begChr m:val="{"/>
+                              <m:endChr m:val="}"/>
+                            </m:dPr>
+                            <m:e>
+                              <m:sSub>
+                                <m:e>
+                                  <m:r>
+                                    <a:rPr lang="en-US" sz="2000" i="1">
+                                      <a:solidFill>
+                                        <a:srgbClr val="F4F1EA"/>
+                                      </a:solidFill>
+                                      <a:latin typeface="Cambria Math"/>
+                                      <a:cs typeface="Cambria Math"/>
+                                    </a:rPr>
+                                    <m:t>u</m:t>
+                                  </m:r>
+                                </m:e>
+                                <m:sub>
+                                  <m:r>
+                                    <a:rPr lang="en-US" sz="2000" i="1">
+                                      <a:solidFill>
+                                        <a:srgbClr val="F4F1EA"/>
+                                      </a:solidFill>
+                                      <a:latin typeface="Cambria Math"/>
+                                      <a:cs typeface="Cambria Math"/>
+                                    </a:rPr>
+                                    <m:t>k</m:t>
+                                  </m:r>
+                                </m:sub>
+                              </m:sSub>
+                            </m:e>
+                          </m:d>
+                          <m:r>
+                            <a:rPr lang="en-US" sz="2000" i="1">
+                              <a:solidFill>
+                                <a:srgbClr val="F4F1EA"/>
+                              </a:solidFill>
+                              <a:latin typeface="Cambria Math"/>
+                              <a:cs typeface="Cambria Math"/>
+                            </a:rPr>
+                            <m:t>,</m:t>
+                          </m:r>
+                          <m:d>
+                            <m:dPr>
+                              <m:begChr m:val="{"/>
+                              <m:endChr m:val="}"/>
+                            </m:dPr>
+                            <m:e>
+                              <m:sSub>
+                                <m:e>
+                                  <m:r>
+                                    <a:rPr lang="en-US" sz="2000" i="1">
+                                      <a:solidFill>
+                                        <a:srgbClr val="F4F1EA"/>
+                                      </a:solidFill>
+                                      <a:latin typeface="Cambria Math"/>
+                                      <a:cs typeface="Cambria Math"/>
+                                    </a:rPr>
+                                    <m:t>ω</m:t>
+                                  </m:r>
+                                </m:e>
+                                <m:sub>
+                                  <m:r>
+                                    <a:rPr lang="en-US" sz="2000" i="1">
+                                      <a:solidFill>
+                                        <a:srgbClr val="F4F1EA"/>
+                                      </a:solidFill>
+                                      <a:latin typeface="Cambria Math"/>
+                                      <a:cs typeface="Cambria Math"/>
+                                    </a:rPr>
+                                    <m:t>k</m:t>
+                                  </m:r>
+                                </m:sub>
+                              </m:sSub>
+                            </m:e>
+                          </m:d>
+                        </m:lim>
+                      </m:limLow>
+                      <m:nary>
+                        <m:naryPr>
+                          <m:chr m:val="∑"/>
+                          <m:limLoc m:val="undOvr"/>
+                          <m:supHide m:val="1"/>
+                        </m:naryPr>
+                        <m:sub>
+                          <m:r>
+                            <a:rPr lang="en-US" sz="2000" i="1">
+                              <a:solidFill>
+                                <a:srgbClr val="F4F1EA"/>
+                              </a:solidFill>
+                              <a:latin typeface="Cambria Math"/>
+                              <a:cs typeface="Cambria Math"/>
+                            </a:rPr>
+                            <m:t>k</m:t>
+                          </m:r>
+                        </m:sub>
+                        <m:sup/>
+                        <m:e>
+                          <m:sSubSup>
+                            <m:e>
+                              <m:d>
+                                <m:dPr>
+                                  <m:begChr m:val="("/>
+                                  <m:endChr m:val=")"/>
+                                </m:dPr>
+                                <m:e>
+                                  <m:sSub>
+                                    <m:e>
+                                      <m:r>
+                                        <a:rPr lang="en-US" sz="2000" i="1">
+                                          <a:solidFill>
+                                            <a:srgbClr val="F4F1EA"/>
+                                          </a:solidFill>
+                                          <a:latin typeface="Cambria Math"/>
+                                          <a:cs typeface="Cambria Math"/>
+                                        </a:rPr>
+                                        <m:t>∂</m:t>
+                                      </m:r>
+                                    </m:e>
+                                    <m:sub>
+                                      <m:r>
+                                        <a:rPr lang="en-US" sz="2000" i="1">
+                                          <a:solidFill>
+                                            <a:srgbClr val="F4F1EA"/>
+                                          </a:solidFill>
+                                          <a:latin typeface="Cambria Math"/>
+                                          <a:cs typeface="Cambria Math"/>
+                                        </a:rPr>
+                                        <m:t>t</m:t>
+                                      </m:r>
+                                    </m:sub>
+                                  </m:sSub>
+                                  <m:d>
+                                    <m:dPr>
+                                      <m:begChr m:val="["/>
+                                      <m:endChr m:val="]"/>
+                                    </m:dPr>
+                                    <m:e>
+                                      <m:d>
+                                        <m:dPr>
+                                          <m:begChr m:val="("/>
+                                          <m:endChr m:val=")"/>
+                                        </m:dPr>
+                                        <m:e>
+                                          <m:r>
+                                            <a:rPr lang="en-US" sz="2000" i="1">
+                                              <a:solidFill>
+                                                <a:srgbClr val="F4F1EA"/>
+                                              </a:solidFill>
+                                              <a:latin typeface="Cambria Math"/>
+                                              <a:cs typeface="Cambria Math"/>
+                                            </a:rPr>
+                                            <m:t>δ(t)+</m:t>
+                                          </m:r>
+                                          <m:f>
+                                            <m:num>
+                                              <m:r>
+                                                <a:rPr lang="en-US" sz="2000" i="1">
+                                                  <a:solidFill>
+                                                    <a:srgbClr val="F4F1EA"/>
+                                                  </a:solidFill>
+                                                  <a:latin typeface="Cambria Math"/>
+                                                  <a:cs typeface="Cambria Math"/>
+                                                </a:rPr>
+                                                <m:t>j</m:t>
+                                              </m:r>
+                                            </m:num>
+                                            <m:den>
+                                              <m:r>
+                                                <a:rPr lang="en-US" sz="2000" i="1">
+                                                  <a:solidFill>
+                                                    <a:srgbClr val="F4F1EA"/>
+                                                  </a:solidFill>
+                                                  <a:latin typeface="Cambria Math"/>
+                                                  <a:cs typeface="Cambria Math"/>
+                                                </a:rPr>
+                                                <m:t>πt</m:t>
+                                              </m:r>
+                                            </m:den>
+                                          </m:f>
+                                        </m:e>
+                                      </m:d>
+                                      <m:r>
+                                        <a:rPr lang="en-US" sz="2000" i="1">
+                                          <a:solidFill>
+                                            <a:srgbClr val="F4F1EA"/>
+                                          </a:solidFill>
+                                          <a:latin typeface="Cambria Math"/>
+                                          <a:cs typeface="Cambria Math"/>
+                                        </a:rPr>
+                                        <m:t>∗</m:t>
+                                      </m:r>
+                                      <m:sSub>
+                                        <m:e>
+                                          <m:r>
+                                            <a:rPr lang="en-US" sz="2000" i="1">
+                                              <a:solidFill>
+                                                <a:srgbClr val="F4F1EA"/>
+                                              </a:solidFill>
+                                              <a:latin typeface="Cambria Math"/>
+                                              <a:cs typeface="Cambria Math"/>
+                                            </a:rPr>
+                                            <m:t>u</m:t>
+                                          </m:r>
+                                        </m:e>
+                                        <m:sub>
+                                          <m:r>
+                                            <a:rPr lang="en-US" sz="2000" i="1">
+                                              <a:solidFill>
+                                                <a:srgbClr val="F4F1EA"/>
+                                              </a:solidFill>
+                                              <a:latin typeface="Cambria Math"/>
+                                              <a:cs typeface="Cambria Math"/>
+                                            </a:rPr>
+                                            <m:t>k</m:t>
+                                          </m:r>
+                                        </m:sub>
+                                      </m:sSub>
+                                      <m:d>
+                                        <m:dPr>
+                                          <m:begChr m:val="("/>
+                                          <m:endChr m:val=")"/>
+                                        </m:dPr>
+                                        <m:e>
+                                          <m:r>
+                                            <a:rPr lang="en-US" sz="2000" i="1">
+                                              <a:solidFill>
+                                                <a:srgbClr val="F4F1EA"/>
+                                              </a:solidFill>
+                                              <a:latin typeface="Cambria Math"/>
+                                              <a:cs typeface="Cambria Math"/>
+                                            </a:rPr>
+                                            <m:t>t</m:t>
+                                          </m:r>
+                                        </m:e>
+                                      </m:d>
+                                    </m:e>
+                                  </m:d>
+                                  <m:sSup>
+                                    <m:e>
+                                      <m:r>
+                                        <a:rPr lang="en-US" sz="2000" i="1">
+                                          <a:solidFill>
+                                            <a:srgbClr val="F4F1EA"/>
+                                          </a:solidFill>
+                                          <a:latin typeface="Cambria Math"/>
+                                          <a:cs typeface="Cambria Math"/>
+                                        </a:rPr>
+                                        <m:t>e</m:t>
+                                      </m:r>
+                                    </m:e>
+                                    <m:sup>
+                                      <m:r>
+                                        <a:rPr lang="en-US" sz="2000" i="1">
+                                          <a:solidFill>
+                                            <a:srgbClr val="F4F1EA"/>
+                                          </a:solidFill>
+                                          <a:latin typeface="Cambria Math"/>
+                                          <a:cs typeface="Cambria Math"/>
+                                        </a:rPr>
+                                        <m:t>−j</m:t>
+                                      </m:r>
+                                      <m:sSub>
+                                        <m:e>
+                                          <m:r>
+                                            <a:rPr lang="en-US" sz="2000" i="1">
+                                              <a:solidFill>
+                                                <a:srgbClr val="F4F1EA"/>
+                                              </a:solidFill>
+                                              <a:latin typeface="Cambria Math"/>
+                                              <a:cs typeface="Cambria Math"/>
+                                            </a:rPr>
+                                            <m:t>ω</m:t>
+                                          </m:r>
+                                        </m:e>
+                                        <m:sub>
+                                          <m:r>
+                                            <a:rPr lang="en-US" sz="2000" i="1">
+                                              <a:solidFill>
+                                                <a:srgbClr val="F4F1EA"/>
+                                              </a:solidFill>
+                                              <a:latin typeface="Cambria Math"/>
+                                              <a:cs typeface="Cambria Math"/>
+                                            </a:rPr>
+                                            <m:t>k</m:t>
+                                          </m:r>
+                                        </m:sub>
+                                      </m:sSub>
+                                      <m:r>
+                                        <a:rPr lang="en-US" sz="2000" i="1">
+                                          <a:solidFill>
+                                            <a:srgbClr val="F4F1EA"/>
+                                          </a:solidFill>
+                                          <a:latin typeface="Cambria Math"/>
+                                          <a:cs typeface="Cambria Math"/>
+                                        </a:rPr>
+                                        <m:t>t</m:t>
+                                      </m:r>
+                                    </m:sup>
+                                  </m:sSup>
+                                </m:e>
+                              </m:d>
+                            </m:e>
+                            <m:sub>
+                              <m:r>
+                                <a:rPr lang="en-US" sz="2000" i="1">
+                                  <a:solidFill>
+                                    <a:srgbClr val="F4F1EA"/>
+                                  </a:solidFill>
+                                  <a:latin typeface="Cambria Math"/>
+                                  <a:cs typeface="Cambria Math"/>
+                                </a:rPr>
+                                <m:t>2</m:t>
+                              </m:r>
+                            </m:sub>
+                            <m:sup>
+                              <m:r>
+                                <a:rPr lang="en-US" sz="2000" i="1">
+                                  <a:solidFill>
+                                    <a:srgbClr val="F4F1EA"/>
+                                  </a:solidFill>
+                                  <a:latin typeface="Cambria Math"/>
+                                  <a:cs typeface="Cambria Math"/>
+                                </a:rPr>
+                                <m:t>2</m:t>
+                              </m:r>
+                            </m:sup>
+                          </m:sSubSup>
+                        </m:e>
+                      </m:nary>
+                    </m:oMath>
+                  </m:oMathPara>
+                </a14:m>
+              </mc:Choice>
+              <mc:Fallback>
+                <a:r>
+                  <a:rPr lang="en-US" sz="2000">
+                    <a:solidFill>
+                      <a:srgbClr val="F4F1EA"/>
+                    </a:solidFill>
+                  </a:rPr>
+                  <a:t>min Σ_k ‖∂t[(δ(t)+j/(πt)) ∗ u_k(t)] e^(−jω_k t)‖²</a:t>
+                </a:r>
+              </mc:Fallback>
+            </mc:AlternateContent>
+            <a:endParaRPr lang="en-US" sz="2000" dirty="0"/>
+          </a:p>
+          <a:p>
+            <a:pPr algn="l" indent="0" marL="0">
               <a:spcAft>
-                <a:spcPts val="1400"/>
+                <a:spcPts val="1800"/>
               </a:spcAft>
               <a:buNone/>
             </a:pPr>
-            <a:r>
-              <a:rPr lang="en-US" sz="1700" dirty="0">
-                <a:solidFill>
-                  <a:srgbClr val="F4F1EA"/>
-                </a:solidFill>
-                <a:latin typeface="Courier New" pitchFamily="34" charset="0"/>
-                <a:ea typeface="Courier New" pitchFamily="34" charset="-122"/>
-                <a:cs typeface="Courier New" pitchFamily="34" charset="-120"/>
-              </a:rPr>
-              <a:t>min over {u_k}, {ω_k}</a:t>
-            </a:r>
-            <a:endParaRPr lang="en-US" sz="1300" dirty="0"/>
-          </a:p>
-          <a:p>
-            <a:pPr indent="0" marL="0">
-              <a:spcAft>
-                <a:spcPts val="1400"/>
-              </a:spcAft>
-              <a:buNone/>
-            </a:pPr>
-            <a:r>
-              <a:rPr lang="en-US" sz="1700" dirty="0">
-                <a:solidFill>
-                  <a:srgbClr val="F4F1EA"/>
-                </a:solidFill>
-                <a:latin typeface="Courier New" pitchFamily="34" charset="0"/>
-                <a:ea typeface="Courier New" pitchFamily="34" charset="-122"/>
-                <a:cs typeface="Courier New" pitchFamily="34" charset="-120"/>
-              </a:rPr>
-              <a:t>Σ_k ‖ ∂t[(δ(t) + j/(πt)) ∗ u_k(t)] · e^(−jω_k t) ‖²</a:t>
-            </a:r>
-            <a:endParaRPr lang="en-US" sz="1300" dirty="0"/>
-          </a:p>
-          <a:p>
-            <a:pPr indent="0" marL="0">
-              <a:spcAft>
-                <a:spcPts val="1400"/>
-              </a:spcAft>
-              <a:buNone/>
-            </a:pPr>
-            <a:r>
-              <a:rPr lang="en-US" sz="1700" dirty="0">
-                <a:solidFill>
-                  <a:srgbClr val="E8833A"/>
-                </a:solidFill>
-                <a:latin typeface="Courier New" pitchFamily="34" charset="0"/>
-                <a:ea typeface="Courier New" pitchFamily="34" charset="-122"/>
-                <a:cs typeface="Courier New" pitchFamily="34" charset="-120"/>
-              </a:rPr>
-              <a:t>subject to  Σ_k u_k = f</a:t>
-            </a:r>
-            <a:endParaRPr lang="en-US" sz="1300" dirty="0"/>
+            <mc:AlternateContent xmlns:mc="http://schemas.openxmlformats.org/markup-compatibility/2006">
+              <mc:Choice xmlns:a14="http://schemas.microsoft.com/office/drawing/2010/main" Requires="a14">
+                <a14:m>
+                  <m:oMathPara xmlns:m="http://schemas.openxmlformats.org/officeDocument/2006/math">
+                    <m:oMathParaPr>
+                      <m:jc m:val="left"/>
+                    </m:oMathParaPr>
+                    <m:oMath>
+                      <m:r>
+                        <m:rPr>
+                          <m:sty m:val="p"/>
+                        </m:rPr>
+                        <a:rPr lang="en-US" sz="2000" i="1">
+                          <a:solidFill>
+                            <a:srgbClr val="F4F1EA"/>
+                          </a:solidFill>
+                          <a:latin typeface="Cambria Math"/>
+                          <a:cs typeface="Cambria Math"/>
+                        </a:rPr>
+                        <m:t>s.t.  </m:t>
+                      </m:r>
+                      <m:nary>
+                        <m:naryPr>
+                          <m:chr m:val="∑"/>
+                          <m:limLoc m:val="undOvr"/>
+                          <m:supHide m:val="1"/>
+                        </m:naryPr>
+                        <m:sub>
+                          <m:r>
+                            <a:rPr lang="en-US" sz="2000" i="1">
+                              <a:solidFill>
+                                <a:srgbClr val="F4F1EA"/>
+                              </a:solidFill>
+                              <a:latin typeface="Cambria Math"/>
+                              <a:cs typeface="Cambria Math"/>
+                            </a:rPr>
+                            <m:t>k</m:t>
+                          </m:r>
+                        </m:sub>
+                        <m:sup/>
+                        <m:e>
+                          <m:sSub>
+                            <m:e>
+                              <m:r>
+                                <a:rPr lang="en-US" sz="2000" i="1">
+                                  <a:solidFill>
+                                    <a:srgbClr val="F4F1EA"/>
+                                  </a:solidFill>
+                                  <a:latin typeface="Cambria Math"/>
+                                  <a:cs typeface="Cambria Math"/>
+                                </a:rPr>
+                                <m:t>u</m:t>
+                              </m:r>
+                            </m:e>
+                            <m:sub>
+                              <m:r>
+                                <a:rPr lang="en-US" sz="2000" i="1">
+                                  <a:solidFill>
+                                    <a:srgbClr val="F4F1EA"/>
+                                  </a:solidFill>
+                                  <a:latin typeface="Cambria Math"/>
+                                  <a:cs typeface="Cambria Math"/>
+                                </a:rPr>
+                                <m:t>k</m:t>
+                              </m:r>
+                            </m:sub>
+                          </m:sSub>
+                        </m:e>
+                      </m:nary>
+                      <m:r>
+                        <a:rPr lang="en-US" sz="2000" i="1">
+                          <a:solidFill>
+                            <a:srgbClr val="F4F1EA"/>
+                          </a:solidFill>
+                          <a:latin typeface="Cambria Math"/>
+                          <a:cs typeface="Cambria Math"/>
+                        </a:rPr>
+                        <m:t>=f</m:t>
+                      </m:r>
+                    </m:oMath>
+                  </m:oMathPara>
+                </a14:m>
+              </mc:Choice>
+              <mc:Fallback>
+                <a:r>
+                  <a:rPr lang="en-US" sz="2000">
+                    <a:solidFill>
+                      <a:srgbClr val="F4F1EA"/>
+                    </a:solidFill>
+                  </a:rPr>
+                  <a:t>s.t. Σ_k u_k = f</a:t>
+                </a:r>
+              </mc:Fallback>
+            </mc:AlternateContent>
+            <a:endParaRPr lang="en-US" sz="2000" dirty="0"/>
           </a:p>
         </p:txBody>
       </p:sp>
       <p:sp>
         <p:nvSpPr>
-          <p:cNvPr id="7" name="Text 4"/>
+          <p:cNvPr id="8" name="Text 5"/>
           <p:cNvSpPr txBox="1"/>
           <p:nvPr/>
         </p:nvSpPr>
@@ -15883,7 +17646,7 @@
       </p:sp>
       <p:sp>
         <p:nvSpPr>
-          <p:cNvPr id="8" name="Text 5"/>
+          <p:cNvPr id="9" name="Text 6"/>
           <p:cNvSpPr txBox="1"/>
           <p:nvPr/>
         </p:nvSpPr>
@@ -15995,7 +17758,7 @@
       </p:sp>
       <p:sp>
         <p:nvSpPr>
-          <p:cNvPr id="9" name="Text 6"/>
+          <p:cNvPr id="10" name="Text 7"/>
           <p:cNvSpPr txBox="1"/>
           <p:nvPr/>
         </p:nvSpPr>
@@ -16144,12 +17907,12 @@
         </p:nvSpPr>
         <p:spPr>
           <a:xfrm>
-            <a:off x="548640" y="1645920"/>
-            <a:ext cx="11064240" cy="932688"/>
+            <a:off x="548640" y="1554480"/>
+            <a:ext cx="11064240" cy="1325880"/>
           </a:xfrm>
           <a:prstGeom prst="roundRect">
             <a:avLst>
-              <a:gd name="adj" fmla="val 9804"/>
+              <a:gd name="adj" fmla="val 6897"/>
             </a:avLst>
           </a:prstGeom>
           <a:solidFill>
@@ -16171,8 +17934,8 @@
         </p:nvSpPr>
         <p:spPr>
           <a:xfrm>
-            <a:off x="822960" y="1645920"/>
-            <a:ext cx="2377440" cy="932688"/>
+            <a:off x="822960" y="1554480"/>
+            <a:ext cx="2377440" cy="1325880"/>
           </a:xfrm>
           <a:prstGeom prst="rect">
             <a:avLst/>
@@ -16207,8 +17970,8 @@
         </p:nvSpPr>
         <p:spPr>
           <a:xfrm>
-            <a:off x="3291840" y="1645920"/>
-            <a:ext cx="8229600" cy="932688"/>
+            <a:off x="3291840" y="1600200"/>
+            <a:ext cx="8138160" cy="1234440"/>
           </a:xfrm>
           <a:prstGeom prst="rect">
             <a:avLst/>
@@ -16220,21 +17983,374 @@
           <a:bodyPr wrap="square" lIns="0" tIns="0" rIns="0" bIns="0" rtlCol="0" anchor="ctr"/>
           <a:lstStyle/>
           <a:p>
-            <a:pPr indent="0" marL="0">
+            <a:pPr algn="l" indent="0" marL="0">
+              <a:spcAft>
+                <a:spcPts val="1000"/>
+              </a:spcAft>
               <a:buNone/>
             </a:pPr>
-            <a:r>
-              <a:rPr lang="en-US" sz="1700" dirty="0">
-                <a:solidFill>
-                  <a:srgbClr val="F4F1EA"/>
-                </a:solidFill>
-                <a:latin typeface="Courier New" pitchFamily="34" charset="0"/>
-                <a:ea typeface="Courier New" pitchFamily="34" charset="-122"/>
-                <a:cs typeface="Courier New" pitchFamily="34" charset="-120"/>
-              </a:rPr>
-              <a:t>û_k = ( f̂ − Σ_{i≠k} û_i + λ̂/2 ) / ( 1 + 2α(ω − ω_k)² )</a:t>
-            </a:r>
-            <a:endParaRPr lang="en-US" sz="1700" dirty="0"/>
+            <mc:AlternateContent xmlns:mc="http://schemas.openxmlformats.org/markup-compatibility/2006">
+              <mc:Choice xmlns:a14="http://schemas.microsoft.com/office/drawing/2010/main" Requires="a14">
+                <a14:m>
+                  <m:oMathPara xmlns:m="http://schemas.openxmlformats.org/officeDocument/2006/math">
+                    <m:oMathParaPr>
+                      <m:jc m:val="left"/>
+                    </m:oMathParaPr>
+                    <m:oMath>
+                      <m:sSubSup>
+                        <m:e>
+                          <m:acc>
+                            <m:accPr>
+                              <m:chr m:val="̂"/>
+                            </m:accPr>
+                            <m:e>
+                              <m:r>
+                                <a:rPr lang="en-US" sz="2000" i="1">
+                                  <a:solidFill>
+                                    <a:srgbClr val="F4F1EA"/>
+                                  </a:solidFill>
+                                  <a:latin typeface="Cambria Math"/>
+                                  <a:cs typeface="Cambria Math"/>
+                                </a:rPr>
+                                <m:t>u</m:t>
+                              </m:r>
+                            </m:e>
+                          </m:acc>
+                        </m:e>
+                        <m:sub>
+                          <m:r>
+                            <a:rPr lang="en-US" sz="2000" i="1">
+                              <a:solidFill>
+                                <a:srgbClr val="F4F1EA"/>
+                              </a:solidFill>
+                              <a:latin typeface="Cambria Math"/>
+                              <a:cs typeface="Cambria Math"/>
+                            </a:rPr>
+                            <m:t>k</m:t>
+                          </m:r>
+                        </m:sub>
+                        <m:sup>
+                          <m:r>
+                            <a:rPr lang="en-US" sz="2000" i="1">
+                              <a:solidFill>
+                                <a:srgbClr val="F4F1EA"/>
+                              </a:solidFill>
+                              <a:latin typeface="Cambria Math"/>
+                              <a:cs typeface="Cambria Math"/>
+                            </a:rPr>
+                            <m:t>n+1</m:t>
+                          </m:r>
+                        </m:sup>
+                      </m:sSubSup>
+                      <m:d>
+                        <m:dPr>
+                          <m:begChr m:val="("/>
+                          <m:endChr m:val=")"/>
+                        </m:dPr>
+                        <m:e>
+                          <m:r>
+                            <a:rPr lang="en-US" sz="2000" i="1">
+                              <a:solidFill>
+                                <a:srgbClr val="F4F1EA"/>
+                              </a:solidFill>
+                              <a:latin typeface="Cambria Math"/>
+                              <a:cs typeface="Cambria Math"/>
+                            </a:rPr>
+                            <m:t>ω</m:t>
+                          </m:r>
+                        </m:e>
+                      </m:d>
+                      <m:r>
+                        <a:rPr lang="en-US" sz="2000" i="1">
+                          <a:solidFill>
+                            <a:srgbClr val="F4F1EA"/>
+                          </a:solidFill>
+                          <a:latin typeface="Cambria Math"/>
+                          <a:cs typeface="Cambria Math"/>
+                        </a:rPr>
+                        <m:t>=</m:t>
+                      </m:r>
+                      <m:f>
+                        <m:num>
+                          <m:acc>
+                            <m:accPr>
+                              <m:chr m:val="̂"/>
+                            </m:accPr>
+                            <m:e>
+                              <m:r>
+                                <a:rPr lang="en-US" sz="2000" i="1">
+                                  <a:solidFill>
+                                    <a:srgbClr val="F4F1EA"/>
+                                  </a:solidFill>
+                                  <a:latin typeface="Cambria Math"/>
+                                  <a:cs typeface="Cambria Math"/>
+                                </a:rPr>
+                                <m:t>f</m:t>
+                              </m:r>
+                            </m:e>
+                          </m:acc>
+                          <m:d>
+                            <m:dPr>
+                              <m:begChr m:val="("/>
+                              <m:endChr m:val=")"/>
+                            </m:dPr>
+                            <m:e>
+                              <m:r>
+                                <a:rPr lang="en-US" sz="2000" i="1">
+                                  <a:solidFill>
+                                    <a:srgbClr val="F4F1EA"/>
+                                  </a:solidFill>
+                                  <a:latin typeface="Cambria Math"/>
+                                  <a:cs typeface="Cambria Math"/>
+                                </a:rPr>
+                                <m:t>ω</m:t>
+                              </m:r>
+                            </m:e>
+                          </m:d>
+                          <m:r>
+                            <a:rPr lang="en-US" sz="2000" i="1">
+                              <a:solidFill>
+                                <a:srgbClr val="F4F1EA"/>
+                              </a:solidFill>
+                              <a:latin typeface="Cambria Math"/>
+                              <a:cs typeface="Cambria Math"/>
+                            </a:rPr>
+                            <m:t>−</m:t>
+                          </m:r>
+                          <m:nary>
+                            <m:naryPr>
+                              <m:chr m:val="∑"/>
+                              <m:limLoc m:val="undOvr"/>
+                              <m:supHide m:val="1"/>
+                            </m:naryPr>
+                            <m:sub>
+                              <m:r>
+                                <a:rPr lang="en-US" sz="2000" i="1">
+                                  <a:solidFill>
+                                    <a:srgbClr val="F4F1EA"/>
+                                  </a:solidFill>
+                                  <a:latin typeface="Cambria Math"/>
+                                  <a:cs typeface="Cambria Math"/>
+                                </a:rPr>
+                                <m:t>i≠k</m:t>
+                              </m:r>
+                            </m:sub>
+                            <m:sup/>
+                            <m:e>
+                              <m:sSub>
+                                <m:e>
+                                  <m:acc>
+                                    <m:accPr>
+                                      <m:chr m:val="̂"/>
+                                    </m:accPr>
+                                    <m:e>
+                                      <m:r>
+                                        <a:rPr lang="en-US" sz="2000" i="1">
+                                          <a:solidFill>
+                                            <a:srgbClr val="F4F1EA"/>
+                                          </a:solidFill>
+                                          <a:latin typeface="Cambria Math"/>
+                                          <a:cs typeface="Cambria Math"/>
+                                        </a:rPr>
+                                        <m:t>u</m:t>
+                                      </m:r>
+                                    </m:e>
+                                  </m:acc>
+                                </m:e>
+                                <m:sub>
+                                  <m:r>
+                                    <a:rPr lang="en-US" sz="2000" i="1">
+                                      <a:solidFill>
+                                        <a:srgbClr val="F4F1EA"/>
+                                      </a:solidFill>
+                                      <a:latin typeface="Cambria Math"/>
+                                      <a:cs typeface="Cambria Math"/>
+                                    </a:rPr>
+                                    <m:t>i</m:t>
+                                  </m:r>
+                                </m:sub>
+                              </m:sSub>
+                              <m:d>
+                                <m:dPr>
+                                  <m:begChr m:val="("/>
+                                  <m:endChr m:val=")"/>
+                                </m:dPr>
+                                <m:e>
+                                  <m:r>
+                                    <a:rPr lang="en-US" sz="2000" i="1">
+                                      <a:solidFill>
+                                        <a:srgbClr val="F4F1EA"/>
+                                      </a:solidFill>
+                                      <a:latin typeface="Cambria Math"/>
+                                      <a:cs typeface="Cambria Math"/>
+                                    </a:rPr>
+                                    <m:t>ω</m:t>
+                                  </m:r>
+                                </m:e>
+                              </m:d>
+                            </m:e>
+                          </m:nary>
+                          <m:r>
+                            <a:rPr lang="en-US" sz="2000" i="1">
+                              <a:solidFill>
+                                <a:srgbClr val="F4F1EA"/>
+                              </a:solidFill>
+                              <a:latin typeface="Cambria Math"/>
+                              <a:cs typeface="Cambria Math"/>
+                            </a:rPr>
+                            <m:t>+</m:t>
+                          </m:r>
+                          <m:f>
+                            <m:num>
+                              <m:acc>
+                                <m:accPr>
+                                  <m:chr m:val="̂"/>
+                                </m:accPr>
+                                <m:e>
+                                  <m:r>
+                                    <a:rPr lang="en-US" sz="2000" i="1">
+                                      <a:solidFill>
+                                        <a:srgbClr val="F4F1EA"/>
+                                      </a:solidFill>
+                                      <a:latin typeface="Cambria Math"/>
+                                      <a:cs typeface="Cambria Math"/>
+                                    </a:rPr>
+                                    <m:t>λ</m:t>
+                                  </m:r>
+                                </m:e>
+                              </m:acc>
+                              <m:d>
+                                <m:dPr>
+                                  <m:begChr m:val="("/>
+                                  <m:endChr m:val=")"/>
+                                </m:dPr>
+                                <m:e>
+                                  <m:r>
+                                    <a:rPr lang="en-US" sz="2000" i="1">
+                                      <a:solidFill>
+                                        <a:srgbClr val="F4F1EA"/>
+                                      </a:solidFill>
+                                      <a:latin typeface="Cambria Math"/>
+                                      <a:cs typeface="Cambria Math"/>
+                                    </a:rPr>
+                                    <m:t>ω</m:t>
+                                  </m:r>
+                                </m:e>
+                              </m:d>
+                            </m:num>
+                            <m:den>
+                              <m:r>
+                                <a:rPr lang="en-US" sz="2000" i="1">
+                                  <a:solidFill>
+                                    <a:srgbClr val="F4F1EA"/>
+                                  </a:solidFill>
+                                  <a:latin typeface="Cambria Math"/>
+                                  <a:cs typeface="Cambria Math"/>
+                                </a:rPr>
+                                <m:t>2</m:t>
+                              </m:r>
+                            </m:den>
+                          </m:f>
+                        </m:num>
+                        <m:den>
+                          <m:r>
+                            <a:rPr lang="en-US" sz="2000" i="1">
+                              <a:solidFill>
+                                <a:srgbClr val="F4F1EA"/>
+                              </a:solidFill>
+                              <a:latin typeface="Cambria Math"/>
+                              <a:cs typeface="Cambria Math"/>
+                            </a:rPr>
+                            <m:t>1+2α</m:t>
+                          </m:r>
+                          <m:sSup>
+                            <m:e>
+                              <m:d>
+                                <m:dPr>
+                                  <m:begChr m:val="("/>
+                                  <m:endChr m:val=")"/>
+                                </m:dPr>
+                                <m:e>
+                                  <m:r>
+                                    <a:rPr lang="en-US" sz="2000" i="1">
+                                      <a:solidFill>
+                                        <a:srgbClr val="F4F1EA"/>
+                                      </a:solidFill>
+                                      <a:latin typeface="Cambria Math"/>
+                                      <a:cs typeface="Cambria Math"/>
+                                    </a:rPr>
+                                    <m:t>ω</m:t>
+                                  </m:r>
+                                  <m:r>
+                                    <a:rPr lang="en-US" sz="2000" i="1">
+                                      <a:solidFill>
+                                        <a:srgbClr val="F4F1EA"/>
+                                      </a:solidFill>
+                                      <a:latin typeface="Cambria Math"/>
+                                      <a:cs typeface="Cambria Math"/>
+                                    </a:rPr>
+                                    <m:t>−</m:t>
+                                  </m:r>
+                                  <m:sSub>
+                                    <m:e>
+                                      <m:r>
+                                        <a:rPr lang="en-US" sz="2000" i="1">
+                                          <a:solidFill>
+                                            <a:srgbClr val="F4F1EA"/>
+                                          </a:solidFill>
+                                          <a:latin typeface="Cambria Math"/>
+                                          <a:cs typeface="Cambria Math"/>
+                                        </a:rPr>
+                                        <m:t>ω</m:t>
+                                      </m:r>
+                                    </m:e>
+                                    <m:sub>
+                                      <m:r>
+                                        <a:rPr lang="en-US" sz="2000" i="1">
+                                          <a:solidFill>
+                                            <a:srgbClr val="F4F1EA"/>
+                                          </a:solidFill>
+                                          <a:latin typeface="Cambria Math"/>
+                                          <a:cs typeface="Cambria Math"/>
+                                        </a:rPr>
+                                        <m:t>k</m:t>
+                                      </m:r>
+                                    </m:sub>
+                                  </m:sSub>
+                                </m:e>
+                              </m:d>
+                            </m:e>
+                            <m:sup>
+                              <m:r>
+                                <a:rPr lang="en-US" sz="2000" i="1">
+                                  <a:solidFill>
+                                    <a:srgbClr val="F4F1EA"/>
+                                  </a:solidFill>
+                                  <a:latin typeface="Cambria Math"/>
+                                  <a:cs typeface="Cambria Math"/>
+                                </a:rPr>
+                                <m:t>2</m:t>
+                              </m:r>
+                            </m:sup>
+                          </m:sSup>
+                        </m:den>
+                      </m:f>
+                    </m:oMath>
+                  </m:oMathPara>
+                </a14:m>
+              </mc:Choice>
+              <mc:Fallback>
+                <a:r>
+                  <a:rPr lang="en-US" sz="2000">
+                    <a:solidFill>
+                      <a:srgbClr val="F4F1EA"/>
+                    </a:solidFill>
+                  </a:rPr>
+                  <a:t>û_k^(n+1)(ω) = (f̂ − Σ û_i + λ̂/2) / (1 + 2α(ω−ω_k)²)</a:t>
+                </a:r>
+              </mc:Fallback>
+            </mc:AlternateContent>
+            <a:endParaRPr lang="en-US" sz="2000" dirty="0"/>
           </a:p>
         </p:txBody>
       </p:sp>
@@ -16246,12 +18362,12 @@
         </p:nvSpPr>
         <p:spPr>
           <a:xfrm>
-            <a:off x="548640" y="2743200"/>
-            <a:ext cx="11064240" cy="932688"/>
+            <a:off x="548640" y="3017520"/>
+            <a:ext cx="11064240" cy="1325880"/>
           </a:xfrm>
           <a:prstGeom prst="roundRect">
             <a:avLst>
-              <a:gd name="adj" fmla="val 9804"/>
+              <a:gd name="adj" fmla="val 6897"/>
             </a:avLst>
           </a:prstGeom>
           <a:solidFill>
@@ -16273,8 +18389,8 @@
         </p:nvSpPr>
         <p:spPr>
           <a:xfrm>
-            <a:off x="822960" y="2743200"/>
-            <a:ext cx="2377440" cy="932688"/>
+            <a:off x="822960" y="3017520"/>
+            <a:ext cx="2377440" cy="1325880"/>
           </a:xfrm>
           <a:prstGeom prst="rect">
             <a:avLst/>
@@ -16309,8 +18425,8 @@
         </p:nvSpPr>
         <p:spPr>
           <a:xfrm>
-            <a:off x="3291840" y="2743200"/>
-            <a:ext cx="8229600" cy="932688"/>
+            <a:off x="3291840" y="3063240"/>
+            <a:ext cx="8138160" cy="1234440"/>
           </a:xfrm>
           <a:prstGeom prst="rect">
             <a:avLst/>
@@ -16322,21 +18438,334 @@
           <a:bodyPr wrap="square" lIns="0" tIns="0" rIns="0" bIns="0" rtlCol="0" anchor="ctr"/>
           <a:lstStyle/>
           <a:p>
-            <a:pPr indent="0" marL="0">
+            <a:pPr algn="l" indent="0" marL="0">
+              <a:spcAft>
+                <a:spcPts val="1000"/>
+              </a:spcAft>
               <a:buNone/>
             </a:pPr>
-            <a:r>
-              <a:rPr lang="en-US" sz="1700" dirty="0">
-                <a:solidFill>
-                  <a:srgbClr val="F4F1EA"/>
-                </a:solidFill>
-                <a:latin typeface="Courier New" pitchFamily="34" charset="0"/>
-                <a:ea typeface="Courier New" pitchFamily="34" charset="-122"/>
-                <a:cs typeface="Courier New" pitchFamily="34" charset="-120"/>
-              </a:rPr>
-              <a:t>ω_k = ∫₀^∞ ω |û_k(ω)|² dω / ∫₀^∞ |û_k(ω)|² dω</a:t>
-            </a:r>
-            <a:endParaRPr lang="en-US" sz="1700" dirty="0"/>
+            <mc:AlternateContent xmlns:mc="http://schemas.openxmlformats.org/markup-compatibility/2006">
+              <mc:Choice xmlns:a14="http://schemas.microsoft.com/office/drawing/2010/main" Requires="a14">
+                <a14:m>
+                  <m:oMathPara xmlns:m="http://schemas.openxmlformats.org/officeDocument/2006/math">
+                    <m:oMathParaPr>
+                      <m:jc m:val="left"/>
+                    </m:oMathParaPr>
+                    <m:oMath>
+                      <m:sSubSup>
+                        <m:e>
+                          <m:r>
+                            <a:rPr lang="en-US" sz="2000" i="1">
+                              <a:solidFill>
+                                <a:srgbClr val="F4F1EA"/>
+                              </a:solidFill>
+                              <a:latin typeface="Cambria Math"/>
+                              <a:cs typeface="Cambria Math"/>
+                            </a:rPr>
+                            <m:t>ω</m:t>
+                          </m:r>
+                        </m:e>
+                        <m:sub>
+                          <m:r>
+                            <a:rPr lang="en-US" sz="2000" i="1">
+                              <a:solidFill>
+                                <a:srgbClr val="F4F1EA"/>
+                              </a:solidFill>
+                              <a:latin typeface="Cambria Math"/>
+                              <a:cs typeface="Cambria Math"/>
+                            </a:rPr>
+                            <m:t>k</m:t>
+                          </m:r>
+                        </m:sub>
+                        <m:sup>
+                          <m:r>
+                            <a:rPr lang="en-US" sz="2000" i="1">
+                              <a:solidFill>
+                                <a:srgbClr val="F4F1EA"/>
+                              </a:solidFill>
+                              <a:latin typeface="Cambria Math"/>
+                              <a:cs typeface="Cambria Math"/>
+                            </a:rPr>
+                            <m:t>n+1</m:t>
+                          </m:r>
+                        </m:sup>
+                      </m:sSubSup>
+                      <m:r>
+                        <a:rPr lang="en-US" sz="2000" i="1">
+                          <a:solidFill>
+                            <a:srgbClr val="F4F1EA"/>
+                          </a:solidFill>
+                          <a:latin typeface="Cambria Math"/>
+                          <a:cs typeface="Cambria Math"/>
+                        </a:rPr>
+                        <m:t>=</m:t>
+                      </m:r>
+                      <m:f>
+                        <m:num>
+                          <m:nary>
+                            <m:naryPr>
+                              <m:chr m:val="∫"/>
+                              <m:limLoc m:val="subSup"/>
+                            </m:naryPr>
+                            <m:sub>
+                              <m:r>
+                                <a:rPr lang="en-US" sz="2000" i="1">
+                                  <a:solidFill>
+                                    <a:srgbClr val="F4F1EA"/>
+                                  </a:solidFill>
+                                  <a:latin typeface="Cambria Math"/>
+                                  <a:cs typeface="Cambria Math"/>
+                                </a:rPr>
+                                <m:t>0</m:t>
+                              </m:r>
+                            </m:sub>
+                            <m:sup>
+                              <m:r>
+                                <a:rPr lang="en-US" sz="2000" i="1">
+                                  <a:solidFill>
+                                    <a:srgbClr val="F4F1EA"/>
+                                  </a:solidFill>
+                                  <a:latin typeface="Cambria Math"/>
+                                  <a:cs typeface="Cambria Math"/>
+                                </a:rPr>
+                                <m:t>∞</m:t>
+                              </m:r>
+                            </m:sup>
+                            <m:e>
+                              <m:r>
+                                <a:rPr lang="en-US" sz="2000" i="1">
+                                  <a:solidFill>
+                                    <a:srgbClr val="F4F1EA"/>
+                                  </a:solidFill>
+                                  <a:latin typeface="Cambria Math"/>
+                                  <a:cs typeface="Cambria Math"/>
+                                </a:rPr>
+                                <m:t>ω</m:t>
+                              </m:r>
+                              <m:sSup>
+                                <m:e>
+                                  <m:d>
+                                    <m:dPr>
+                                      <m:begChr m:val="|"/>
+                                      <m:endChr m:val="|"/>
+                                    </m:dPr>
+                                    <m:e>
+                                      <m:sSub>
+                                        <m:e>
+                                          <m:acc>
+                                            <m:accPr>
+                                              <m:chr m:val="̂"/>
+                                            </m:accPr>
+                                            <m:e>
+                                              <m:r>
+                                                <a:rPr lang="en-US" sz="2000" i="1">
+                                                  <a:solidFill>
+                                                    <a:srgbClr val="F4F1EA"/>
+                                                  </a:solidFill>
+                                                  <a:latin typeface="Cambria Math"/>
+                                                  <a:cs typeface="Cambria Math"/>
+                                                </a:rPr>
+                                                <m:t>u</m:t>
+                                              </m:r>
+                                            </m:e>
+                                          </m:acc>
+                                        </m:e>
+                                        <m:sub>
+                                          <m:r>
+                                            <a:rPr lang="en-US" sz="2000" i="1">
+                                              <a:solidFill>
+                                                <a:srgbClr val="F4F1EA"/>
+                                              </a:solidFill>
+                                              <a:latin typeface="Cambria Math"/>
+                                              <a:cs typeface="Cambria Math"/>
+                                            </a:rPr>
+                                            <m:t>k</m:t>
+                                          </m:r>
+                                        </m:sub>
+                                      </m:sSub>
+                                      <m:d>
+                                        <m:dPr>
+                                          <m:begChr m:val="("/>
+                                          <m:endChr m:val=")"/>
+                                        </m:dPr>
+                                        <m:e>
+                                          <m:r>
+                                            <a:rPr lang="en-US" sz="2000" i="1">
+                                              <a:solidFill>
+                                                <a:srgbClr val="F4F1EA"/>
+                                              </a:solidFill>
+                                              <a:latin typeface="Cambria Math"/>
+                                              <a:cs typeface="Cambria Math"/>
+                                            </a:rPr>
+                                            <m:t>ω</m:t>
+                                          </m:r>
+                                        </m:e>
+                                      </m:d>
+                                    </m:e>
+                                  </m:d>
+                                </m:e>
+                                <m:sup>
+                                  <m:r>
+                                    <a:rPr lang="en-US" sz="2000" i="1">
+                                      <a:solidFill>
+                                        <a:srgbClr val="F4F1EA"/>
+                                      </a:solidFill>
+                                      <a:latin typeface="Cambria Math"/>
+                                      <a:cs typeface="Cambria Math"/>
+                                    </a:rPr>
+                                    <m:t>2</m:t>
+                                  </m:r>
+                                </m:sup>
+                              </m:sSup>
+                              <m:r>
+                                <a:rPr lang="en-US" sz="2000" i="1">
+                                  <a:solidFill>
+                                    <a:srgbClr val="F4F1EA"/>
+                                  </a:solidFill>
+                                  <a:latin typeface="Cambria Math"/>
+                                  <a:cs typeface="Cambria Math"/>
+                                </a:rPr>
+                                <m:t>dω</m:t>
+                              </m:r>
+                            </m:e>
+                          </m:nary>
+                        </m:num>
+                        <m:den>
+                          <m:nary>
+                            <m:naryPr>
+                              <m:chr m:val="∫"/>
+                              <m:limLoc m:val="subSup"/>
+                            </m:naryPr>
+                            <m:sub>
+                              <m:r>
+                                <a:rPr lang="en-US" sz="2000" i="1">
+                                  <a:solidFill>
+                                    <a:srgbClr val="F4F1EA"/>
+                                  </a:solidFill>
+                                  <a:latin typeface="Cambria Math"/>
+                                  <a:cs typeface="Cambria Math"/>
+                                </a:rPr>
+                                <m:t>0</m:t>
+                              </m:r>
+                            </m:sub>
+                            <m:sup>
+                              <m:r>
+                                <a:rPr lang="en-US" sz="2000" i="1">
+                                  <a:solidFill>
+                                    <a:srgbClr val="F4F1EA"/>
+                                  </a:solidFill>
+                                  <a:latin typeface="Cambria Math"/>
+                                  <a:cs typeface="Cambria Math"/>
+                                </a:rPr>
+                                <m:t>∞</m:t>
+                              </m:r>
+                            </m:sup>
+                            <m:e>
+                              <m:sSup>
+                                <m:e>
+                                  <m:d>
+                                    <m:dPr>
+                                      <m:begChr m:val="|"/>
+                                      <m:endChr m:val="|"/>
+                                    </m:dPr>
+                                    <m:e>
+                                      <m:sSub>
+                                        <m:e>
+                                          <m:acc>
+                                            <m:accPr>
+                                              <m:chr m:val="̂"/>
+                                            </m:accPr>
+                                            <m:e>
+                                              <m:r>
+                                                <a:rPr lang="en-US" sz="2000" i="1">
+                                                  <a:solidFill>
+                                                    <a:srgbClr val="F4F1EA"/>
+                                                  </a:solidFill>
+                                                  <a:latin typeface="Cambria Math"/>
+                                                  <a:cs typeface="Cambria Math"/>
+                                                </a:rPr>
+                                                <m:t>u</m:t>
+                                              </m:r>
+                                            </m:e>
+                                          </m:acc>
+                                        </m:e>
+                                        <m:sub>
+                                          <m:r>
+                                            <a:rPr lang="en-US" sz="2000" i="1">
+                                              <a:solidFill>
+                                                <a:srgbClr val="F4F1EA"/>
+                                              </a:solidFill>
+                                              <a:latin typeface="Cambria Math"/>
+                                              <a:cs typeface="Cambria Math"/>
+                                            </a:rPr>
+                                            <m:t>k</m:t>
+                                          </m:r>
+                                        </m:sub>
+                                      </m:sSub>
+                                      <m:d>
+                                        <m:dPr>
+                                          <m:begChr m:val="("/>
+                                          <m:endChr m:val=")"/>
+                                        </m:dPr>
+                                        <m:e>
+                                          <m:r>
+                                            <a:rPr lang="en-US" sz="2000" i="1">
+                                              <a:solidFill>
+                                                <a:srgbClr val="F4F1EA"/>
+                                              </a:solidFill>
+                                              <a:latin typeface="Cambria Math"/>
+                                              <a:cs typeface="Cambria Math"/>
+                                            </a:rPr>
+                                            <m:t>ω</m:t>
+                                          </m:r>
+                                        </m:e>
+                                      </m:d>
+                                    </m:e>
+                                  </m:d>
+                                </m:e>
+                                <m:sup>
+                                  <m:r>
+                                    <a:rPr lang="en-US" sz="2000" i="1">
+                                      <a:solidFill>
+                                        <a:srgbClr val="F4F1EA"/>
+                                      </a:solidFill>
+                                      <a:latin typeface="Cambria Math"/>
+                                      <a:cs typeface="Cambria Math"/>
+                                    </a:rPr>
+                                    <m:t>2</m:t>
+                                  </m:r>
+                                </m:sup>
+                              </m:sSup>
+                              <m:r>
+                                <a:rPr lang="en-US" sz="2000" i="1">
+                                  <a:solidFill>
+                                    <a:srgbClr val="F4F1EA"/>
+                                  </a:solidFill>
+                                  <a:latin typeface="Cambria Math"/>
+                                  <a:cs typeface="Cambria Math"/>
+                                </a:rPr>
+                                <m:t>dω</m:t>
+                              </m:r>
+                            </m:e>
+                          </m:nary>
+                        </m:den>
+                      </m:f>
+                    </m:oMath>
+                  </m:oMathPara>
+                </a14:m>
+              </mc:Choice>
+              <mc:Fallback>
+                <a:r>
+                  <a:rPr lang="en-US" sz="2000">
+                    <a:solidFill>
+                      <a:srgbClr val="F4F1EA"/>
+                    </a:solidFill>
+                  </a:rPr>
+                  <a:t>ω_k^(n+1) = ∫ ω|û_k|² dω / ∫ |û_k|² dω</a:t>
+                </a:r>
+              </mc:Fallback>
+            </mc:AlternateContent>
+            <a:endParaRPr lang="en-US" sz="2000" dirty="0"/>
           </a:p>
         </p:txBody>
       </p:sp>
@@ -16348,12 +18777,12 @@
         </p:nvSpPr>
         <p:spPr>
           <a:xfrm>
-            <a:off x="548640" y="3840480"/>
-            <a:ext cx="11064240" cy="932688"/>
+            <a:off x="548640" y="4480560"/>
+            <a:ext cx="11064240" cy="731520"/>
           </a:xfrm>
           <a:prstGeom prst="roundRect">
             <a:avLst>
-              <a:gd name="adj" fmla="val 9804"/>
+              <a:gd name="adj" fmla="val 12500"/>
             </a:avLst>
           </a:prstGeom>
           <a:solidFill>
@@ -16375,8 +18804,8 @@
         </p:nvSpPr>
         <p:spPr>
           <a:xfrm>
-            <a:off x="822960" y="3840480"/>
-            <a:ext cx="2377440" cy="932688"/>
+            <a:off x="822960" y="4480560"/>
+            <a:ext cx="2377440" cy="731520"/>
           </a:xfrm>
           <a:prstGeom prst="rect">
             <a:avLst/>
@@ -16411,8 +18840,8 @@
         </p:nvSpPr>
         <p:spPr>
           <a:xfrm>
-            <a:off x="3291840" y="3840480"/>
-            <a:ext cx="8229600" cy="932688"/>
+            <a:off x="3291840" y="4526280"/>
+            <a:ext cx="8138160" cy="640080"/>
           </a:xfrm>
           <a:prstGeom prst="rect">
             <a:avLst/>
@@ -16424,21 +18853,212 @@
           <a:bodyPr wrap="square" lIns="0" tIns="0" rIns="0" bIns="0" rtlCol="0" anchor="ctr"/>
           <a:lstStyle/>
           <a:p>
-            <a:pPr indent="0" marL="0">
+            <a:pPr algn="l" indent="0" marL="0">
+              <a:spcAft>
+                <a:spcPts val="1000"/>
+              </a:spcAft>
               <a:buNone/>
             </a:pPr>
-            <a:r>
-              <a:rPr lang="en-US" sz="1700" dirty="0">
-                <a:solidFill>
-                  <a:srgbClr val="F4F1EA"/>
-                </a:solidFill>
-                <a:latin typeface="Courier New" pitchFamily="34" charset="0"/>
-                <a:ea typeface="Courier New" pitchFamily="34" charset="-122"/>
-                <a:cs typeface="Courier New" pitchFamily="34" charset="-120"/>
-              </a:rPr>
-              <a:t>λ̂ ← λ̂ + τ ( f̂ − Σ_k û_k )</a:t>
-            </a:r>
-            <a:endParaRPr lang="en-US" sz="1700" dirty="0"/>
+            <mc:AlternateContent xmlns:mc="http://schemas.openxmlformats.org/markup-compatibility/2006">
+              <mc:Choice xmlns:a14="http://schemas.microsoft.com/office/drawing/2010/main" Requires="a14">
+                <a14:m>
+                  <m:oMathPara xmlns:m="http://schemas.openxmlformats.org/officeDocument/2006/math">
+                    <m:oMathParaPr>
+                      <m:jc m:val="left"/>
+                    </m:oMathParaPr>
+                    <m:oMath>
+                      <m:sSup>
+                        <m:e>
+                          <m:acc>
+                            <m:accPr>
+                              <m:chr m:val="̂"/>
+                            </m:accPr>
+                            <m:e>
+                              <m:r>
+                                <a:rPr lang="en-US" sz="2000" i="1">
+                                  <a:solidFill>
+                                    <a:srgbClr val="F4F1EA"/>
+                                  </a:solidFill>
+                                  <a:latin typeface="Cambria Math"/>
+                                  <a:cs typeface="Cambria Math"/>
+                                </a:rPr>
+                                <m:t>λ</m:t>
+                              </m:r>
+                            </m:e>
+                          </m:acc>
+                        </m:e>
+                        <m:sup>
+                          <m:r>
+                            <a:rPr lang="en-US" sz="2000" i="1">
+                              <a:solidFill>
+                                <a:srgbClr val="F4F1EA"/>
+                              </a:solidFill>
+                              <a:latin typeface="Cambria Math"/>
+                              <a:cs typeface="Cambria Math"/>
+                            </a:rPr>
+                            <m:t>n+1</m:t>
+                          </m:r>
+                        </m:sup>
+                      </m:sSup>
+                      <m:r>
+                        <a:rPr lang="en-US" sz="2000" i="1">
+                          <a:solidFill>
+                            <a:srgbClr val="F4F1EA"/>
+                          </a:solidFill>
+                          <a:latin typeface="Cambria Math"/>
+                          <a:cs typeface="Cambria Math"/>
+                        </a:rPr>
+                        <m:t>←</m:t>
+                      </m:r>
+                      <m:sSup>
+                        <m:e>
+                          <m:acc>
+                            <m:accPr>
+                              <m:chr m:val="̂"/>
+                            </m:accPr>
+                            <m:e>
+                              <m:r>
+                                <a:rPr lang="en-US" sz="2000" i="1">
+                                  <a:solidFill>
+                                    <a:srgbClr val="F4F1EA"/>
+                                  </a:solidFill>
+                                  <a:latin typeface="Cambria Math"/>
+                                  <a:cs typeface="Cambria Math"/>
+                                </a:rPr>
+                                <m:t>λ</m:t>
+                              </m:r>
+                            </m:e>
+                          </m:acc>
+                        </m:e>
+                        <m:sup>
+                          <m:r>
+                            <a:rPr lang="en-US" sz="2000" i="1">
+                              <a:solidFill>
+                                <a:srgbClr val="F4F1EA"/>
+                              </a:solidFill>
+                              <a:latin typeface="Cambria Math"/>
+                              <a:cs typeface="Cambria Math"/>
+                            </a:rPr>
+                            <m:t>n</m:t>
+                          </m:r>
+                        </m:sup>
+                      </m:sSup>
+                      <m:r>
+                        <a:rPr lang="en-US" sz="2000" i="1">
+                          <a:solidFill>
+                            <a:srgbClr val="F4F1EA"/>
+                          </a:solidFill>
+                          <a:latin typeface="Cambria Math"/>
+                          <a:cs typeface="Cambria Math"/>
+                        </a:rPr>
+                        <m:t>+τ</m:t>
+                      </m:r>
+                      <m:d>
+                        <m:dPr>
+                          <m:begChr m:val="("/>
+                          <m:endChr m:val=")"/>
+                        </m:dPr>
+                        <m:e>
+                          <m:acc>
+                            <m:accPr>
+                              <m:chr m:val="̂"/>
+                            </m:accPr>
+                            <m:e>
+                              <m:r>
+                                <a:rPr lang="en-US" sz="2000" i="1">
+                                  <a:solidFill>
+                                    <a:srgbClr val="F4F1EA"/>
+                                  </a:solidFill>
+                                  <a:latin typeface="Cambria Math"/>
+                                  <a:cs typeface="Cambria Math"/>
+                                </a:rPr>
+                                <m:t>f</m:t>
+                              </m:r>
+                            </m:e>
+                          </m:acc>
+                          <m:r>
+                            <a:rPr lang="en-US" sz="2000" i="1">
+                              <a:solidFill>
+                                <a:srgbClr val="F4F1EA"/>
+                              </a:solidFill>
+                              <a:latin typeface="Cambria Math"/>
+                              <a:cs typeface="Cambria Math"/>
+                            </a:rPr>
+                            <m:t>−</m:t>
+                          </m:r>
+                          <m:nary>
+                            <m:naryPr>
+                              <m:chr m:val="∑"/>
+                              <m:limLoc m:val="undOvr"/>
+                              <m:supHide m:val="1"/>
+                            </m:naryPr>
+                            <m:sub>
+                              <m:r>
+                                <a:rPr lang="en-US" sz="2000" i="1">
+                                  <a:solidFill>
+                                    <a:srgbClr val="F4F1EA"/>
+                                  </a:solidFill>
+                                  <a:latin typeface="Cambria Math"/>
+                                  <a:cs typeface="Cambria Math"/>
+                                </a:rPr>
+                                <m:t>k</m:t>
+                              </m:r>
+                            </m:sub>
+                            <m:sup/>
+                            <m:e>
+                              <m:sSub>
+                                <m:e>
+                                  <m:acc>
+                                    <m:accPr>
+                                      <m:chr m:val="̂"/>
+                                    </m:accPr>
+                                    <m:e>
+                                      <m:r>
+                                        <a:rPr lang="en-US" sz="2000" i="1">
+                                          <a:solidFill>
+                                            <a:srgbClr val="F4F1EA"/>
+                                          </a:solidFill>
+                                          <a:latin typeface="Cambria Math"/>
+                                          <a:cs typeface="Cambria Math"/>
+                                        </a:rPr>
+                                        <m:t>u</m:t>
+                                      </m:r>
+                                    </m:e>
+                                  </m:acc>
+                                </m:e>
+                                <m:sub>
+                                  <m:r>
+                                    <a:rPr lang="en-US" sz="2000" i="1">
+                                      <a:solidFill>
+                                        <a:srgbClr val="F4F1EA"/>
+                                      </a:solidFill>
+                                      <a:latin typeface="Cambria Math"/>
+                                      <a:cs typeface="Cambria Math"/>
+                                    </a:rPr>
+                                    <m:t>k</m:t>
+                                  </m:r>
+                                </m:sub>
+                              </m:sSub>
+                            </m:e>
+                          </m:nary>
+                        </m:e>
+                      </m:d>
+                    </m:oMath>
+                  </m:oMathPara>
+                </a14:m>
+              </mc:Choice>
+              <mc:Fallback>
+                <a:r>
+                  <a:rPr lang="en-US" sz="2000">
+                    <a:solidFill>
+                      <a:srgbClr val="F4F1EA"/>
+                    </a:solidFill>
+                  </a:rPr>
+                  <a:t>λ̂ ← λ̂ + τ(f̂ − Σ_k û_k)</a:t>
+                </a:r>
+              </mc:Fallback>
+            </mc:AlternateContent>
+            <a:endParaRPr lang="en-US" sz="2000" dirty="0"/>
           </a:p>
         </p:txBody>
       </p:sp>
@@ -16450,8 +19070,8 @@
         </p:nvSpPr>
         <p:spPr>
           <a:xfrm>
-            <a:off x="548640" y="5029200"/>
-            <a:ext cx="11064240" cy="1463040"/>
+            <a:off x="548640" y="5349240"/>
+            <a:ext cx="11064240" cy="1280160"/>
           </a:xfrm>
           <a:prstGeom prst="rect">
             <a:avLst/>
@@ -16471,14 +19091,14 @@
               <a:buChar char="•"/>
             </a:pPr>
             <a:r>
-              <a:rPr lang="en-US" sz="1700" dirty="0">
+              <a:rPr lang="en-US" sz="1500" dirty="0">
                 <a:solidFill>
                   <a:srgbClr val="2D3748"/>
                 </a:solidFill>
               </a:rPr>
               <a:t>The mode update is a Wiener-like filter centred on ω_k; α sets how narrow it is</a:t>
             </a:r>
-            <a:endParaRPr lang="en-US" sz="1700" dirty="0"/>
+            <a:endParaRPr lang="en-US" sz="1500" dirty="0"/>
           </a:p>
           <a:p>
             <a:pPr marL="342900" indent="-342900">
@@ -16489,14 +19109,14 @@
               <a:buChar char="•"/>
             </a:pPr>
             <a:r>
-              <a:rPr lang="en-US" sz="1700" dirty="0">
+              <a:rPr lang="en-US" sz="1500" dirty="0">
                 <a:solidFill>
                   <a:srgbClr val="2D3748"/>
                 </a:solidFill>
               </a:rPr>
               <a:t>ω_k is the power-weighted mean frequency of the mode, positive half spectrum</a:t>
             </a:r>
-            <a:endParaRPr lang="en-US" sz="1700" dirty="0"/>
+            <a:endParaRPr lang="en-US" sz="1500" dirty="0"/>
           </a:p>
           <a:p>
             <a:pPr marL="342900" indent="-342900">
@@ -16507,14 +19127,14 @@
               <a:buChar char="•"/>
             </a:pPr>
             <a:r>
-              <a:rPr lang="en-US" sz="1700" dirty="0">
+              <a:rPr lang="en-US" sz="1500" dirty="0">
                 <a:solidFill>
                   <a:srgbClr val="2D3748"/>
                 </a:solidFill>
               </a:rPr>
               <a:t>All updates run in the FFT domain, so the method is global and non-causal</a:t>
             </a:r>
-            <a:endParaRPr lang="en-US" sz="1700" dirty="0"/>
+            <a:endParaRPr lang="en-US" sz="1500" dirty="0"/>
           </a:p>
         </p:txBody>
       </p:sp>
@@ -17583,7 +20203,161 @@
         <p:spPr>
           <a:xfrm>
             <a:off x="777240" y="1874520"/>
-            <a:ext cx="4937760" cy="2194560"/>
+            <a:ext cx="4937760" cy="274320"/>
+          </a:xfrm>
+          <a:prstGeom prst="rect">
+            <a:avLst/>
+          </a:prstGeom>
+          <a:noFill/>
+          <a:ln/>
+        </p:spPr>
+        <p:txBody>
+          <a:bodyPr wrap="square" lIns="0" tIns="0" rIns="0" bIns="0" rtlCol="0" anchor="ctr"/>
+          <a:lstStyle/>
+          <a:p>
+            <a:pPr indent="0" marL="0">
+              <a:buNone/>
+            </a:pPr>
+            <a:r>
+              <a:rPr lang="en-US" sz="1300" b="1" dirty="0">
+                <a:solidFill>
+                  <a:srgbClr val="E8833A"/>
+                </a:solidFill>
+              </a:rPr>
+              <a:t>ITERATIVE SOLVER</a:t>
+            </a:r>
+            <a:endParaRPr lang="en-US" sz="1300" dirty="0"/>
+          </a:p>
+        </p:txBody>
+      </p:sp>
+      <p:sp>
+        <p:nvSpPr>
+          <p:cNvPr id="8" name="Text 5"/>
+          <p:cNvSpPr txBox="1"/>
+          <p:nvPr/>
+        </p:nvSpPr>
+        <p:spPr>
+          <a:xfrm>
+            <a:off x="777240" y="2286000"/>
+            <a:ext cx="4937760" cy="365760"/>
+          </a:xfrm>
+          <a:prstGeom prst="rect">
+            <a:avLst/>
+          </a:prstGeom>
+          <a:noFill/>
+          <a:ln/>
+        </p:spPr>
+        <p:txBody>
+          <a:bodyPr wrap="square" lIns="0" tIns="0" rIns="0" bIns="0" rtlCol="0" anchor="ctr"/>
+          <a:lstStyle/>
+          <a:p>
+            <a:pPr indent="0" marL="0">
+              <a:buNone/>
+            </a:pPr>
+            <a:r>
+              <a:rPr lang="en-US" sz="1700" dirty="0">
+                <a:solidFill>
+                  <a:srgbClr val="F4F1EA"/>
+                </a:solidFill>
+              </a:rPr>
+              <a:t>repeat for n = 1, …, 500:</a:t>
+            </a:r>
+            <a:endParaRPr lang="en-US" sz="1700" dirty="0"/>
+          </a:p>
+        </p:txBody>
+      </p:sp>
+      <p:sp>
+        <p:nvSpPr>
+          <p:cNvPr id="9" name="Text 6"/>
+          <p:cNvSpPr txBox="1"/>
+          <p:nvPr/>
+        </p:nvSpPr>
+        <p:spPr>
+          <a:xfrm>
+            <a:off x="777240" y="2697480"/>
+            <a:ext cx="4937760" cy="640080"/>
+          </a:xfrm>
+          <a:prstGeom prst="rect">
+            <a:avLst/>
+          </a:prstGeom>
+          <a:noFill/>
+          <a:ln/>
+        </p:spPr>
+        <p:txBody>
+          <a:bodyPr wrap="square" lIns="0" tIns="0" rIns="0" bIns="0" rtlCol="0" anchor="ctr"/>
+          <a:lstStyle/>
+          <a:p>
+            <a:pPr algn="l" indent="0" marL="0">
+              <a:spcAft>
+                <a:spcPts val="1000"/>
+              </a:spcAft>
+              <a:buNone/>
+            </a:pPr>
+            <mc:AlternateContent xmlns:mc="http://schemas.openxmlformats.org/markup-compatibility/2006">
+              <mc:Choice xmlns:a14="http://schemas.microsoft.com/office/drawing/2010/main" Requires="a14">
+                <a14:m>
+                  <m:oMathPara xmlns:m="http://schemas.openxmlformats.org/officeDocument/2006/math">
+                    <m:oMathParaPr>
+                      <m:jc m:val="left"/>
+                    </m:oMathParaPr>
+                    <m:oMath>
+                      <m:r>
+                        <a:rPr lang="en-US" sz="2400" i="1">
+                          <a:solidFill>
+                            <a:srgbClr val="F4F1EA"/>
+                          </a:solidFill>
+                          <a:latin typeface="Cambria Math"/>
+                          <a:cs typeface="Cambria Math"/>
+                        </a:rPr>
+                        <m:t>x←T</m:t>
+                      </m:r>
+                      <m:d>
+                        <m:dPr>
+                          <m:begChr m:val="("/>
+                          <m:endChr m:val=")"/>
+                        </m:dPr>
+                        <m:e>
+                          <m:r>
+                            <a:rPr lang="en-US" sz="2400" i="1">
+                              <a:solidFill>
+                                <a:srgbClr val="F4F1EA"/>
+                              </a:solidFill>
+                              <a:latin typeface="Cambria Math"/>
+                              <a:cs typeface="Cambria Math"/>
+                            </a:rPr>
+                            <m:t>x;θ</m:t>
+                          </m:r>
+                        </m:e>
+                      </m:d>
+                    </m:oMath>
+                  </m:oMathPara>
+                </a14:m>
+              </mc:Choice>
+              <mc:Fallback>
+                <a:r>
+                  <a:rPr lang="en-US" sz="2400">
+                    <a:solidFill>
+                      <a:srgbClr val="F4F1EA"/>
+                    </a:solidFill>
+                  </a:rPr>
+                  <a:t>x ← T(x; θ)</a:t>
+                </a:r>
+              </mc:Fallback>
+            </mc:AlternateContent>
+            <a:endParaRPr lang="en-US" sz="2400" dirty="0"/>
+          </a:p>
+        </p:txBody>
+      </p:sp>
+      <p:sp>
+        <p:nvSpPr>
+          <p:cNvPr id="10" name="Text 7"/>
+          <p:cNvSpPr txBox="1"/>
+          <p:nvPr/>
+        </p:nvSpPr>
+        <p:spPr>
+          <a:xfrm>
+            <a:off x="777240" y="3429000"/>
+            <a:ext cx="4937760" cy="640080"/>
           </a:xfrm>
           <a:prstGeom prst="rect">
             <a:avLst/>
@@ -17596,89 +20370,23 @@
           <a:lstStyle/>
           <a:p>
             <a:pPr indent="0" marL="0">
-              <a:spcAft>
-                <a:spcPts val="800"/>
-              </a:spcAft>
               <a:buNone/>
             </a:pPr>
             <a:r>
-              <a:rPr lang="en-US" sz="1300" b="1" dirty="0">
-                <a:solidFill>
-                  <a:srgbClr val="E8833A"/>
-                </a:solidFill>
-                <a:latin typeface="Calibri" pitchFamily="34" charset="0"/>
-                <a:ea typeface="Calibri" pitchFamily="34" charset="-122"/>
-                <a:cs typeface="Calibri" pitchFamily="34" charset="-120"/>
-              </a:rPr>
-              <a:t>ITERATIVE SOLVER</a:t>
-            </a:r>
-            <a:endParaRPr lang="en-US" sz="1300" dirty="0"/>
-          </a:p>
-          <a:p>
-            <a:pPr indent="0" marL="0">
-              <a:spcAft>
-                <a:spcPts val="800"/>
-              </a:spcAft>
-              <a:buNone/>
-            </a:pPr>
-            <a:r>
-              <a:rPr lang="en-US" sz="1700" dirty="0">
-                <a:solidFill>
-                  <a:srgbClr val="F4F1EA"/>
-                </a:solidFill>
-                <a:latin typeface="Courier New" pitchFamily="34" charset="0"/>
-                <a:ea typeface="Courier New" pitchFamily="34" charset="-122"/>
-                <a:cs typeface="Courier New" pitchFamily="34" charset="-120"/>
-              </a:rPr>
-              <a:t>repeat n = 1..500:</a:t>
-            </a:r>
-            <a:endParaRPr lang="en-US" sz="1300" dirty="0"/>
-          </a:p>
-          <a:p>
-            <a:pPr indent="0" marL="0">
-              <a:spcAft>
-                <a:spcPts val="800"/>
-              </a:spcAft>
-              <a:buNone/>
-            </a:pPr>
-            <a:r>
-              <a:rPr lang="en-US" sz="1700" dirty="0">
-                <a:solidFill>
-                  <a:srgbClr val="F4F1EA"/>
-                </a:solidFill>
-                <a:latin typeface="Courier New" pitchFamily="34" charset="0"/>
-                <a:ea typeface="Courier New" pitchFamily="34" charset="-122"/>
-                <a:cs typeface="Courier New" pitchFamily="34" charset="-120"/>
-              </a:rPr>
-              <a:t>    x ← T(x; θ)</a:t>
-            </a:r>
-            <a:endParaRPr lang="en-US" sz="1300" dirty="0"/>
-          </a:p>
-          <a:p>
-            <a:pPr indent="0" marL="0">
-              <a:spcAft>
-                <a:spcPts val="800"/>
-              </a:spcAft>
-              <a:buNone/>
-            </a:pPr>
-            <a:r>
               <a:rPr lang="en-US" sz="1500" dirty="0">
                 <a:solidFill>
                   <a:srgbClr val="B8C4D9"/>
                 </a:solidFill>
-                <a:latin typeface="Calibri" pitchFamily="34" charset="0"/>
-                <a:ea typeface="Calibri" pitchFamily="34" charset="-122"/>
-                <a:cs typeface="Calibri" pitchFamily="34" charset="-120"/>
               </a:rPr>
               <a:t>One operator T, one fixed θ (α, τ), many repetitions until convergence.</a:t>
             </a:r>
-            <a:endParaRPr lang="en-US" sz="1300" dirty="0"/>
+            <a:endParaRPr lang="en-US" sz="1500" dirty="0"/>
           </a:p>
         </p:txBody>
       </p:sp>
       <p:sp>
         <p:nvSpPr>
-          <p:cNvPr id="8" name="Shape 5"/>
+          <p:cNvPr id="11" name="Shape 8"/>
           <p:cNvSpPr/>
           <p:nvPr/>
         </p:nvSpPr>
@@ -17705,7 +20413,7 @@
       </p:sp>
       <p:sp>
         <p:nvSpPr>
-          <p:cNvPr id="9" name="Text 6"/>
+          <p:cNvPr id="12" name="Text 9"/>
           <p:cNvSpPr txBox="1"/>
           <p:nvPr/>
         </p:nvSpPr>
@@ -17736,14 +20444,486 @@
       </p:sp>
       <p:sp>
         <p:nvSpPr>
-          <p:cNvPr id="10" name="Text 7"/>
+          <p:cNvPr id="13" name="Text 10"/>
           <p:cNvSpPr txBox="1"/>
           <p:nvPr/>
         </p:nvSpPr>
         <p:spPr>
           <a:xfrm>
             <a:off x="6446520" y="1874520"/>
-            <a:ext cx="4937760" cy="2194560"/>
+            <a:ext cx="4937760" cy="274320"/>
+          </a:xfrm>
+          <a:prstGeom prst="rect">
+            <a:avLst/>
+          </a:prstGeom>
+          <a:noFill/>
+          <a:ln/>
+        </p:spPr>
+        <p:txBody>
+          <a:bodyPr wrap="square" lIns="0" tIns="0" rIns="0" bIns="0" rtlCol="0" anchor="ctr"/>
+          <a:lstStyle/>
+          <a:p>
+            <a:pPr indent="0" marL="0">
+              <a:buNone/>
+            </a:pPr>
+            <a:r>
+              <a:rPr lang="en-US" sz="1300" b="1" dirty="0">
+                <a:solidFill>
+                  <a:srgbClr val="7DB8F0"/>
+                </a:solidFill>
+              </a:rPr>
+              <a:t>UNFOLDED NETWORK</a:t>
+            </a:r>
+            <a:endParaRPr lang="en-US" sz="1300" dirty="0"/>
+          </a:p>
+        </p:txBody>
+      </p:sp>
+      <p:sp>
+        <p:nvSpPr>
+          <p:cNvPr id="14" name="Text 11"/>
+          <p:cNvSpPr txBox="1"/>
+          <p:nvPr/>
+        </p:nvSpPr>
+        <p:spPr>
+          <a:xfrm>
+            <a:off x="6446520" y="2194560"/>
+            <a:ext cx="4937760" cy="1371600"/>
+          </a:xfrm>
+          <a:prstGeom prst="rect">
+            <a:avLst/>
+          </a:prstGeom>
+          <a:noFill/>
+          <a:ln/>
+        </p:spPr>
+        <p:txBody>
+          <a:bodyPr wrap="square" lIns="0" tIns="0" rIns="0" bIns="0" rtlCol="0" anchor="ctr"/>
+          <a:lstStyle/>
+          <a:p>
+            <a:pPr algn="l" indent="0" marL="0">
+              <a:spcAft>
+                <a:spcPts val="600"/>
+              </a:spcAft>
+              <a:buNone/>
+            </a:pPr>
+            <mc:AlternateContent xmlns:mc="http://schemas.openxmlformats.org/markup-compatibility/2006">
+              <mc:Choice xmlns:a14="http://schemas.microsoft.com/office/drawing/2010/main" Requires="a14">
+                <a14:m>
+                  <m:oMathPara xmlns:m="http://schemas.openxmlformats.org/officeDocument/2006/math">
+                    <m:oMathParaPr>
+                      <m:jc m:val="left"/>
+                    </m:oMathParaPr>
+                    <m:oMath>
+                      <m:sSub>
+                        <m:e>
+                          <m:r>
+                            <a:rPr lang="en-US" sz="2000" i="1">
+                              <a:solidFill>
+                                <a:srgbClr val="F4F1EA"/>
+                              </a:solidFill>
+                              <a:latin typeface="Cambria Math"/>
+                              <a:cs typeface="Cambria Math"/>
+                            </a:rPr>
+                            <m:t>x</m:t>
+                          </m:r>
+                        </m:e>
+                        <m:sub>
+                          <m:r>
+                            <a:rPr lang="en-US" sz="2000" i="1">
+                              <a:solidFill>
+                                <a:srgbClr val="F4F1EA"/>
+                              </a:solidFill>
+                              <a:latin typeface="Cambria Math"/>
+                              <a:cs typeface="Cambria Math"/>
+                            </a:rPr>
+                            <m:t>1</m:t>
+                          </m:r>
+                        </m:sub>
+                      </m:sSub>
+                      <m:r>
+                        <a:rPr lang="en-US" sz="2000" i="1">
+                          <a:solidFill>
+                            <a:srgbClr val="F4F1EA"/>
+                          </a:solidFill>
+                          <a:latin typeface="Cambria Math"/>
+                          <a:cs typeface="Cambria Math"/>
+                        </a:rPr>
+                        <m:t>=T</m:t>
+                      </m:r>
+                      <m:d>
+                        <m:dPr>
+                          <m:begChr m:val="("/>
+                          <m:endChr m:val=")"/>
+                        </m:dPr>
+                        <m:e>
+                          <m:sSub>
+                            <m:e>
+                              <m:r>
+                                <a:rPr lang="en-US" sz="2000" i="1">
+                                  <a:solidFill>
+                                    <a:srgbClr val="F4F1EA"/>
+                                  </a:solidFill>
+                                  <a:latin typeface="Cambria Math"/>
+                                  <a:cs typeface="Cambria Math"/>
+                                </a:rPr>
+                                <m:t>x</m:t>
+                              </m:r>
+                            </m:e>
+                            <m:sub>
+                              <m:r>
+                                <a:rPr lang="en-US" sz="2000" i="1">
+                                  <a:solidFill>
+                                    <a:srgbClr val="F4F1EA"/>
+                                  </a:solidFill>
+                                  <a:latin typeface="Cambria Math"/>
+                                  <a:cs typeface="Cambria Math"/>
+                                </a:rPr>
+                                <m:t>0</m:t>
+                              </m:r>
+                            </m:sub>
+                          </m:sSub>
+                          <m:r>
+                            <a:rPr lang="en-US" sz="2000" i="1">
+                              <a:solidFill>
+                                <a:srgbClr val="F4F1EA"/>
+                              </a:solidFill>
+                              <a:latin typeface="Cambria Math"/>
+                              <a:cs typeface="Cambria Math"/>
+                            </a:rPr>
+                            <m:t>;</m:t>
+                          </m:r>
+                          <m:sSub>
+                            <m:e>
+                              <m:r>
+                                <a:rPr lang="en-US" sz="2000" i="1">
+                                  <a:solidFill>
+                                    <a:srgbClr val="F4F1EA"/>
+                                  </a:solidFill>
+                                  <a:latin typeface="Cambria Math"/>
+                                  <a:cs typeface="Cambria Math"/>
+                                </a:rPr>
+                                <m:t>θ</m:t>
+                              </m:r>
+                            </m:e>
+                            <m:sub>
+                              <m:r>
+                                <a:rPr lang="en-US" sz="2000" i="1">
+                                  <a:solidFill>
+                                    <a:srgbClr val="F4F1EA"/>
+                                  </a:solidFill>
+                                  <a:latin typeface="Cambria Math"/>
+                                  <a:cs typeface="Cambria Math"/>
+                                </a:rPr>
+                                <m:t>1</m:t>
+                              </m:r>
+                            </m:sub>
+                          </m:sSub>
+                        </m:e>
+                      </m:d>
+                    </m:oMath>
+                  </m:oMathPara>
+                </a14:m>
+              </mc:Choice>
+              <mc:Fallback>
+                <a:r>
+                  <a:rPr lang="en-US" sz="2000">
+                    <a:solidFill>
+                      <a:srgbClr val="F4F1EA"/>
+                    </a:solidFill>
+                  </a:rPr>
+                  <a:t>x₁ = T(x₀; θ₁)</a:t>
+                </a:r>
+              </mc:Fallback>
+            </mc:AlternateContent>
+            <a:endParaRPr lang="en-US" sz="2000" dirty="0"/>
+          </a:p>
+          <a:p>
+            <a:pPr algn="l" indent="0" marL="0">
+              <a:spcAft>
+                <a:spcPts val="600"/>
+              </a:spcAft>
+              <a:buNone/>
+            </a:pPr>
+            <mc:AlternateContent xmlns:mc="http://schemas.openxmlformats.org/markup-compatibility/2006">
+              <mc:Choice xmlns:a14="http://schemas.microsoft.com/office/drawing/2010/main" Requires="a14">
+                <a14:m>
+                  <m:oMathPara xmlns:m="http://schemas.openxmlformats.org/officeDocument/2006/math">
+                    <m:oMathParaPr>
+                      <m:jc m:val="left"/>
+                    </m:oMathParaPr>
+                    <m:oMath>
+                      <m:sSub>
+                        <m:e>
+                          <m:r>
+                            <a:rPr lang="en-US" sz="2000" i="1">
+                              <a:solidFill>
+                                <a:srgbClr val="F4F1EA"/>
+                              </a:solidFill>
+                              <a:latin typeface="Cambria Math"/>
+                              <a:cs typeface="Cambria Math"/>
+                            </a:rPr>
+                            <m:t>x</m:t>
+                          </m:r>
+                        </m:e>
+                        <m:sub>
+                          <m:r>
+                            <a:rPr lang="en-US" sz="2000" i="1">
+                              <a:solidFill>
+                                <a:srgbClr val="F4F1EA"/>
+                              </a:solidFill>
+                              <a:latin typeface="Cambria Math"/>
+                              <a:cs typeface="Cambria Math"/>
+                            </a:rPr>
+                            <m:t>2</m:t>
+                          </m:r>
+                        </m:sub>
+                      </m:sSub>
+                      <m:r>
+                        <a:rPr lang="en-US" sz="2000" i="1">
+                          <a:solidFill>
+                            <a:srgbClr val="F4F1EA"/>
+                          </a:solidFill>
+                          <a:latin typeface="Cambria Math"/>
+                          <a:cs typeface="Cambria Math"/>
+                        </a:rPr>
+                        <m:t>=T</m:t>
+                      </m:r>
+                      <m:d>
+                        <m:dPr>
+                          <m:begChr m:val="("/>
+                          <m:endChr m:val=")"/>
+                        </m:dPr>
+                        <m:e>
+                          <m:sSub>
+                            <m:e>
+                              <m:r>
+                                <a:rPr lang="en-US" sz="2000" i="1">
+                                  <a:solidFill>
+                                    <a:srgbClr val="F4F1EA"/>
+                                  </a:solidFill>
+                                  <a:latin typeface="Cambria Math"/>
+                                  <a:cs typeface="Cambria Math"/>
+                                </a:rPr>
+                                <m:t>x</m:t>
+                              </m:r>
+                            </m:e>
+                            <m:sub>
+                              <m:r>
+                                <a:rPr lang="en-US" sz="2000" i="1">
+                                  <a:solidFill>
+                                    <a:srgbClr val="F4F1EA"/>
+                                  </a:solidFill>
+                                  <a:latin typeface="Cambria Math"/>
+                                  <a:cs typeface="Cambria Math"/>
+                                </a:rPr>
+                                <m:t>1</m:t>
+                              </m:r>
+                            </m:sub>
+                          </m:sSub>
+                          <m:r>
+                            <a:rPr lang="en-US" sz="2000" i="1">
+                              <a:solidFill>
+                                <a:srgbClr val="F4F1EA"/>
+                              </a:solidFill>
+                              <a:latin typeface="Cambria Math"/>
+                              <a:cs typeface="Cambria Math"/>
+                            </a:rPr>
+                            <m:t>;</m:t>
+                          </m:r>
+                          <m:sSub>
+                            <m:e>
+                              <m:r>
+                                <a:rPr lang="en-US" sz="2000" i="1">
+                                  <a:solidFill>
+                                    <a:srgbClr val="F4F1EA"/>
+                                  </a:solidFill>
+                                  <a:latin typeface="Cambria Math"/>
+                                  <a:cs typeface="Cambria Math"/>
+                                </a:rPr>
+                                <m:t>θ</m:t>
+                              </m:r>
+                            </m:e>
+                            <m:sub>
+                              <m:r>
+                                <a:rPr lang="en-US" sz="2000" i="1">
+                                  <a:solidFill>
+                                    <a:srgbClr val="F4F1EA"/>
+                                  </a:solidFill>
+                                  <a:latin typeface="Cambria Math"/>
+                                  <a:cs typeface="Cambria Math"/>
+                                </a:rPr>
+                                <m:t>2</m:t>
+                              </m:r>
+                            </m:sub>
+                          </m:sSub>
+                        </m:e>
+                      </m:d>
+                    </m:oMath>
+                  </m:oMathPara>
+                </a14:m>
+              </mc:Choice>
+              <mc:Fallback>
+                <a:r>
+                  <a:rPr lang="en-US" sz="2000">
+                    <a:solidFill>
+                      <a:srgbClr val="F4F1EA"/>
+                    </a:solidFill>
+                  </a:rPr>
+                  <a:t>x₂ = T(x₁; θ₂)</a:t>
+                </a:r>
+              </mc:Fallback>
+            </mc:AlternateContent>
+            <a:endParaRPr lang="en-US" sz="2000" dirty="0"/>
+          </a:p>
+          <a:p>
+            <a:pPr algn="l" indent="0" marL="0">
+              <a:spcAft>
+                <a:spcPts val="600"/>
+              </a:spcAft>
+              <a:buNone/>
+            </a:pPr>
+            <mc:AlternateContent xmlns:mc="http://schemas.openxmlformats.org/markup-compatibility/2006">
+              <mc:Choice xmlns:a14="http://schemas.microsoft.com/office/drawing/2010/main" Requires="a14">
+                <a14:m>
+                  <m:oMathPara xmlns:m="http://schemas.openxmlformats.org/officeDocument/2006/math">
+                    <m:oMathParaPr>
+                      <m:jc m:val="left"/>
+                    </m:oMathParaPr>
+                    <m:oMath>
+                      <m:sSub>
+                        <m:e>
+                          <m:r>
+                            <a:rPr lang="en-US" sz="2000" i="1">
+                              <a:solidFill>
+                                <a:srgbClr val="F4F1EA"/>
+                              </a:solidFill>
+                              <a:latin typeface="Cambria Math"/>
+                              <a:cs typeface="Cambria Math"/>
+                            </a:rPr>
+                            <m:t>x</m:t>
+                          </m:r>
+                        </m:e>
+                        <m:sub>
+                          <m:r>
+                            <a:rPr lang="en-US" sz="2000" i="1">
+                              <a:solidFill>
+                                <a:srgbClr val="F4F1EA"/>
+                              </a:solidFill>
+                              <a:latin typeface="Cambria Math"/>
+                              <a:cs typeface="Cambria Math"/>
+                            </a:rPr>
+                            <m:t>N</m:t>
+                          </m:r>
+                        </m:sub>
+                      </m:sSub>
+                      <m:r>
+                        <a:rPr lang="en-US" sz="2000" i="1">
+                          <a:solidFill>
+                            <a:srgbClr val="F4F1EA"/>
+                          </a:solidFill>
+                          <a:latin typeface="Cambria Math"/>
+                          <a:cs typeface="Cambria Math"/>
+                        </a:rPr>
+                        <m:t>=T</m:t>
+                      </m:r>
+                      <m:d>
+                        <m:dPr>
+                          <m:begChr m:val="("/>
+                          <m:endChr m:val=")"/>
+                        </m:dPr>
+                        <m:e>
+                          <m:sSub>
+                            <m:e>
+                              <m:r>
+                                <a:rPr lang="en-US" sz="2000" i="1">
+                                  <a:solidFill>
+                                    <a:srgbClr val="F4F1EA"/>
+                                  </a:solidFill>
+                                  <a:latin typeface="Cambria Math"/>
+                                  <a:cs typeface="Cambria Math"/>
+                                </a:rPr>
+                                <m:t>x</m:t>
+                              </m:r>
+                            </m:e>
+                            <m:sub>
+                              <m:r>
+                                <a:rPr lang="en-US" sz="2000" i="1">
+                                  <a:solidFill>
+                                    <a:srgbClr val="F4F1EA"/>
+                                  </a:solidFill>
+                                  <a:latin typeface="Cambria Math"/>
+                                  <a:cs typeface="Cambria Math"/>
+                                </a:rPr>
+                                <m:t>N−1</m:t>
+                              </m:r>
+                            </m:sub>
+                          </m:sSub>
+                          <m:r>
+                            <a:rPr lang="en-US" sz="2000" i="1">
+                              <a:solidFill>
+                                <a:srgbClr val="F4F1EA"/>
+                              </a:solidFill>
+                              <a:latin typeface="Cambria Math"/>
+                              <a:cs typeface="Cambria Math"/>
+                            </a:rPr>
+                            <m:t>;</m:t>
+                          </m:r>
+                          <m:sSub>
+                            <m:e>
+                              <m:r>
+                                <a:rPr lang="en-US" sz="2000" i="1">
+                                  <a:solidFill>
+                                    <a:srgbClr val="F4F1EA"/>
+                                  </a:solidFill>
+                                  <a:latin typeface="Cambria Math"/>
+                                  <a:cs typeface="Cambria Math"/>
+                                </a:rPr>
+                                <m:t>θ</m:t>
+                              </m:r>
+                            </m:e>
+                            <m:sub>
+                              <m:r>
+                                <a:rPr lang="en-US" sz="2000" i="1">
+                                  <a:solidFill>
+                                    <a:srgbClr val="F4F1EA"/>
+                                  </a:solidFill>
+                                  <a:latin typeface="Cambria Math"/>
+                                  <a:cs typeface="Cambria Math"/>
+                                </a:rPr>
+                                <m:t>N</m:t>
+                              </m:r>
+                            </m:sub>
+                          </m:sSub>
+                        </m:e>
+                      </m:d>
+                    </m:oMath>
+                  </m:oMathPara>
+                </a14:m>
+              </mc:Choice>
+              <mc:Fallback>
+                <a:r>
+                  <a:rPr lang="en-US" sz="2000">
+                    <a:solidFill>
+                      <a:srgbClr val="F4F1EA"/>
+                    </a:solidFill>
+                  </a:rPr>
+                  <a:t>x_N = T(x_{N−1}; θ_N)</a:t>
+                </a:r>
+              </mc:Fallback>
+            </mc:AlternateContent>
+            <a:endParaRPr lang="en-US" sz="2000" dirty="0"/>
+          </a:p>
+        </p:txBody>
+      </p:sp>
+      <p:sp>
+        <p:nvSpPr>
+          <p:cNvPr id="15" name="Text 12"/>
+          <p:cNvSpPr txBox="1"/>
+          <p:nvPr/>
+        </p:nvSpPr>
+        <p:spPr>
+          <a:xfrm>
+            <a:off x="6446520" y="3611880"/>
+            <a:ext cx="4937760" cy="457200"/>
           </a:xfrm>
           <a:prstGeom prst="rect">
             <a:avLst/>
@@ -17756,109 +20936,23 @@
           <a:lstStyle/>
           <a:p>
             <a:pPr indent="0" marL="0">
-              <a:spcAft>
-                <a:spcPts val="600"/>
-              </a:spcAft>
               <a:buNone/>
             </a:pPr>
             <a:r>
-              <a:rPr lang="en-US" sz="1300" b="1" dirty="0">
-                <a:solidFill>
-                  <a:srgbClr val="7DB8F0"/>
-                </a:solidFill>
-                <a:latin typeface="Calibri" pitchFamily="34" charset="0"/>
-                <a:ea typeface="Calibri" pitchFamily="34" charset="-122"/>
-                <a:cs typeface="Calibri" pitchFamily="34" charset="-120"/>
-              </a:rPr>
-              <a:t>UNFOLDED NETWORK</a:t>
-            </a:r>
-            <a:endParaRPr lang="en-US" sz="1300" dirty="0"/>
-          </a:p>
-          <a:p>
-            <a:pPr indent="0" marL="0">
-              <a:spcAft>
-                <a:spcPts val="600"/>
-              </a:spcAft>
-              <a:buNone/>
-            </a:pPr>
-            <a:r>
-              <a:rPr lang="en-US" sz="1700" dirty="0">
-                <a:solidFill>
-                  <a:srgbClr val="F4F1EA"/>
-                </a:solidFill>
-                <a:latin typeface="Courier New" pitchFamily="34" charset="0"/>
-                <a:ea typeface="Courier New" pitchFamily="34" charset="-122"/>
-                <a:cs typeface="Courier New" pitchFamily="34" charset="-120"/>
-              </a:rPr>
-              <a:t>x₁ = T(x₀; θ₁)</a:t>
-            </a:r>
-            <a:endParaRPr lang="en-US" sz="1300" dirty="0"/>
-          </a:p>
-          <a:p>
-            <a:pPr indent="0" marL="0">
-              <a:spcAft>
-                <a:spcPts val="600"/>
-              </a:spcAft>
-              <a:buNone/>
-            </a:pPr>
-            <a:r>
-              <a:rPr lang="en-US" sz="1700" dirty="0">
-                <a:solidFill>
-                  <a:srgbClr val="F4F1EA"/>
-                </a:solidFill>
-                <a:latin typeface="Courier New" pitchFamily="34" charset="0"/>
-                <a:ea typeface="Courier New" pitchFamily="34" charset="-122"/>
-                <a:cs typeface="Courier New" pitchFamily="34" charset="-120"/>
-              </a:rPr>
-              <a:t>x₂ = T(x₁; θ₂)</a:t>
-            </a:r>
-            <a:endParaRPr lang="en-US" sz="1300" dirty="0"/>
-          </a:p>
-          <a:p>
-            <a:pPr indent="0" marL="0">
-              <a:spcAft>
-                <a:spcPts val="600"/>
-              </a:spcAft>
-              <a:buNone/>
-            </a:pPr>
-            <a:r>
-              <a:rPr lang="en-US" sz="1700" dirty="0">
-                <a:solidFill>
-                  <a:srgbClr val="F4F1EA"/>
-                </a:solidFill>
-                <a:latin typeface="Courier New" pitchFamily="34" charset="0"/>
-                <a:ea typeface="Courier New" pitchFamily="34" charset="-122"/>
-                <a:cs typeface="Courier New" pitchFamily="34" charset="-120"/>
-              </a:rPr>
-              <a:t>…  x_N = T(x_{N−1}; θ_N)</a:t>
-            </a:r>
-            <a:endParaRPr lang="en-US" sz="1300" dirty="0"/>
-          </a:p>
-          <a:p>
-            <a:pPr indent="0" marL="0">
-              <a:spcAft>
-                <a:spcPts val="600"/>
-              </a:spcAft>
-              <a:buNone/>
-            </a:pPr>
-            <a:r>
               <a:rPr lang="en-US" sz="1500" dirty="0">
                 <a:solidFill>
                   <a:srgbClr val="B8C4D9"/>
                 </a:solidFill>
-                <a:latin typeface="Calibri" pitchFamily="34" charset="0"/>
-                <a:ea typeface="Calibri" pitchFamily="34" charset="-122"/>
-                <a:cs typeface="Calibri" pitchFamily="34" charset="-120"/>
               </a:rPr>
               <a:t>N copies (N small), each with its own learnable θ_n.</a:t>
             </a:r>
-            <a:endParaRPr lang="en-US" sz="1300" dirty="0"/>
+            <a:endParaRPr lang="en-US" sz="1500" dirty="0"/>
           </a:p>
         </p:txBody>
       </p:sp>
       <p:sp>
         <p:nvSpPr>
-          <p:cNvPr id="11" name="Text 8"/>
+          <p:cNvPr id="16" name="Text 13"/>
           <p:cNvSpPr txBox="1"/>
           <p:nvPr/>
         </p:nvSpPr>
@@ -19194,12 +22288,12 @@
         </p:nvSpPr>
         <p:spPr>
           <a:xfrm>
-            <a:off x="548640" y="3383280"/>
-            <a:ext cx="11064240" cy="1554480"/>
+            <a:off x="548640" y="3291840"/>
+            <a:ext cx="11064240" cy="2103120"/>
           </a:xfrm>
           <a:prstGeom prst="roundRect">
             <a:avLst>
-              <a:gd name="adj" fmla="val 5882"/>
+              <a:gd name="adj" fmla="val 4348"/>
             </a:avLst>
           </a:prstGeom>
           <a:solidFill>
@@ -19221,8 +22315,8 @@
         </p:nvSpPr>
         <p:spPr>
           <a:xfrm>
-            <a:off x="822960" y="3520440"/>
-            <a:ext cx="10515600" cy="1280160"/>
+            <a:off x="822960" y="3383280"/>
+            <a:ext cx="10515600" cy="1920240"/>
           </a:xfrm>
           <a:prstGeom prst="rect">
             <a:avLst/>
@@ -19234,44 +22328,598 @@
           <a:bodyPr wrap="square" lIns="0" tIns="0" rIns="0" bIns="0" rtlCol="0" anchor="ctr"/>
           <a:lstStyle/>
           <a:p>
-            <a:pPr indent="0" marL="0">
+            <a:pPr algn="l" indent="0" marL="0">
               <a:spcAft>
-                <a:spcPts val="600"/>
+                <a:spcPts val="800"/>
               </a:spcAft>
               <a:buNone/>
             </a:pPr>
-            <a:r>
-              <a:rPr lang="en-US" sz="1700" dirty="0">
-                <a:solidFill>
-                  <a:srgbClr val="F4F1EA"/>
-                </a:solidFill>
-                <a:latin typeface="Courier New" pitchFamily="34" charset="0"/>
-                <a:ea typeface="Courier New" pitchFamily="34" charset="-122"/>
-                <a:cs typeface="Courier New" pitchFamily="34" charset="-120"/>
-              </a:rPr>
-              <a:t>û_k = ( f̂₊ − Σ_{i≠k} û_i − λ̂_n/2 ) / ( 1 + softplus(α_k)(ω − ω_k)² )</a:t>
-            </a:r>
-            <a:endParaRPr lang="en-US" sz="1700" dirty="0"/>
-          </a:p>
-          <a:p>
-            <a:pPr indent="0" marL="0">
+            <mc:AlternateContent xmlns:mc="http://schemas.openxmlformats.org/markup-compatibility/2006">
+              <mc:Choice xmlns:a14="http://schemas.microsoft.com/office/drawing/2010/main" Requires="a14">
+                <a14:m>
+                  <m:oMathPara xmlns:m="http://schemas.openxmlformats.org/officeDocument/2006/math">
+                    <m:oMathParaPr>
+                      <m:jc m:val="left"/>
+                    </m:oMathParaPr>
+                    <m:oMath>
+                      <m:sSub>
+                        <m:e>
+                          <m:acc>
+                            <m:accPr>
+                              <m:chr m:val="̂"/>
+                            </m:accPr>
+                            <m:e>
+                              <m:r>
+                                <a:rPr lang="en-US" sz="2000" i="1">
+                                  <a:solidFill>
+                                    <a:srgbClr val="F4F1EA"/>
+                                  </a:solidFill>
+                                  <a:latin typeface="Cambria Math"/>
+                                  <a:cs typeface="Cambria Math"/>
+                                </a:rPr>
+                                <m:t>u</m:t>
+                              </m:r>
+                            </m:e>
+                          </m:acc>
+                        </m:e>
+                        <m:sub>
+                          <m:r>
+                            <a:rPr lang="en-US" sz="2000" i="1">
+                              <a:solidFill>
+                                <a:srgbClr val="F4F1EA"/>
+                              </a:solidFill>
+                              <a:latin typeface="Cambria Math"/>
+                              <a:cs typeface="Cambria Math"/>
+                            </a:rPr>
+                            <m:t>k</m:t>
+                          </m:r>
+                        </m:sub>
+                      </m:sSub>
+                      <m:r>
+                        <a:rPr lang="en-US" sz="2000" i="1">
+                          <a:solidFill>
+                            <a:srgbClr val="F4F1EA"/>
+                          </a:solidFill>
+                          <a:latin typeface="Cambria Math"/>
+                          <a:cs typeface="Cambria Math"/>
+                        </a:rPr>
+                        <m:t>=</m:t>
+                      </m:r>
+                      <m:f>
+                        <m:num>
+                          <m:sSub>
+                            <m:e>
+                              <m:acc>
+                                <m:accPr>
+                                  <m:chr m:val="̂"/>
+                                </m:accPr>
+                                <m:e>
+                                  <m:r>
+                                    <a:rPr lang="en-US" sz="2000" i="1">
+                                      <a:solidFill>
+                                        <a:srgbClr val="F4F1EA"/>
+                                      </a:solidFill>
+                                      <a:latin typeface="Cambria Math"/>
+                                      <a:cs typeface="Cambria Math"/>
+                                    </a:rPr>
+                                    <m:t>f</m:t>
+                                  </m:r>
+                                </m:e>
+                              </m:acc>
+                            </m:e>
+                            <m:sub>
+                              <m:r>
+                                <a:rPr lang="en-US" sz="2000" i="1">
+                                  <a:solidFill>
+                                    <a:srgbClr val="F4F1EA"/>
+                                  </a:solidFill>
+                                  <a:latin typeface="Cambria Math"/>
+                                  <a:cs typeface="Cambria Math"/>
+                                </a:rPr>
+                                <m:t>+</m:t>
+                              </m:r>
+                            </m:sub>
+                          </m:sSub>
+                          <m:r>
+                            <a:rPr lang="en-US" sz="2000" i="1">
+                              <a:solidFill>
+                                <a:srgbClr val="F4F1EA"/>
+                              </a:solidFill>
+                              <a:latin typeface="Cambria Math"/>
+                              <a:cs typeface="Cambria Math"/>
+                            </a:rPr>
+                            <m:t>−</m:t>
+                          </m:r>
+                          <m:nary>
+                            <m:naryPr>
+                              <m:chr m:val="∑"/>
+                              <m:limLoc m:val="undOvr"/>
+                              <m:supHide m:val="1"/>
+                            </m:naryPr>
+                            <m:sub>
+                              <m:r>
+                                <a:rPr lang="en-US" sz="2000" i="1">
+                                  <a:solidFill>
+                                    <a:srgbClr val="F4F1EA"/>
+                                  </a:solidFill>
+                                  <a:latin typeface="Cambria Math"/>
+                                  <a:cs typeface="Cambria Math"/>
+                                </a:rPr>
+                                <m:t>i≠k</m:t>
+                              </m:r>
+                            </m:sub>
+                            <m:sup/>
+                            <m:e>
+                              <m:sSub>
+                                <m:e>
+                                  <m:acc>
+                                    <m:accPr>
+                                      <m:chr m:val="̂"/>
+                                    </m:accPr>
+                                    <m:e>
+                                      <m:r>
+                                        <a:rPr lang="en-US" sz="2000" i="1">
+                                          <a:solidFill>
+                                            <a:srgbClr val="F4F1EA"/>
+                                          </a:solidFill>
+                                          <a:latin typeface="Cambria Math"/>
+                                          <a:cs typeface="Cambria Math"/>
+                                        </a:rPr>
+                                        <m:t>u</m:t>
+                                      </m:r>
+                                    </m:e>
+                                  </m:acc>
+                                </m:e>
+                                <m:sub>
+                                  <m:r>
+                                    <a:rPr lang="en-US" sz="2000" i="1">
+                                      <a:solidFill>
+                                        <a:srgbClr val="F4F1EA"/>
+                                      </a:solidFill>
+                                      <a:latin typeface="Cambria Math"/>
+                                      <a:cs typeface="Cambria Math"/>
+                                    </a:rPr>
+                                    <m:t>i</m:t>
+                                  </m:r>
+                                </m:sub>
+                              </m:sSub>
+                            </m:e>
+                          </m:nary>
+                          <m:r>
+                            <a:rPr lang="en-US" sz="2000" i="1">
+                              <a:solidFill>
+                                <a:srgbClr val="F4F1EA"/>
+                              </a:solidFill>
+                              <a:latin typeface="Cambria Math"/>
+                              <a:cs typeface="Cambria Math"/>
+                            </a:rPr>
+                            <m:t>−</m:t>
+                          </m:r>
+                          <m:f>
+                            <m:num>
+                              <m:sSub>
+                                <m:e>
+                                  <m:acc>
+                                    <m:accPr>
+                                      <m:chr m:val="̂"/>
+                                    </m:accPr>
+                                    <m:e>
+                                      <m:r>
+                                        <a:rPr lang="en-US" sz="2000" i="1">
+                                          <a:solidFill>
+                                            <a:srgbClr val="F4F1EA"/>
+                                          </a:solidFill>
+                                          <a:latin typeface="Cambria Math"/>
+                                          <a:cs typeface="Cambria Math"/>
+                                        </a:rPr>
+                                        <m:t>λ</m:t>
+                                      </m:r>
+                                    </m:e>
+                                  </m:acc>
+                                </m:e>
+                                <m:sub>
+                                  <m:r>
+                                    <a:rPr lang="en-US" sz="2000" i="1">
+                                      <a:solidFill>
+                                        <a:srgbClr val="F4F1EA"/>
+                                      </a:solidFill>
+                                      <a:latin typeface="Cambria Math"/>
+                                      <a:cs typeface="Cambria Math"/>
+                                    </a:rPr>
+                                    <m:t>n</m:t>
+                                  </m:r>
+                                </m:sub>
+                              </m:sSub>
+                            </m:num>
+                            <m:den>
+                              <m:r>
+                                <a:rPr lang="en-US" sz="2000" i="1">
+                                  <a:solidFill>
+                                    <a:srgbClr val="F4F1EA"/>
+                                  </a:solidFill>
+                                  <a:latin typeface="Cambria Math"/>
+                                  <a:cs typeface="Cambria Math"/>
+                                </a:rPr>
+                                <m:t>2</m:t>
+                              </m:r>
+                            </m:den>
+                          </m:f>
+                        </m:num>
+                        <m:den>
+                          <m:r>
+                            <a:rPr lang="en-US" sz="2000" i="1">
+                              <a:solidFill>
+                                <a:srgbClr val="F4F1EA"/>
+                              </a:solidFill>
+                              <a:latin typeface="Cambria Math"/>
+                              <a:cs typeface="Cambria Math"/>
+                            </a:rPr>
+                            <m:t>1+softplus</m:t>
+                          </m:r>
+                          <m:d>
+                            <m:dPr>
+                              <m:begChr m:val="("/>
+                              <m:endChr m:val=")"/>
+                            </m:dPr>
+                            <m:e>
+                              <m:sSub>
+                                <m:e>
+                                  <m:r>
+                                    <a:rPr lang="en-US" sz="2000" i="1">
+                                      <a:solidFill>
+                                        <a:srgbClr val="F4F1EA"/>
+                                      </a:solidFill>
+                                      <a:latin typeface="Cambria Math"/>
+                                      <a:cs typeface="Cambria Math"/>
+                                    </a:rPr>
+                                    <m:t>α</m:t>
+                                  </m:r>
+                                </m:e>
+                                <m:sub>
+                                  <m:r>
+                                    <a:rPr lang="en-US" sz="2000" i="1">
+                                      <a:solidFill>
+                                        <a:srgbClr val="F4F1EA"/>
+                                      </a:solidFill>
+                                      <a:latin typeface="Cambria Math"/>
+                                      <a:cs typeface="Cambria Math"/>
+                                    </a:rPr>
+                                    <m:t>k</m:t>
+                                  </m:r>
+                                </m:sub>
+                              </m:sSub>
+                            </m:e>
+                          </m:d>
+                          <m:sSup>
+                            <m:e>
+                              <m:d>
+                                <m:dPr>
+                                  <m:begChr m:val="("/>
+                                  <m:endChr m:val=")"/>
+                                </m:dPr>
+                                <m:e>
+                                  <m:r>
+                                    <a:rPr lang="en-US" sz="2000" i="1">
+                                      <a:solidFill>
+                                        <a:srgbClr val="F4F1EA"/>
+                                      </a:solidFill>
+                                      <a:latin typeface="Cambria Math"/>
+                                      <a:cs typeface="Cambria Math"/>
+                                    </a:rPr>
+                                    <m:t>ω</m:t>
+                                  </m:r>
+                                  <m:r>
+                                    <a:rPr lang="en-US" sz="2000" i="1">
+                                      <a:solidFill>
+                                        <a:srgbClr val="F4F1EA"/>
+                                      </a:solidFill>
+                                      <a:latin typeface="Cambria Math"/>
+                                      <a:cs typeface="Cambria Math"/>
+                                    </a:rPr>
+                                    <m:t>−</m:t>
+                                  </m:r>
+                                  <m:sSub>
+                                    <m:e>
+                                      <m:r>
+                                        <a:rPr lang="en-US" sz="2000" i="1">
+                                          <a:solidFill>
+                                            <a:srgbClr val="F4F1EA"/>
+                                          </a:solidFill>
+                                          <a:latin typeface="Cambria Math"/>
+                                          <a:cs typeface="Cambria Math"/>
+                                        </a:rPr>
+                                        <m:t>ω</m:t>
+                                      </m:r>
+                                    </m:e>
+                                    <m:sub>
+                                      <m:r>
+                                        <a:rPr lang="en-US" sz="2000" i="1">
+                                          <a:solidFill>
+                                            <a:srgbClr val="F4F1EA"/>
+                                          </a:solidFill>
+                                          <a:latin typeface="Cambria Math"/>
+                                          <a:cs typeface="Cambria Math"/>
+                                        </a:rPr>
+                                        <m:t>k</m:t>
+                                      </m:r>
+                                    </m:sub>
+                                  </m:sSub>
+                                </m:e>
+                              </m:d>
+                            </m:e>
+                            <m:sup>
+                              <m:r>
+                                <a:rPr lang="en-US" sz="2000" i="1">
+                                  <a:solidFill>
+                                    <a:srgbClr val="F4F1EA"/>
+                                  </a:solidFill>
+                                  <a:latin typeface="Cambria Math"/>
+                                  <a:cs typeface="Cambria Math"/>
+                                </a:rPr>
+                                <m:t>2</m:t>
+                              </m:r>
+                            </m:sup>
+                          </m:sSup>
+                        </m:den>
+                      </m:f>
+                    </m:oMath>
+                  </m:oMathPara>
+                </a14:m>
+              </mc:Choice>
+              <mc:Fallback>
+                <a:r>
+                  <a:rPr lang="en-US" sz="2000">
+                    <a:solidFill>
+                      <a:srgbClr val="F4F1EA"/>
+                    </a:solidFill>
+                  </a:rPr>
+                  <a:t>û_k = (f̂₊ − Σ û_i − λ̂_n/2) / (1 + softplus(α_k)(ω−ω_k)²)</a:t>
+                </a:r>
+              </mc:Fallback>
+            </mc:AlternateContent>
+            <a:endParaRPr lang="en-US" sz="2000" dirty="0"/>
+          </a:p>
+          <a:p>
+            <a:pPr algn="l" indent="0" marL="0">
               <a:spcAft>
-                <a:spcPts val="600"/>
+                <a:spcPts val="800"/>
               </a:spcAft>
               <a:buNone/>
             </a:pPr>
-            <a:r>
-              <a:rPr lang="en-US" sz="1700" dirty="0">
-                <a:solidFill>
-                  <a:srgbClr val="F4F1EA"/>
-                </a:solidFill>
-                <a:latin typeface="Courier New" pitchFamily="34" charset="0"/>
-                <a:ea typeface="Courier New" pitchFamily="34" charset="-122"/>
-                <a:cs typeface="Courier New" pitchFamily="34" charset="-120"/>
-              </a:rPr>
-              <a:t>ω_k = Σ ω |û_k|² / Σ |û_k|²      (positive half, k ≥ 1)</a:t>
-            </a:r>
-            <a:endParaRPr lang="en-US" sz="1700" dirty="0"/>
+            <mc:AlternateContent xmlns:mc="http://schemas.openxmlformats.org/markup-compatibility/2006">
+              <mc:Choice xmlns:a14="http://schemas.microsoft.com/office/drawing/2010/main" Requires="a14">
+                <a14:m>
+                  <m:oMathPara xmlns:m="http://schemas.openxmlformats.org/officeDocument/2006/math">
+                    <m:oMathParaPr>
+                      <m:jc m:val="left"/>
+                    </m:oMathParaPr>
+                    <m:oMath>
+                      <m:sSub>
+                        <m:e>
+                          <m:r>
+                            <a:rPr lang="en-US" sz="2000" i="1">
+                              <a:solidFill>
+                                <a:srgbClr val="F4F1EA"/>
+                              </a:solidFill>
+                              <a:latin typeface="Cambria Math"/>
+                              <a:cs typeface="Cambria Math"/>
+                            </a:rPr>
+                            <m:t>ω</m:t>
+                          </m:r>
+                        </m:e>
+                        <m:sub>
+                          <m:r>
+                            <a:rPr lang="en-US" sz="2000" i="1">
+                              <a:solidFill>
+                                <a:srgbClr val="F4F1EA"/>
+                              </a:solidFill>
+                              <a:latin typeface="Cambria Math"/>
+                              <a:cs typeface="Cambria Math"/>
+                            </a:rPr>
+                            <m:t>k</m:t>
+                          </m:r>
+                        </m:sub>
+                      </m:sSub>
+                      <m:r>
+                        <a:rPr lang="en-US" sz="2000" i="1">
+                          <a:solidFill>
+                            <a:srgbClr val="F4F1EA"/>
+                          </a:solidFill>
+                          <a:latin typeface="Cambria Math"/>
+                          <a:cs typeface="Cambria Math"/>
+                        </a:rPr>
+                        <m:t>=</m:t>
+                      </m:r>
+                      <m:f>
+                        <m:num>
+                          <m:nary>
+                            <m:naryPr>
+                              <m:chr m:val="∑"/>
+                              <m:limLoc m:val="undOvr"/>
+                              <m:supHide m:val="1"/>
+                            </m:naryPr>
+                            <m:sub>
+                              <m:r>
+                                <a:rPr lang="en-US" sz="2000" i="1">
+                                  <a:solidFill>
+                                    <a:srgbClr val="F4F1EA"/>
+                                  </a:solidFill>
+                                  <a:latin typeface="Cambria Math"/>
+                                  <a:cs typeface="Cambria Math"/>
+                                </a:rPr>
+                                <m:t>ω</m:t>
+                              </m:r>
+                            </m:sub>
+                            <m:sup/>
+                            <m:e>
+                              <m:r>
+                                <a:rPr lang="en-US" sz="2000" i="1">
+                                  <a:solidFill>
+                                    <a:srgbClr val="F4F1EA"/>
+                                  </a:solidFill>
+                                  <a:latin typeface="Cambria Math"/>
+                                  <a:cs typeface="Cambria Math"/>
+                                </a:rPr>
+                                <m:t>ω</m:t>
+                              </m:r>
+                              <m:sSup>
+                                <m:e>
+                                  <m:d>
+                                    <m:dPr>
+                                      <m:begChr m:val="|"/>
+                                      <m:endChr m:val="|"/>
+                                    </m:dPr>
+                                    <m:e>
+                                      <m:sSub>
+                                        <m:e>
+                                          <m:acc>
+                                            <m:accPr>
+                                              <m:chr m:val="̂"/>
+                                            </m:accPr>
+                                            <m:e>
+                                              <m:r>
+                                                <a:rPr lang="en-US" sz="2000" i="1">
+                                                  <a:solidFill>
+                                                    <a:srgbClr val="F4F1EA"/>
+                                                  </a:solidFill>
+                                                  <a:latin typeface="Cambria Math"/>
+                                                  <a:cs typeface="Cambria Math"/>
+                                                </a:rPr>
+                                                <m:t>u</m:t>
+                                              </m:r>
+                                            </m:e>
+                                          </m:acc>
+                                        </m:e>
+                                        <m:sub>
+                                          <m:r>
+                                            <a:rPr lang="en-US" sz="2000" i="1">
+                                              <a:solidFill>
+                                                <a:srgbClr val="F4F1EA"/>
+                                              </a:solidFill>
+                                              <a:latin typeface="Cambria Math"/>
+                                              <a:cs typeface="Cambria Math"/>
+                                            </a:rPr>
+                                            <m:t>k</m:t>
+                                          </m:r>
+                                        </m:sub>
+                                      </m:sSub>
+                                    </m:e>
+                                  </m:d>
+                                </m:e>
+                                <m:sup>
+                                  <m:r>
+                                    <a:rPr lang="en-US" sz="2000" i="1">
+                                      <a:solidFill>
+                                        <a:srgbClr val="F4F1EA"/>
+                                      </a:solidFill>
+                                      <a:latin typeface="Cambria Math"/>
+                                      <a:cs typeface="Cambria Math"/>
+                                    </a:rPr>
+                                    <m:t>2</m:t>
+                                  </m:r>
+                                </m:sup>
+                              </m:sSup>
+                            </m:e>
+                          </m:nary>
+                        </m:num>
+                        <m:den>
+                          <m:nary>
+                            <m:naryPr>
+                              <m:chr m:val="∑"/>
+                              <m:limLoc m:val="undOvr"/>
+                              <m:supHide m:val="1"/>
+                            </m:naryPr>
+                            <m:sub>
+                              <m:r>
+                                <a:rPr lang="en-US" sz="2000" i="1">
+                                  <a:solidFill>
+                                    <a:srgbClr val="F4F1EA"/>
+                                  </a:solidFill>
+                                  <a:latin typeface="Cambria Math"/>
+                                  <a:cs typeface="Cambria Math"/>
+                                </a:rPr>
+                                <m:t>ω</m:t>
+                              </m:r>
+                            </m:sub>
+                            <m:sup/>
+                            <m:e>
+                              <m:sSup>
+                                <m:e>
+                                  <m:d>
+                                    <m:dPr>
+                                      <m:begChr m:val="|"/>
+                                      <m:endChr m:val="|"/>
+                                    </m:dPr>
+                                    <m:e>
+                                      <m:sSub>
+                                        <m:e>
+                                          <m:acc>
+                                            <m:accPr>
+                                              <m:chr m:val="̂"/>
+                                            </m:accPr>
+                                            <m:e>
+                                              <m:r>
+                                                <a:rPr lang="en-US" sz="2000" i="1">
+                                                  <a:solidFill>
+                                                    <a:srgbClr val="F4F1EA"/>
+                                                  </a:solidFill>
+                                                  <a:latin typeface="Cambria Math"/>
+                                                  <a:cs typeface="Cambria Math"/>
+                                                </a:rPr>
+                                                <m:t>u</m:t>
+                                              </m:r>
+                                            </m:e>
+                                          </m:acc>
+                                        </m:e>
+                                        <m:sub>
+                                          <m:r>
+                                            <a:rPr lang="en-US" sz="2000" i="1">
+                                              <a:solidFill>
+                                                <a:srgbClr val="F4F1EA"/>
+                                              </a:solidFill>
+                                              <a:latin typeface="Cambria Math"/>
+                                              <a:cs typeface="Cambria Math"/>
+                                            </a:rPr>
+                                            <m:t>k</m:t>
+                                          </m:r>
+                                        </m:sub>
+                                      </m:sSub>
+                                    </m:e>
+                                  </m:d>
+                                </m:e>
+                                <m:sup>
+                                  <m:r>
+                                    <a:rPr lang="en-US" sz="2000" i="1">
+                                      <a:solidFill>
+                                        <a:srgbClr val="F4F1EA"/>
+                                      </a:solidFill>
+                                      <a:latin typeface="Cambria Math"/>
+                                      <a:cs typeface="Cambria Math"/>
+                                    </a:rPr>
+                                    <m:t>2</m:t>
+                                  </m:r>
+                                </m:sup>
+                              </m:sSup>
+                            </m:e>
+                          </m:nary>
+                        </m:den>
+                      </m:f>
+                    </m:oMath>
+                  </m:oMathPara>
+                </a14:m>
+              </mc:Choice>
+              <mc:Fallback>
+                <a:r>
+                  <a:rPr lang="en-US" sz="2000">
+                    <a:solidFill>
+                      <a:srgbClr val="F4F1EA"/>
+                    </a:solidFill>
+                  </a:rPr>
+                  <a:t>ω_k = Σ ω|û_k|² / Σ|û_k|²</a:t>
+                </a:r>
+              </mc:Fallback>
+            </mc:AlternateContent>
+            <a:endParaRPr lang="en-US" sz="2000" dirty="0"/>
           </a:p>
         </p:txBody>
       </p:sp>
@@ -19283,7 +22931,7 @@
         </p:nvSpPr>
         <p:spPr>
           <a:xfrm>
-            <a:off x="548640" y="5303520"/>
+            <a:off x="548640" y="5577840"/>
             <a:ext cx="11064240" cy="914400"/>
           </a:xfrm>
           <a:prstGeom prst="rect">
@@ -19300,14 +22948,14 @@
               <a:buNone/>
             </a:pPr>
             <a:r>
-              <a:rPr lang="en-US" sz="1700" dirty="0">
+              <a:rPr lang="en-US" sz="1600" dirty="0">
                 <a:solidFill>
                   <a:srgbClr val="4A5568"/>
                 </a:solidFill>
               </a:rPr>
               <a:t>Layer n sweeps through the K modes (Gauss-Seidel), then recomputes every ω_k from the new spectra. Mode 0 stays at DC. Written as in the released code.</a:t>
             </a:r>
-            <a:endParaRPr lang="en-US" sz="1700" dirty="0"/>
+            <a:endParaRPr lang="en-US" sz="1600" dirty="0"/>
           </a:p>
         </p:txBody>
       </p:sp>
